--- a/PPT/week7.pptx
+++ b/PPT/week7.pptx
@@ -5,31 +5,34 @@
     <p:sldMasterId id="2147483648" r:id="rId1"/>
   </p:sldMasterIdLst>
   <p:notesMasterIdLst>
-    <p:notesMasterId r:id="rId11"/>
+    <p:notesMasterId r:id="rId14"/>
   </p:notesMasterIdLst>
   <p:sldIdLst>
     <p:sldId id="262" r:id="rId2"/>
     <p:sldId id="278" r:id="rId3"/>
     <p:sldId id="293" r:id="rId4"/>
-    <p:sldId id="294" r:id="rId5"/>
-    <p:sldId id="286" r:id="rId6"/>
-    <p:sldId id="292" r:id="rId7"/>
-    <p:sldId id="295" r:id="rId8"/>
+    <p:sldId id="298" r:id="rId5"/>
+    <p:sldId id="294" r:id="rId6"/>
+    <p:sldId id="297" r:id="rId7"/>
+    <p:sldId id="286" r:id="rId8"/>
     <p:sldId id="296" r:id="rId9"/>
-    <p:sldId id="265" r:id="rId10"/>
+    <p:sldId id="292" r:id="rId10"/>
+    <p:sldId id="299" r:id="rId11"/>
+    <p:sldId id="295" r:id="rId12"/>
+    <p:sldId id="265" r:id="rId13"/>
   </p:sldIdLst>
   <p:sldSz cx="12192000" cy="6858000"/>
   <p:notesSz cx="6858000" cy="9144000"/>
   <p:embeddedFontLst>
     <p:embeddedFont>
       <p:font typeface="나눔바른고딕" panose="020B0603020101020101" pitchFamily="50" charset="-127"/>
-      <p:regular r:id="rId12"/>
-      <p:bold r:id="rId13"/>
+      <p:regular r:id="rId15"/>
+      <p:bold r:id="rId16"/>
     </p:embeddedFont>
     <p:embeddedFont>
       <p:font typeface="맑은 고딕" panose="020B0503020000020004" pitchFamily="50" charset="-127"/>
-      <p:regular r:id="rId14"/>
-      <p:bold r:id="rId15"/>
+      <p:regular r:id="rId17"/>
+      <p:bold r:id="rId18"/>
     </p:embeddedFont>
   </p:embeddedFontLst>
   <p:defaultTextStyle>
@@ -217,7 +220,7 @@
           <a:p>
             <a:fld id="{79FA7D5B-B91B-48D9-9BBD-A861B53BECFD}" type="datetimeFigureOut">
               <a:rPr lang="ko-KR" altLang="en-US" smtClean="0"/>
-              <a:t>2026-08-13</a:t>
+              <a:t>2026-08-14</a:t>
             </a:fld>
             <a:endParaRPr lang="ko-KR" altLang="en-US"/>
           </a:p>
@@ -568,6 +571,291 @@
 </p:notes>
 </file>
 
+<file path=ppt/notesSlides/notesSlide10.xml><?xml version="1.0" encoding="utf-8"?>
+<p:notes xmlns:a="http://schemas.openxmlformats.org/drawingml/2006/main" xmlns:r="http://schemas.openxmlformats.org/officeDocument/2006/relationships" xmlns:p="http://schemas.openxmlformats.org/presentationml/2006/main">
+  <p:cSld>
+    <p:spTree>
+      <p:nvGrpSpPr>
+        <p:cNvPr id="1" name="">
+          <a:extLst>
+            <a:ext uri="{FF2B5EF4-FFF2-40B4-BE49-F238E27FC236}">
+              <a16:creationId xmlns:a16="http://schemas.microsoft.com/office/drawing/2014/main" id="{1E2DA0FD-4C97-997E-D1EB-F0016AD00C8F}"/>
+            </a:ext>
+          </a:extLst>
+        </p:cNvPr>
+        <p:cNvGrpSpPr/>
+        <p:nvPr/>
+      </p:nvGrpSpPr>
+      <p:grpSpPr>
+        <a:xfrm>
+          <a:off x="0" y="0"/>
+          <a:ext cx="0" cy="0"/>
+          <a:chOff x="0" y="0"/>
+          <a:chExt cx="0" cy="0"/>
+        </a:xfrm>
+      </p:grpSpPr>
+      <p:sp>
+        <p:nvSpPr>
+          <p:cNvPr id="2" name="슬라이드 이미지 개체 틀 1">
+            <a:extLst>
+              <a:ext uri="{FF2B5EF4-FFF2-40B4-BE49-F238E27FC236}">
+                <a16:creationId xmlns:a16="http://schemas.microsoft.com/office/drawing/2014/main" id="{FFD9020E-AD65-3C9F-CD00-EE3C7E71BB4A}"/>
+              </a:ext>
+            </a:extLst>
+          </p:cNvPr>
+          <p:cNvSpPr>
+            <a:spLocks noGrp="1" noRot="1" noChangeAspect="1"/>
+          </p:cNvSpPr>
+          <p:nvPr>
+            <p:ph type="sldImg"/>
+          </p:nvPr>
+        </p:nvSpPr>
+        <p:spPr/>
+      </p:sp>
+      <p:sp>
+        <p:nvSpPr>
+          <p:cNvPr id="3" name="슬라이드 노트 개체 틀 2">
+            <a:extLst>
+              <a:ext uri="{FF2B5EF4-FFF2-40B4-BE49-F238E27FC236}">
+                <a16:creationId xmlns:a16="http://schemas.microsoft.com/office/drawing/2014/main" id="{FAB78DA4-E491-0599-31B0-73940C5C6717}"/>
+              </a:ext>
+            </a:extLst>
+          </p:cNvPr>
+          <p:cNvSpPr>
+            <a:spLocks noGrp="1"/>
+          </p:cNvSpPr>
+          <p:nvPr>
+            <p:ph type="body" idx="1"/>
+          </p:nvPr>
+        </p:nvSpPr>
+        <p:spPr/>
+        <p:txBody>
+          <a:bodyPr/>
+          <a:lstStyle/>
+          <a:p>
+            <a:endParaRPr lang="ko-KR" altLang="en-US" dirty="0"/>
+          </a:p>
+        </p:txBody>
+      </p:sp>
+      <p:sp>
+        <p:nvSpPr>
+          <p:cNvPr id="4" name="슬라이드 번호 개체 틀 3">
+            <a:extLst>
+              <a:ext uri="{FF2B5EF4-FFF2-40B4-BE49-F238E27FC236}">
+                <a16:creationId xmlns:a16="http://schemas.microsoft.com/office/drawing/2014/main" id="{FE2F7999-AB73-CE58-0678-D32F44A2A40A}"/>
+              </a:ext>
+            </a:extLst>
+          </p:cNvPr>
+          <p:cNvSpPr>
+            <a:spLocks noGrp="1"/>
+          </p:cNvSpPr>
+          <p:nvPr>
+            <p:ph type="sldNum" sz="quarter" idx="10"/>
+          </p:nvPr>
+        </p:nvSpPr>
+        <p:spPr/>
+        <p:txBody>
+          <a:bodyPr/>
+          <a:lstStyle/>
+          <a:p>
+            <a:fld id="{DB06232B-CCFA-4887-B271-B9E43E27353A}" type="slidenum">
+              <a:rPr lang="ko-KR" altLang="en-US" smtClean="0"/>
+              <a:t>11</a:t>
+            </a:fld>
+            <a:endParaRPr lang="ko-KR" altLang="en-US"/>
+          </a:p>
+        </p:txBody>
+      </p:sp>
+    </p:spTree>
+    <p:extLst>
+      <p:ext uri="{BB962C8B-B14F-4D97-AF65-F5344CB8AC3E}">
+        <p14:creationId xmlns:p14="http://schemas.microsoft.com/office/powerpoint/2010/main" val="2155907184"/>
+      </p:ext>
+    </p:extLst>
+  </p:cSld>
+  <p:clrMapOvr>
+    <a:masterClrMapping/>
+  </p:clrMapOvr>
+</p:notes>
+</file>
+
+<file path=ppt/notesSlides/notesSlide11.xml><?xml version="1.0" encoding="utf-8"?>
+<p:notes xmlns:a="http://schemas.openxmlformats.org/drawingml/2006/main" xmlns:r="http://schemas.openxmlformats.org/officeDocument/2006/relationships" xmlns:p="http://schemas.openxmlformats.org/presentationml/2006/main">
+  <p:cSld>
+    <p:spTree>
+      <p:nvGrpSpPr>
+        <p:cNvPr id="1" name=""/>
+        <p:cNvGrpSpPr/>
+        <p:nvPr/>
+      </p:nvGrpSpPr>
+      <p:grpSpPr>
+        <a:xfrm>
+          <a:off x="0" y="0"/>
+          <a:ext cx="0" cy="0"/>
+          <a:chOff x="0" y="0"/>
+          <a:chExt cx="0" cy="0"/>
+        </a:xfrm>
+      </p:grpSpPr>
+      <p:sp>
+        <p:nvSpPr>
+          <p:cNvPr id="2" name="슬라이드 이미지 개체 틀 1"/>
+          <p:cNvSpPr>
+            <a:spLocks noGrp="1" noRot="1" noChangeAspect="1"/>
+          </p:cNvSpPr>
+          <p:nvPr>
+            <p:ph type="sldImg"/>
+          </p:nvPr>
+        </p:nvSpPr>
+        <p:spPr/>
+      </p:sp>
+      <p:sp>
+        <p:nvSpPr>
+          <p:cNvPr id="3" name="슬라이드 노트 개체 틀 2"/>
+          <p:cNvSpPr>
+            <a:spLocks noGrp="1"/>
+          </p:cNvSpPr>
+          <p:nvPr>
+            <p:ph type="body" idx="1"/>
+          </p:nvPr>
+        </p:nvSpPr>
+        <p:spPr/>
+        <p:txBody>
+          <a:bodyPr/>
+          <a:lstStyle/>
+          <a:p>
+            <a:r>
+              <a:rPr lang="ko-KR" altLang="en-US" dirty="0"/>
+              <a:t>목표 영상 </a:t>
+            </a:r>
+            <a:r>
+              <a:rPr lang="en-US" altLang="ko-KR" dirty="0"/>
+              <a:t>: </a:t>
+            </a:r>
+          </a:p>
+          <a:p>
+            <a:pPr marL="228600" indent="-228600">
+              <a:buAutoNum type="arabicPeriod"/>
+            </a:pPr>
+            <a:r>
+              <a:rPr lang="ko-KR" altLang="en-US" dirty="0" err="1"/>
+              <a:t>어쌔신크리드</a:t>
+            </a:r>
+            <a:r>
+              <a:rPr lang="ko-KR" altLang="en-US" dirty="0"/>
+              <a:t> </a:t>
+            </a:r>
+            <a:r>
+              <a:rPr lang="ko-KR" altLang="en-US" dirty="0" err="1"/>
+              <a:t>파쿠르</a:t>
+            </a:r>
+            <a:r>
+              <a:rPr lang="ko-KR" altLang="en-US" dirty="0"/>
+              <a:t> 액션 </a:t>
+            </a:r>
+            <a:endParaRPr lang="en-US" altLang="ko-KR" dirty="0"/>
+          </a:p>
+          <a:p>
+            <a:pPr marL="685800" lvl="1" indent="-228600">
+              <a:buAutoNum type="arabicPeriod"/>
+            </a:pPr>
+            <a:r>
+              <a:rPr lang="en-US" altLang="ko-KR" dirty="0"/>
+              <a:t>https://www.youtube.com/shorts/DgF8jxONRSM</a:t>
+            </a:r>
+          </a:p>
+          <a:p>
+            <a:pPr marL="685800" lvl="1" indent="-228600">
+              <a:buAutoNum type="arabicPeriod"/>
+            </a:pPr>
+            <a:r>
+              <a:rPr lang="en-US" altLang="ko-KR" dirty="0"/>
+              <a:t>https://www.youtube.com/shorts/bMgaW5dvLzk</a:t>
+            </a:r>
+          </a:p>
+          <a:p>
+            <a:pPr marL="685800" lvl="1" indent="-228600">
+              <a:buAutoNum type="arabicPeriod"/>
+            </a:pPr>
+            <a:r>
+              <a:rPr lang="en-US" altLang="ko-KR" dirty="0"/>
+              <a:t>https://www.youtube.com/watch?v=1vhC870Phb0</a:t>
+            </a:r>
+          </a:p>
+          <a:p>
+            <a:pPr marL="685800" lvl="1" indent="-228600">
+              <a:buAutoNum type="arabicPeriod"/>
+            </a:pPr>
+            <a:r>
+              <a:rPr lang="en-US" altLang="ko-KR" dirty="0"/>
+              <a:t>https://www.youtube.com/shorts/AZEMIHgBK1E</a:t>
+            </a:r>
+          </a:p>
+          <a:p>
+            <a:pPr marL="228600" lvl="0" indent="-228600">
+              <a:buAutoNum type="arabicPeriod"/>
+            </a:pPr>
+            <a:r>
+              <a:rPr lang="ko-KR" altLang="en-US" dirty="0" err="1"/>
+              <a:t>툼레이더</a:t>
+            </a:r>
+            <a:endParaRPr lang="en-US" altLang="ko-KR" dirty="0"/>
+          </a:p>
+          <a:p>
+            <a:pPr marL="685800" lvl="1" indent="-228600">
+              <a:buAutoNum type="arabicPeriod"/>
+            </a:pPr>
+            <a:r>
+              <a:rPr lang="en-US" altLang="ko-KR" dirty="0"/>
+              <a:t>https://www.youtube.com/watch?v=reqY7n8hdSg</a:t>
+            </a:r>
+          </a:p>
+          <a:p>
+            <a:pPr marL="685800" lvl="1" indent="-228600">
+              <a:buAutoNum type="arabicPeriod"/>
+            </a:pPr>
+            <a:r>
+              <a:rPr lang="en-US" altLang="ko-KR" dirty="0"/>
+              <a:t>https://www.youtube.com/shorts/PLTIvSb6AxM</a:t>
+            </a:r>
+          </a:p>
+        </p:txBody>
+      </p:sp>
+      <p:sp>
+        <p:nvSpPr>
+          <p:cNvPr id="4" name="슬라이드 번호 개체 틀 3"/>
+          <p:cNvSpPr>
+            <a:spLocks noGrp="1"/>
+          </p:cNvSpPr>
+          <p:nvPr>
+            <p:ph type="sldNum" sz="quarter" idx="10"/>
+          </p:nvPr>
+        </p:nvSpPr>
+        <p:spPr/>
+        <p:txBody>
+          <a:bodyPr/>
+          <a:lstStyle/>
+          <a:p>
+            <a:fld id="{0F03AB99-662C-46EC-B86C-F2E227D3EFAD}" type="slidenum">
+              <a:rPr lang="ko-KR" altLang="en-US" smtClean="0"/>
+              <a:t>12</a:t>
+            </a:fld>
+            <a:endParaRPr lang="ko-KR" altLang="en-US"/>
+          </a:p>
+        </p:txBody>
+      </p:sp>
+    </p:spTree>
+    <p:extLst>
+      <p:ext uri="{BB962C8B-B14F-4D97-AF65-F5344CB8AC3E}">
+        <p14:creationId xmlns:p14="http://schemas.microsoft.com/office/powerpoint/2010/main" val="1348682730"/>
+      </p:ext>
+    </p:extLst>
+  </p:cSld>
+  <p:clrMapOvr>
+    <a:masterClrMapping/>
+  </p:clrMapOvr>
+</p:notes>
+</file>
+
 <file path=ppt/notesSlides/notesSlide2.xml><?xml version="1.0" encoding="utf-8"?>
 <p:notes xmlns:a="http://schemas.openxmlformats.org/drawingml/2006/main" xmlns:r="http://schemas.openxmlformats.org/officeDocument/2006/relationships" xmlns:p="http://schemas.openxmlformats.org/presentationml/2006/main">
   <p:cSld>
@@ -684,6 +972,114 @@
         <p:cNvPr id="1" name="">
           <a:extLst>
             <a:ext uri="{FF2B5EF4-FFF2-40B4-BE49-F238E27FC236}">
+              <a16:creationId xmlns:a16="http://schemas.microsoft.com/office/drawing/2014/main" id="{844D76CF-357D-8735-190D-586C8BD372EA}"/>
+            </a:ext>
+          </a:extLst>
+        </p:cNvPr>
+        <p:cNvGrpSpPr/>
+        <p:nvPr/>
+      </p:nvGrpSpPr>
+      <p:grpSpPr>
+        <a:xfrm>
+          <a:off x="0" y="0"/>
+          <a:ext cx="0" cy="0"/>
+          <a:chOff x="0" y="0"/>
+          <a:chExt cx="0" cy="0"/>
+        </a:xfrm>
+      </p:grpSpPr>
+      <p:sp>
+        <p:nvSpPr>
+          <p:cNvPr id="2" name="슬라이드 이미지 개체 틀 1">
+            <a:extLst>
+              <a:ext uri="{FF2B5EF4-FFF2-40B4-BE49-F238E27FC236}">
+                <a16:creationId xmlns:a16="http://schemas.microsoft.com/office/drawing/2014/main" id="{D38FAFA9-1577-6BCC-83EF-B21017C026DD}"/>
+              </a:ext>
+            </a:extLst>
+          </p:cNvPr>
+          <p:cNvSpPr>
+            <a:spLocks noGrp="1" noRot="1" noChangeAspect="1"/>
+          </p:cNvSpPr>
+          <p:nvPr>
+            <p:ph type="sldImg"/>
+          </p:nvPr>
+        </p:nvSpPr>
+        <p:spPr/>
+      </p:sp>
+      <p:sp>
+        <p:nvSpPr>
+          <p:cNvPr id="3" name="슬라이드 노트 개체 틀 2">
+            <a:extLst>
+              <a:ext uri="{FF2B5EF4-FFF2-40B4-BE49-F238E27FC236}">
+                <a16:creationId xmlns:a16="http://schemas.microsoft.com/office/drawing/2014/main" id="{DCED2ACF-4C81-5319-454C-AF9380AA83ED}"/>
+              </a:ext>
+            </a:extLst>
+          </p:cNvPr>
+          <p:cNvSpPr>
+            <a:spLocks noGrp="1"/>
+          </p:cNvSpPr>
+          <p:nvPr>
+            <p:ph type="body" idx="1"/>
+          </p:nvPr>
+        </p:nvSpPr>
+        <p:spPr/>
+        <p:txBody>
+          <a:bodyPr/>
+          <a:lstStyle/>
+          <a:p>
+            <a:endParaRPr lang="ko-KR" altLang="en-US" dirty="0"/>
+          </a:p>
+        </p:txBody>
+      </p:sp>
+      <p:sp>
+        <p:nvSpPr>
+          <p:cNvPr id="4" name="슬라이드 번호 개체 틀 3">
+            <a:extLst>
+              <a:ext uri="{FF2B5EF4-FFF2-40B4-BE49-F238E27FC236}">
+                <a16:creationId xmlns:a16="http://schemas.microsoft.com/office/drawing/2014/main" id="{3AB0939F-DBD3-C53C-A2D2-43D480D25F26}"/>
+              </a:ext>
+            </a:extLst>
+          </p:cNvPr>
+          <p:cNvSpPr>
+            <a:spLocks noGrp="1"/>
+          </p:cNvSpPr>
+          <p:nvPr>
+            <p:ph type="sldNum" sz="quarter" idx="10"/>
+          </p:nvPr>
+        </p:nvSpPr>
+        <p:spPr/>
+        <p:txBody>
+          <a:bodyPr/>
+          <a:lstStyle/>
+          <a:p>
+            <a:fld id="{DB06232B-CCFA-4887-B271-B9E43E27353A}" type="slidenum">
+              <a:rPr lang="ko-KR" altLang="en-US" smtClean="0"/>
+              <a:t>4</a:t>
+            </a:fld>
+            <a:endParaRPr lang="ko-KR" altLang="en-US"/>
+          </a:p>
+        </p:txBody>
+      </p:sp>
+    </p:spTree>
+    <p:extLst>
+      <p:ext uri="{BB962C8B-B14F-4D97-AF65-F5344CB8AC3E}">
+        <p14:creationId xmlns:p14="http://schemas.microsoft.com/office/powerpoint/2010/main" val="439416554"/>
+      </p:ext>
+    </p:extLst>
+  </p:cSld>
+  <p:clrMapOvr>
+    <a:masterClrMapping/>
+  </p:clrMapOvr>
+</p:notes>
+</file>
+
+<file path=ppt/notesSlides/notesSlide4.xml><?xml version="1.0" encoding="utf-8"?>
+<p:notes xmlns:a="http://schemas.openxmlformats.org/drawingml/2006/main" xmlns:r="http://schemas.openxmlformats.org/officeDocument/2006/relationships" xmlns:p="http://schemas.openxmlformats.org/presentationml/2006/main">
+  <p:cSld>
+    <p:spTree>
+      <p:nvGrpSpPr>
+        <p:cNvPr id="1" name="">
+          <a:extLst>
+            <a:ext uri="{FF2B5EF4-FFF2-40B4-BE49-F238E27FC236}">
               <a16:creationId xmlns:a16="http://schemas.microsoft.com/office/drawing/2014/main" id="{6AF7486E-0182-5E62-9643-32E23DB2CBFC}"/>
             </a:ext>
           </a:extLst>
@@ -765,7 +1161,7 @@
           <a:p>
             <a:fld id="{DB06232B-CCFA-4887-B271-B9E43E27353A}" type="slidenum">
               <a:rPr lang="ko-KR" altLang="en-US" smtClean="0"/>
-              <a:t>4</a:t>
+              <a:t>5</a:t>
             </a:fld>
             <a:endParaRPr lang="ko-KR" altLang="en-US"/>
           </a:p>
@@ -784,7 +1180,115 @@
 </p:notes>
 </file>
 
-<file path=ppt/notesSlides/notesSlide4.xml><?xml version="1.0" encoding="utf-8"?>
+<file path=ppt/notesSlides/notesSlide5.xml><?xml version="1.0" encoding="utf-8"?>
+<p:notes xmlns:a="http://schemas.openxmlformats.org/drawingml/2006/main" xmlns:r="http://schemas.openxmlformats.org/officeDocument/2006/relationships" xmlns:p="http://schemas.openxmlformats.org/presentationml/2006/main">
+  <p:cSld>
+    <p:spTree>
+      <p:nvGrpSpPr>
+        <p:cNvPr id="1" name="">
+          <a:extLst>
+            <a:ext uri="{FF2B5EF4-FFF2-40B4-BE49-F238E27FC236}">
+              <a16:creationId xmlns:a16="http://schemas.microsoft.com/office/drawing/2014/main" id="{479B11E3-2CFD-01B9-A55F-27930BF20C5E}"/>
+            </a:ext>
+          </a:extLst>
+        </p:cNvPr>
+        <p:cNvGrpSpPr/>
+        <p:nvPr/>
+      </p:nvGrpSpPr>
+      <p:grpSpPr>
+        <a:xfrm>
+          <a:off x="0" y="0"/>
+          <a:ext cx="0" cy="0"/>
+          <a:chOff x="0" y="0"/>
+          <a:chExt cx="0" cy="0"/>
+        </a:xfrm>
+      </p:grpSpPr>
+      <p:sp>
+        <p:nvSpPr>
+          <p:cNvPr id="2" name="슬라이드 이미지 개체 틀 1">
+            <a:extLst>
+              <a:ext uri="{FF2B5EF4-FFF2-40B4-BE49-F238E27FC236}">
+                <a16:creationId xmlns:a16="http://schemas.microsoft.com/office/drawing/2014/main" id="{171A2A79-D84F-0CF0-32CE-9499160FFEBD}"/>
+              </a:ext>
+            </a:extLst>
+          </p:cNvPr>
+          <p:cNvSpPr>
+            <a:spLocks noGrp="1" noRot="1" noChangeAspect="1"/>
+          </p:cNvSpPr>
+          <p:nvPr>
+            <p:ph type="sldImg"/>
+          </p:nvPr>
+        </p:nvSpPr>
+        <p:spPr/>
+      </p:sp>
+      <p:sp>
+        <p:nvSpPr>
+          <p:cNvPr id="3" name="슬라이드 노트 개체 틀 2">
+            <a:extLst>
+              <a:ext uri="{FF2B5EF4-FFF2-40B4-BE49-F238E27FC236}">
+                <a16:creationId xmlns:a16="http://schemas.microsoft.com/office/drawing/2014/main" id="{5332C1CE-6ABC-AF75-6BCB-104F47A66F62}"/>
+              </a:ext>
+            </a:extLst>
+          </p:cNvPr>
+          <p:cNvSpPr>
+            <a:spLocks noGrp="1"/>
+          </p:cNvSpPr>
+          <p:nvPr>
+            <p:ph type="body" idx="1"/>
+          </p:nvPr>
+        </p:nvSpPr>
+        <p:spPr/>
+        <p:txBody>
+          <a:bodyPr/>
+          <a:lstStyle/>
+          <a:p>
+            <a:endParaRPr lang="ko-KR" altLang="en-US" dirty="0"/>
+          </a:p>
+        </p:txBody>
+      </p:sp>
+      <p:sp>
+        <p:nvSpPr>
+          <p:cNvPr id="4" name="슬라이드 번호 개체 틀 3">
+            <a:extLst>
+              <a:ext uri="{FF2B5EF4-FFF2-40B4-BE49-F238E27FC236}">
+                <a16:creationId xmlns:a16="http://schemas.microsoft.com/office/drawing/2014/main" id="{15B6ACB9-6AB9-C595-F2B0-890D258A0618}"/>
+              </a:ext>
+            </a:extLst>
+          </p:cNvPr>
+          <p:cNvSpPr>
+            <a:spLocks noGrp="1"/>
+          </p:cNvSpPr>
+          <p:nvPr>
+            <p:ph type="sldNum" sz="quarter" idx="10"/>
+          </p:nvPr>
+        </p:nvSpPr>
+        <p:spPr/>
+        <p:txBody>
+          <a:bodyPr/>
+          <a:lstStyle/>
+          <a:p>
+            <a:fld id="{DB06232B-CCFA-4887-B271-B9E43E27353A}" type="slidenum">
+              <a:rPr lang="ko-KR" altLang="en-US" smtClean="0"/>
+              <a:t>6</a:t>
+            </a:fld>
+            <a:endParaRPr lang="ko-KR" altLang="en-US"/>
+          </a:p>
+        </p:txBody>
+      </p:sp>
+    </p:spTree>
+    <p:extLst>
+      <p:ext uri="{BB962C8B-B14F-4D97-AF65-F5344CB8AC3E}">
+        <p14:creationId xmlns:p14="http://schemas.microsoft.com/office/powerpoint/2010/main" val="2640702593"/>
+      </p:ext>
+    </p:extLst>
+  </p:cSld>
+  <p:clrMapOvr>
+    <a:masterClrMapping/>
+  </p:clrMapOvr>
+</p:notes>
+</file>
+
+<file path=ppt/notesSlides/notesSlide6.xml><?xml version="1.0" encoding="utf-8"?>
 <p:notes xmlns:a="http://schemas.openxmlformats.org/drawingml/2006/main" xmlns:r="http://schemas.openxmlformats.org/officeDocument/2006/relationships" xmlns:p="http://schemas.openxmlformats.org/presentationml/2006/main">
   <p:cSld>
     <p:spTree>
@@ -873,7 +1377,7 @@
           <a:p>
             <a:fld id="{DB06232B-CCFA-4887-B271-B9E43E27353A}" type="slidenum">
               <a:rPr lang="ko-KR" altLang="en-US" smtClean="0"/>
-              <a:t>5</a:t>
+              <a:t>7</a:t>
             </a:fld>
             <a:endParaRPr lang="ko-KR" altLang="en-US"/>
           </a:p>
@@ -892,7 +1396,115 @@
 </p:notes>
 </file>
 
-<file path=ppt/notesSlides/notesSlide5.xml><?xml version="1.0" encoding="utf-8"?>
+<file path=ppt/notesSlides/notesSlide7.xml><?xml version="1.0" encoding="utf-8"?>
+<p:notes xmlns:a="http://schemas.openxmlformats.org/drawingml/2006/main" xmlns:r="http://schemas.openxmlformats.org/officeDocument/2006/relationships" xmlns:p="http://schemas.openxmlformats.org/presentationml/2006/main">
+  <p:cSld>
+    <p:spTree>
+      <p:nvGrpSpPr>
+        <p:cNvPr id="1" name="">
+          <a:extLst>
+            <a:ext uri="{FF2B5EF4-FFF2-40B4-BE49-F238E27FC236}">
+              <a16:creationId xmlns:a16="http://schemas.microsoft.com/office/drawing/2014/main" id="{D8800346-FB5E-4B62-1389-C48A1339E531}"/>
+            </a:ext>
+          </a:extLst>
+        </p:cNvPr>
+        <p:cNvGrpSpPr/>
+        <p:nvPr/>
+      </p:nvGrpSpPr>
+      <p:grpSpPr>
+        <a:xfrm>
+          <a:off x="0" y="0"/>
+          <a:ext cx="0" cy="0"/>
+          <a:chOff x="0" y="0"/>
+          <a:chExt cx="0" cy="0"/>
+        </a:xfrm>
+      </p:grpSpPr>
+      <p:sp>
+        <p:nvSpPr>
+          <p:cNvPr id="2" name="슬라이드 이미지 개체 틀 1">
+            <a:extLst>
+              <a:ext uri="{FF2B5EF4-FFF2-40B4-BE49-F238E27FC236}">
+                <a16:creationId xmlns:a16="http://schemas.microsoft.com/office/drawing/2014/main" id="{C34DF4E5-CB0F-AD90-5A3D-558E0C379F03}"/>
+              </a:ext>
+            </a:extLst>
+          </p:cNvPr>
+          <p:cNvSpPr>
+            <a:spLocks noGrp="1" noRot="1" noChangeAspect="1"/>
+          </p:cNvSpPr>
+          <p:nvPr>
+            <p:ph type="sldImg"/>
+          </p:nvPr>
+        </p:nvSpPr>
+        <p:spPr/>
+      </p:sp>
+      <p:sp>
+        <p:nvSpPr>
+          <p:cNvPr id="3" name="슬라이드 노트 개체 틀 2">
+            <a:extLst>
+              <a:ext uri="{FF2B5EF4-FFF2-40B4-BE49-F238E27FC236}">
+                <a16:creationId xmlns:a16="http://schemas.microsoft.com/office/drawing/2014/main" id="{CCF77616-AA9E-23DC-9D40-1B16279FF232}"/>
+              </a:ext>
+            </a:extLst>
+          </p:cNvPr>
+          <p:cNvSpPr>
+            <a:spLocks noGrp="1"/>
+          </p:cNvSpPr>
+          <p:nvPr>
+            <p:ph type="body" idx="1"/>
+          </p:nvPr>
+        </p:nvSpPr>
+        <p:spPr/>
+        <p:txBody>
+          <a:bodyPr/>
+          <a:lstStyle/>
+          <a:p>
+            <a:endParaRPr lang="ko-KR" altLang="en-US" dirty="0"/>
+          </a:p>
+        </p:txBody>
+      </p:sp>
+      <p:sp>
+        <p:nvSpPr>
+          <p:cNvPr id="4" name="슬라이드 번호 개체 틀 3">
+            <a:extLst>
+              <a:ext uri="{FF2B5EF4-FFF2-40B4-BE49-F238E27FC236}">
+                <a16:creationId xmlns:a16="http://schemas.microsoft.com/office/drawing/2014/main" id="{2E4289CA-40B3-1D46-528B-C2A5F7BE26E6}"/>
+              </a:ext>
+            </a:extLst>
+          </p:cNvPr>
+          <p:cNvSpPr>
+            <a:spLocks noGrp="1"/>
+          </p:cNvSpPr>
+          <p:nvPr>
+            <p:ph type="sldNum" sz="quarter" idx="10"/>
+          </p:nvPr>
+        </p:nvSpPr>
+        <p:spPr/>
+        <p:txBody>
+          <a:bodyPr/>
+          <a:lstStyle/>
+          <a:p>
+            <a:fld id="{DB06232B-CCFA-4887-B271-B9E43E27353A}" type="slidenum">
+              <a:rPr lang="ko-KR" altLang="en-US" smtClean="0"/>
+              <a:t>8</a:t>
+            </a:fld>
+            <a:endParaRPr lang="ko-KR" altLang="en-US"/>
+          </a:p>
+        </p:txBody>
+      </p:sp>
+    </p:spTree>
+    <p:extLst>
+      <p:ext uri="{BB962C8B-B14F-4D97-AF65-F5344CB8AC3E}">
+        <p14:creationId xmlns:p14="http://schemas.microsoft.com/office/powerpoint/2010/main" val="955407000"/>
+      </p:ext>
+    </p:extLst>
+  </p:cSld>
+  <p:clrMapOvr>
+    <a:masterClrMapping/>
+  </p:clrMapOvr>
+</p:notes>
+</file>
+
+<file path=ppt/notesSlides/notesSlide8.xml><?xml version="1.0" encoding="utf-8"?>
 <p:notes xmlns:a="http://schemas.openxmlformats.org/drawingml/2006/main" xmlns:r="http://schemas.openxmlformats.org/officeDocument/2006/relationships" xmlns:p="http://schemas.openxmlformats.org/presentationml/2006/main">
   <p:cSld>
     <p:spTree>
@@ -981,7 +1593,7 @@
           <a:p>
             <a:fld id="{DB06232B-CCFA-4887-B271-B9E43E27353A}" type="slidenum">
               <a:rPr lang="ko-KR" altLang="en-US" smtClean="0"/>
-              <a:t>6</a:t>
+              <a:t>9</a:t>
             </a:fld>
             <a:endParaRPr lang="ko-KR" altLang="en-US"/>
           </a:p>
@@ -1000,7 +1612,7 @@
 </p:notes>
 </file>
 
-<file path=ppt/notesSlides/notesSlide6.xml><?xml version="1.0" encoding="utf-8"?>
+<file path=ppt/notesSlides/notesSlide9.xml><?xml version="1.0" encoding="utf-8"?>
 <p:notes xmlns:a="http://schemas.openxmlformats.org/drawingml/2006/main" xmlns:r="http://schemas.openxmlformats.org/officeDocument/2006/relationships" xmlns:p="http://schemas.openxmlformats.org/presentationml/2006/main">
   <p:cSld>
     <p:spTree>
@@ -1008,7 +1620,7 @@
         <p:cNvPr id="1" name="">
           <a:extLst>
             <a:ext uri="{FF2B5EF4-FFF2-40B4-BE49-F238E27FC236}">
-              <a16:creationId xmlns:a16="http://schemas.microsoft.com/office/drawing/2014/main" id="{1E2DA0FD-4C97-997E-D1EB-F0016AD00C8F}"/>
+              <a16:creationId xmlns:a16="http://schemas.microsoft.com/office/drawing/2014/main" id="{FD3EEEBF-9705-D4E8-76A0-B333C0B42037}"/>
             </a:ext>
           </a:extLst>
         </p:cNvPr>
@@ -1028,7 +1640,7 @@
           <p:cNvPr id="2" name="슬라이드 이미지 개체 틀 1">
             <a:extLst>
               <a:ext uri="{FF2B5EF4-FFF2-40B4-BE49-F238E27FC236}">
-                <a16:creationId xmlns:a16="http://schemas.microsoft.com/office/drawing/2014/main" id="{FFD9020E-AD65-3C9F-CD00-EE3C7E71BB4A}"/>
+                <a16:creationId xmlns:a16="http://schemas.microsoft.com/office/drawing/2014/main" id="{C73BB676-560B-88F1-1204-9302E122D331}"/>
               </a:ext>
             </a:extLst>
           </p:cNvPr>
@@ -1046,7 +1658,7 @@
           <p:cNvPr id="3" name="슬라이드 노트 개체 틀 2">
             <a:extLst>
               <a:ext uri="{FF2B5EF4-FFF2-40B4-BE49-F238E27FC236}">
-                <a16:creationId xmlns:a16="http://schemas.microsoft.com/office/drawing/2014/main" id="{FAB78DA4-E491-0599-31B0-73940C5C6717}"/>
+                <a16:creationId xmlns:a16="http://schemas.microsoft.com/office/drawing/2014/main" id="{69A4D885-8F2D-085A-D038-280A902E9FBE}"/>
               </a:ext>
             </a:extLst>
           </p:cNvPr>
@@ -1071,7 +1683,7 @@
           <p:cNvPr id="4" name="슬라이드 번호 개체 틀 3">
             <a:extLst>
               <a:ext uri="{FF2B5EF4-FFF2-40B4-BE49-F238E27FC236}">
-                <a16:creationId xmlns:a16="http://schemas.microsoft.com/office/drawing/2014/main" id="{FE2F7999-AB73-CE58-0678-D32F44A2A40A}"/>
+                <a16:creationId xmlns:a16="http://schemas.microsoft.com/office/drawing/2014/main" id="{FA2212D1-97CA-149A-D9C0-52FE7A30731C}"/>
               </a:ext>
             </a:extLst>
           </p:cNvPr>
@@ -1089,7 +1701,7 @@
           <a:p>
             <a:fld id="{DB06232B-CCFA-4887-B271-B9E43E27353A}" type="slidenum">
               <a:rPr lang="ko-KR" altLang="en-US" smtClean="0"/>
-              <a:t>7</a:t>
+              <a:t>10</a:t>
             </a:fld>
             <a:endParaRPr lang="ko-KR" altLang="en-US"/>
           </a:p>
@@ -1098,292 +1710,7 @@
     </p:spTree>
     <p:extLst>
       <p:ext uri="{BB962C8B-B14F-4D97-AF65-F5344CB8AC3E}">
-        <p14:creationId xmlns:p14="http://schemas.microsoft.com/office/powerpoint/2010/main" val="2155907184"/>
-      </p:ext>
-    </p:extLst>
-  </p:cSld>
-  <p:clrMapOvr>
-    <a:masterClrMapping/>
-  </p:clrMapOvr>
-</p:notes>
-</file>
-
-<file path=ppt/notesSlides/notesSlide7.xml><?xml version="1.0" encoding="utf-8"?>
-<p:notes xmlns:a="http://schemas.openxmlformats.org/drawingml/2006/main" xmlns:r="http://schemas.openxmlformats.org/officeDocument/2006/relationships" xmlns:p="http://schemas.openxmlformats.org/presentationml/2006/main">
-  <p:cSld>
-    <p:spTree>
-      <p:nvGrpSpPr>
-        <p:cNvPr id="1" name="">
-          <a:extLst>
-            <a:ext uri="{FF2B5EF4-FFF2-40B4-BE49-F238E27FC236}">
-              <a16:creationId xmlns:a16="http://schemas.microsoft.com/office/drawing/2014/main" id="{A1920679-E466-E945-3F92-F170CC944F3E}"/>
-            </a:ext>
-          </a:extLst>
-        </p:cNvPr>
-        <p:cNvGrpSpPr/>
-        <p:nvPr/>
-      </p:nvGrpSpPr>
-      <p:grpSpPr>
-        <a:xfrm>
-          <a:off x="0" y="0"/>
-          <a:ext cx="0" cy="0"/>
-          <a:chOff x="0" y="0"/>
-          <a:chExt cx="0" cy="0"/>
-        </a:xfrm>
-      </p:grpSpPr>
-      <p:sp>
-        <p:nvSpPr>
-          <p:cNvPr id="2" name="슬라이드 이미지 개체 틀 1">
-            <a:extLst>
-              <a:ext uri="{FF2B5EF4-FFF2-40B4-BE49-F238E27FC236}">
-                <a16:creationId xmlns:a16="http://schemas.microsoft.com/office/drawing/2014/main" id="{5B606D1D-A688-245B-B9C2-F1A901A17EC5}"/>
-              </a:ext>
-            </a:extLst>
-          </p:cNvPr>
-          <p:cNvSpPr>
-            <a:spLocks noGrp="1" noRot="1" noChangeAspect="1"/>
-          </p:cNvSpPr>
-          <p:nvPr>
-            <p:ph type="sldImg"/>
-          </p:nvPr>
-        </p:nvSpPr>
-        <p:spPr/>
-      </p:sp>
-      <p:sp>
-        <p:nvSpPr>
-          <p:cNvPr id="3" name="슬라이드 노트 개체 틀 2">
-            <a:extLst>
-              <a:ext uri="{FF2B5EF4-FFF2-40B4-BE49-F238E27FC236}">
-                <a16:creationId xmlns:a16="http://schemas.microsoft.com/office/drawing/2014/main" id="{8C942F22-1C1D-2785-2203-2B71EB6D1F82}"/>
-              </a:ext>
-            </a:extLst>
-          </p:cNvPr>
-          <p:cNvSpPr>
-            <a:spLocks noGrp="1"/>
-          </p:cNvSpPr>
-          <p:nvPr>
-            <p:ph type="body" idx="1"/>
-          </p:nvPr>
-        </p:nvSpPr>
-        <p:spPr/>
-        <p:txBody>
-          <a:bodyPr/>
-          <a:lstStyle/>
-          <a:p>
-            <a:endParaRPr lang="ko-KR" altLang="en-US" dirty="0"/>
-          </a:p>
-        </p:txBody>
-      </p:sp>
-      <p:sp>
-        <p:nvSpPr>
-          <p:cNvPr id="4" name="슬라이드 번호 개체 틀 3">
-            <a:extLst>
-              <a:ext uri="{FF2B5EF4-FFF2-40B4-BE49-F238E27FC236}">
-                <a16:creationId xmlns:a16="http://schemas.microsoft.com/office/drawing/2014/main" id="{5B4595F7-7018-D9FB-2500-82A17F8BFD0F}"/>
-              </a:ext>
-            </a:extLst>
-          </p:cNvPr>
-          <p:cNvSpPr>
-            <a:spLocks noGrp="1"/>
-          </p:cNvSpPr>
-          <p:nvPr>
-            <p:ph type="sldNum" sz="quarter" idx="10"/>
-          </p:nvPr>
-        </p:nvSpPr>
-        <p:spPr/>
-        <p:txBody>
-          <a:bodyPr/>
-          <a:lstStyle/>
-          <a:p>
-            <a:fld id="{DB06232B-CCFA-4887-B271-B9E43E27353A}" type="slidenum">
-              <a:rPr lang="ko-KR" altLang="en-US" smtClean="0"/>
-              <a:t>8</a:t>
-            </a:fld>
-            <a:endParaRPr lang="ko-KR" altLang="en-US"/>
-          </a:p>
-        </p:txBody>
-      </p:sp>
-    </p:spTree>
-    <p:extLst>
-      <p:ext uri="{BB962C8B-B14F-4D97-AF65-F5344CB8AC3E}">
-        <p14:creationId xmlns:p14="http://schemas.microsoft.com/office/powerpoint/2010/main" val="1407815235"/>
-      </p:ext>
-    </p:extLst>
-  </p:cSld>
-  <p:clrMapOvr>
-    <a:masterClrMapping/>
-  </p:clrMapOvr>
-</p:notes>
-</file>
-
-<file path=ppt/notesSlides/notesSlide8.xml><?xml version="1.0" encoding="utf-8"?>
-<p:notes xmlns:a="http://schemas.openxmlformats.org/drawingml/2006/main" xmlns:r="http://schemas.openxmlformats.org/officeDocument/2006/relationships" xmlns:p="http://schemas.openxmlformats.org/presentationml/2006/main">
-  <p:cSld>
-    <p:spTree>
-      <p:nvGrpSpPr>
-        <p:cNvPr id="1" name=""/>
-        <p:cNvGrpSpPr/>
-        <p:nvPr/>
-      </p:nvGrpSpPr>
-      <p:grpSpPr>
-        <a:xfrm>
-          <a:off x="0" y="0"/>
-          <a:ext cx="0" cy="0"/>
-          <a:chOff x="0" y="0"/>
-          <a:chExt cx="0" cy="0"/>
-        </a:xfrm>
-      </p:grpSpPr>
-      <p:sp>
-        <p:nvSpPr>
-          <p:cNvPr id="2" name="슬라이드 이미지 개체 틀 1"/>
-          <p:cNvSpPr>
-            <a:spLocks noGrp="1" noRot="1" noChangeAspect="1"/>
-          </p:cNvSpPr>
-          <p:nvPr>
-            <p:ph type="sldImg"/>
-          </p:nvPr>
-        </p:nvSpPr>
-        <p:spPr/>
-      </p:sp>
-      <p:sp>
-        <p:nvSpPr>
-          <p:cNvPr id="3" name="슬라이드 노트 개체 틀 2"/>
-          <p:cNvSpPr>
-            <a:spLocks noGrp="1"/>
-          </p:cNvSpPr>
-          <p:nvPr>
-            <p:ph type="body" idx="1"/>
-          </p:nvPr>
-        </p:nvSpPr>
-        <p:spPr/>
-        <p:txBody>
-          <a:bodyPr/>
-          <a:lstStyle/>
-          <a:p>
-            <a:r>
-              <a:rPr lang="ko-KR" altLang="en-US" dirty="0"/>
-              <a:t>목표 영상 </a:t>
-            </a:r>
-            <a:r>
-              <a:rPr lang="en-US" altLang="ko-KR" dirty="0"/>
-              <a:t>: </a:t>
-            </a:r>
-          </a:p>
-          <a:p>
-            <a:pPr marL="228600" indent="-228600">
-              <a:buAutoNum type="arabicPeriod"/>
-            </a:pPr>
-            <a:r>
-              <a:rPr lang="ko-KR" altLang="en-US" dirty="0" err="1"/>
-              <a:t>어쌔신크리드</a:t>
-            </a:r>
-            <a:r>
-              <a:rPr lang="ko-KR" altLang="en-US" dirty="0"/>
-              <a:t> </a:t>
-            </a:r>
-            <a:r>
-              <a:rPr lang="ko-KR" altLang="en-US" dirty="0" err="1"/>
-              <a:t>파쿠르</a:t>
-            </a:r>
-            <a:r>
-              <a:rPr lang="ko-KR" altLang="en-US" dirty="0"/>
-              <a:t> 액션 </a:t>
-            </a:r>
-            <a:endParaRPr lang="en-US" altLang="ko-KR" dirty="0"/>
-          </a:p>
-          <a:p>
-            <a:pPr marL="685800" lvl="1" indent="-228600">
-              <a:buAutoNum type="arabicPeriod"/>
-            </a:pPr>
-            <a:r>
-              <a:rPr lang="en-US" altLang="ko-KR" dirty="0"/>
-              <a:t>https://www.youtube.com/shorts/DgF8jxONRSM</a:t>
-            </a:r>
-          </a:p>
-          <a:p>
-            <a:pPr marL="685800" lvl="1" indent="-228600">
-              <a:buAutoNum type="arabicPeriod"/>
-            </a:pPr>
-            <a:r>
-              <a:rPr lang="en-US" altLang="ko-KR" dirty="0"/>
-              <a:t>https://www.youtube.com/shorts/bMgaW5dvLzk</a:t>
-            </a:r>
-          </a:p>
-          <a:p>
-            <a:pPr marL="685800" lvl="1" indent="-228600">
-              <a:buAutoNum type="arabicPeriod"/>
-            </a:pPr>
-            <a:r>
-              <a:rPr lang="en-US" altLang="ko-KR" dirty="0"/>
-              <a:t>https://www.youtube.com/watch?v=1vhC870Phb0</a:t>
-            </a:r>
-          </a:p>
-          <a:p>
-            <a:pPr marL="685800" lvl="1" indent="-228600">
-              <a:buAutoNum type="arabicPeriod"/>
-            </a:pPr>
-            <a:r>
-              <a:rPr lang="en-US" altLang="ko-KR" dirty="0"/>
-              <a:t>https://www.youtube.com/shorts/AZEMIHgBK1E</a:t>
-            </a:r>
-          </a:p>
-          <a:p>
-            <a:pPr marL="228600" lvl="0" indent="-228600">
-              <a:buAutoNum type="arabicPeriod"/>
-            </a:pPr>
-            <a:r>
-              <a:rPr lang="ko-KR" altLang="en-US" dirty="0" err="1"/>
-              <a:t>툼레이더</a:t>
-            </a:r>
-            <a:endParaRPr lang="en-US" altLang="ko-KR" dirty="0"/>
-          </a:p>
-          <a:p>
-            <a:pPr marL="685800" lvl="1" indent="-228600">
-              <a:buAutoNum type="arabicPeriod"/>
-            </a:pPr>
-            <a:r>
-              <a:rPr lang="en-US" altLang="ko-KR" dirty="0"/>
-              <a:t>https://www.youtube.com/watch?v=reqY7n8hdSg</a:t>
-            </a:r>
-          </a:p>
-          <a:p>
-            <a:pPr marL="685800" lvl="1" indent="-228600">
-              <a:buAutoNum type="arabicPeriod"/>
-            </a:pPr>
-            <a:r>
-              <a:rPr lang="en-US" altLang="ko-KR" dirty="0"/>
-              <a:t>https://www.youtube.com/shorts/PLTIvSb6AxM</a:t>
-            </a:r>
-          </a:p>
-        </p:txBody>
-      </p:sp>
-      <p:sp>
-        <p:nvSpPr>
-          <p:cNvPr id="4" name="슬라이드 번호 개체 틀 3"/>
-          <p:cNvSpPr>
-            <a:spLocks noGrp="1"/>
-          </p:cNvSpPr>
-          <p:nvPr>
-            <p:ph type="sldNum" sz="quarter" idx="10"/>
-          </p:nvPr>
-        </p:nvSpPr>
-        <p:spPr/>
-        <p:txBody>
-          <a:bodyPr/>
-          <a:lstStyle/>
-          <a:p>
-            <a:fld id="{0F03AB99-662C-46EC-B86C-F2E227D3EFAD}" type="slidenum">
-              <a:rPr lang="ko-KR" altLang="en-US" smtClean="0"/>
-              <a:t>9</a:t>
-            </a:fld>
-            <a:endParaRPr lang="ko-KR" altLang="en-US"/>
-          </a:p>
-        </p:txBody>
-      </p:sp>
-    </p:spTree>
-    <p:extLst>
-      <p:ext uri="{BB962C8B-B14F-4D97-AF65-F5344CB8AC3E}">
-        <p14:creationId xmlns:p14="http://schemas.microsoft.com/office/powerpoint/2010/main" val="1348682730"/>
+        <p14:creationId xmlns:p14="http://schemas.microsoft.com/office/powerpoint/2010/main" val="1001876854"/>
       </p:ext>
     </p:extLst>
   </p:cSld>
@@ -1540,7 +1867,7 @@
           <a:p>
             <a:fld id="{5850A429-5607-4C3C-9BC0-4142A9E07459}" type="datetimeFigureOut">
               <a:rPr lang="ko-KR" altLang="en-US" smtClean="0"/>
-              <a:t>2026-08-13</a:t>
+              <a:t>2026-08-14</a:t>
             </a:fld>
             <a:endParaRPr lang="ko-KR" altLang="en-US"/>
           </a:p>
@@ -1738,7 +2065,7 @@
           <a:p>
             <a:fld id="{5850A429-5607-4C3C-9BC0-4142A9E07459}" type="datetimeFigureOut">
               <a:rPr lang="ko-KR" altLang="en-US" smtClean="0"/>
-              <a:t>2026-08-13</a:t>
+              <a:t>2026-08-14</a:t>
             </a:fld>
             <a:endParaRPr lang="ko-KR" altLang="en-US"/>
           </a:p>
@@ -1946,7 +2273,7 @@
           <a:p>
             <a:fld id="{5850A429-5607-4C3C-9BC0-4142A9E07459}" type="datetimeFigureOut">
               <a:rPr lang="ko-KR" altLang="en-US" smtClean="0"/>
-              <a:t>2026-08-13</a:t>
+              <a:t>2026-08-14</a:t>
             </a:fld>
             <a:endParaRPr lang="ko-KR" altLang="en-US"/>
           </a:p>
@@ -2144,7 +2471,7 @@
           <a:p>
             <a:fld id="{5850A429-5607-4C3C-9BC0-4142A9E07459}" type="datetimeFigureOut">
               <a:rPr lang="ko-KR" altLang="en-US" smtClean="0"/>
-              <a:t>2026-08-13</a:t>
+              <a:t>2026-08-14</a:t>
             </a:fld>
             <a:endParaRPr lang="ko-KR" altLang="en-US"/>
           </a:p>
@@ -2419,7 +2746,7 @@
           <a:p>
             <a:fld id="{5850A429-5607-4C3C-9BC0-4142A9E07459}" type="datetimeFigureOut">
               <a:rPr lang="ko-KR" altLang="en-US" smtClean="0"/>
-              <a:t>2026-08-13</a:t>
+              <a:t>2026-08-14</a:t>
             </a:fld>
             <a:endParaRPr lang="ko-KR" altLang="en-US"/>
           </a:p>
@@ -2684,7 +3011,7 @@
           <a:p>
             <a:fld id="{5850A429-5607-4C3C-9BC0-4142A9E07459}" type="datetimeFigureOut">
               <a:rPr lang="ko-KR" altLang="en-US" smtClean="0"/>
-              <a:t>2026-08-13</a:t>
+              <a:t>2026-08-14</a:t>
             </a:fld>
             <a:endParaRPr lang="ko-KR" altLang="en-US"/>
           </a:p>
@@ -3096,7 +3423,7 @@
           <a:p>
             <a:fld id="{5850A429-5607-4C3C-9BC0-4142A9E07459}" type="datetimeFigureOut">
               <a:rPr lang="ko-KR" altLang="en-US" smtClean="0"/>
-              <a:t>2026-08-13</a:t>
+              <a:t>2026-08-14</a:t>
             </a:fld>
             <a:endParaRPr lang="ko-KR" altLang="en-US"/>
           </a:p>
@@ -3237,7 +3564,7 @@
           <a:p>
             <a:fld id="{5850A429-5607-4C3C-9BC0-4142A9E07459}" type="datetimeFigureOut">
               <a:rPr lang="ko-KR" altLang="en-US" smtClean="0"/>
-              <a:t>2026-08-13</a:t>
+              <a:t>2026-08-14</a:t>
             </a:fld>
             <a:endParaRPr lang="ko-KR" altLang="en-US"/>
           </a:p>
@@ -3350,7 +3677,7 @@
           <a:p>
             <a:fld id="{5850A429-5607-4C3C-9BC0-4142A9E07459}" type="datetimeFigureOut">
               <a:rPr lang="ko-KR" altLang="en-US" smtClean="0"/>
-              <a:t>2026-08-13</a:t>
+              <a:t>2026-08-14</a:t>
             </a:fld>
             <a:endParaRPr lang="ko-KR" altLang="en-US"/>
           </a:p>
@@ -3661,7 +3988,7 @@
           <a:p>
             <a:fld id="{5850A429-5607-4C3C-9BC0-4142A9E07459}" type="datetimeFigureOut">
               <a:rPr lang="ko-KR" altLang="en-US" smtClean="0"/>
-              <a:t>2026-08-13</a:t>
+              <a:t>2026-08-14</a:t>
             </a:fld>
             <a:endParaRPr lang="ko-KR" altLang="en-US"/>
           </a:p>
@@ -3949,7 +4276,7 @@
           <a:p>
             <a:fld id="{5850A429-5607-4C3C-9BC0-4142A9E07459}" type="datetimeFigureOut">
               <a:rPr lang="ko-KR" altLang="en-US" smtClean="0"/>
-              <a:t>2026-08-13</a:t>
+              <a:t>2026-08-14</a:t>
             </a:fld>
             <a:endParaRPr lang="ko-KR" altLang="en-US"/>
           </a:p>
@@ -4190,7 +4517,7 @@
           <a:p>
             <a:fld id="{5850A429-5607-4C3C-9BC0-4142A9E07459}" type="datetimeFigureOut">
               <a:rPr lang="ko-KR" altLang="en-US" smtClean="0"/>
-              <a:t>2026-08-13</a:t>
+              <a:t>2026-08-14</a:t>
             </a:fld>
             <a:endParaRPr lang="ko-KR" altLang="en-US"/>
           </a:p>
@@ -4742,7 +5069,7 @@
 </p:sld>
 </file>
 
-<file path=ppt/slides/slide2.xml><?xml version="1.0" encoding="utf-8"?>
+<file path=ppt/slides/slide10.xml><?xml version="1.0" encoding="utf-8"?>
 <p:sld xmlns:a="http://schemas.openxmlformats.org/drawingml/2006/main" xmlns:r="http://schemas.openxmlformats.org/officeDocument/2006/relationships" xmlns:p="http://schemas.openxmlformats.org/presentationml/2006/main">
   <p:cSld>
     <p:spTree>
@@ -4750,7 +5077,7 @@
         <p:cNvPr id="1" name="">
           <a:extLst>
             <a:ext uri="{FF2B5EF4-FFF2-40B4-BE49-F238E27FC236}">
-              <a16:creationId xmlns:a16="http://schemas.microsoft.com/office/drawing/2014/main" id="{49DA7EAA-204E-2F90-E52A-6C83B9013025}"/>
+              <a16:creationId xmlns:a16="http://schemas.microsoft.com/office/drawing/2014/main" id="{1CBE24BB-5D7A-8F3B-8F24-34D69B924A5A}"/>
             </a:ext>
           </a:extLst>
         </p:cNvPr>
@@ -4770,7 +5097,7 @@
           <p:cNvPr id="8" name="TextBox 7">
             <a:extLst>
               <a:ext uri="{FF2B5EF4-FFF2-40B4-BE49-F238E27FC236}">
-                <a16:creationId xmlns:a16="http://schemas.microsoft.com/office/drawing/2014/main" id="{701093AF-254C-83D7-8032-465A5FB513FB}"/>
+                <a16:creationId xmlns:a16="http://schemas.microsoft.com/office/drawing/2014/main" id="{6E2B98D5-580E-A807-457F-85807CB21C44}"/>
               </a:ext>
             </a:extLst>
           </p:cNvPr>
@@ -4812,7 +5139,7 @@
           <p:cNvPr id="10" name="TextBox 9">
             <a:extLst>
               <a:ext uri="{FF2B5EF4-FFF2-40B4-BE49-F238E27FC236}">
-                <a16:creationId xmlns:a16="http://schemas.microsoft.com/office/drawing/2014/main" id="{2D538815-CBEF-E37B-5659-B5091F86B485}"/>
+                <a16:creationId xmlns:a16="http://schemas.microsoft.com/office/drawing/2014/main" id="{D6625EA4-F929-FF89-7E90-15376D4D9E14}"/>
               </a:ext>
             </a:extLst>
           </p:cNvPr>
@@ -4822,7 +5149,7 @@
         <p:spPr>
           <a:xfrm>
             <a:off x="302450" y="1003762"/>
-            <a:ext cx="5366830" cy="338554"/>
+            <a:ext cx="2694247" cy="338554"/>
           </a:xfrm>
           <a:prstGeom prst="rect">
             <a:avLst/>
@@ -4840,7 +5167,7 @@
                 <a:latin typeface="나눔바른고딕" panose="020B0603020101020101" pitchFamily="34" charset="-127"/>
                 <a:ea typeface="나눔바른고딕" panose="020B0603020101020101" pitchFamily="34" charset="-127"/>
               </a:rPr>
-              <a:t>주요 작업</a:t>
+              <a:t>액션 추가</a:t>
             </a:r>
             <a:endParaRPr lang="en-US" altLang="ko-KR" sz="1600" dirty="0">
               <a:latin typeface="나눔바른고딕" panose="020B0603020101020101" pitchFamily="34" charset="-127"/>
@@ -4854,7 +5181,7 @@
           <p:cNvPr id="3" name="직선 연결선 2">
             <a:extLst>
               <a:ext uri="{FF2B5EF4-FFF2-40B4-BE49-F238E27FC236}">
-                <a16:creationId xmlns:a16="http://schemas.microsoft.com/office/drawing/2014/main" id="{76FFFECF-4B1C-95DF-32C3-2D2F19BEDAFB}"/>
+                <a16:creationId xmlns:a16="http://schemas.microsoft.com/office/drawing/2014/main" id="{417DCD18-A0E2-8C22-8875-FE255B6AC1FB}"/>
               </a:ext>
             </a:extLst>
           </p:cNvPr>
@@ -4894,7 +5221,13 @@
       </p:cxnSp>
       <p:sp>
         <p:nvSpPr>
-          <p:cNvPr id="12" name="직사각형 11"/>
+          <p:cNvPr id="12" name="직사각형 11">
+            <a:extLst>
+              <a:ext uri="{FF2B5EF4-FFF2-40B4-BE49-F238E27FC236}">
+                <a16:creationId xmlns:a16="http://schemas.microsoft.com/office/drawing/2014/main" id="{9A24D731-A04E-4B6C-65D9-AEF2860BC4E9}"/>
+              </a:ext>
+            </a:extLst>
+          </p:cNvPr>
           <p:cNvSpPr/>
           <p:nvPr/>
         </p:nvSpPr>
@@ -4987,10 +5320,10 @@
       </p:sp>
       <p:sp>
         <p:nvSpPr>
-          <p:cNvPr id="4" name="TextBox 3">
-            <a:extLst>
-              <a:ext uri="{FF2B5EF4-FFF2-40B4-BE49-F238E27FC236}">
-                <a16:creationId xmlns:a16="http://schemas.microsoft.com/office/drawing/2014/main" id="{BDC3BDF7-0C17-3E65-3F95-62AEFEB0CD86}"/>
+          <p:cNvPr id="5" name="TextBox 4">
+            <a:extLst>
+              <a:ext uri="{FF2B5EF4-FFF2-40B4-BE49-F238E27FC236}">
+                <a16:creationId xmlns:a16="http://schemas.microsoft.com/office/drawing/2014/main" id="{8BD597F4-2556-C24C-8360-597B3378317F}"/>
               </a:ext>
             </a:extLst>
           </p:cNvPr>
@@ -4999,8 +5332,8 @@
         </p:nvSpPr>
         <p:spPr>
           <a:xfrm>
-            <a:off x="302450" y="1342316"/>
-            <a:ext cx="5138684" cy="900246"/>
+            <a:off x="302449" y="1342316"/>
+            <a:ext cx="7464813" cy="346249"/>
           </a:xfrm>
           <a:prstGeom prst="rect">
             <a:avLst/>
@@ -5009,6 +5342,53 @@
         </p:spPr>
         <p:txBody>
           <a:bodyPr wrap="square" rtlCol="0">
+            <a:spAutoFit/>
+          </a:bodyPr>
+          <a:lstStyle/>
+          <a:p>
+            <a:pPr>
+              <a:lnSpc>
+                <a:spcPct val="150000"/>
+              </a:lnSpc>
+            </a:pPr>
+            <a:r>
+              <a:rPr lang="ko-KR" altLang="en-US" sz="1200" dirty="0">
+                <a:latin typeface="나눔바른고딕" panose="020B0603020101020101" pitchFamily="34" charset="-127"/>
+                <a:ea typeface="나눔바른고딕" panose="020B0603020101020101" pitchFamily="34" charset="-127"/>
+              </a:rPr>
+              <a:t>절벽 인식</a:t>
+            </a:r>
+            <a:endParaRPr lang="en-US" altLang="ko-KR" sz="1200" dirty="0">
+              <a:latin typeface="나눔바른고딕" panose="020B0603020101020101" pitchFamily="34" charset="-127"/>
+              <a:ea typeface="나눔바른고딕" panose="020B0603020101020101" pitchFamily="34" charset="-127"/>
+            </a:endParaRPr>
+          </a:p>
+        </p:txBody>
+      </p:sp>
+      <p:sp>
+        <p:nvSpPr>
+          <p:cNvPr id="7" name="TextBox 6">
+            <a:extLst>
+              <a:ext uri="{FF2B5EF4-FFF2-40B4-BE49-F238E27FC236}">
+                <a16:creationId xmlns:a16="http://schemas.microsoft.com/office/drawing/2014/main" id="{838846E5-C3BB-4F4D-2FF6-A8CA4602CF3B}"/>
+              </a:ext>
+            </a:extLst>
+          </p:cNvPr>
+          <p:cNvSpPr txBox="1"/>
+          <p:nvPr/>
+        </p:nvSpPr>
+        <p:spPr>
+          <a:xfrm>
+            <a:off x="302449" y="1727036"/>
+            <a:ext cx="6520758" cy="765594"/>
+          </a:xfrm>
+          <a:prstGeom prst="rect">
+            <a:avLst/>
+          </a:prstGeom>
+          <a:noFill/>
+        </p:spPr>
+        <p:txBody>
+          <a:bodyPr wrap="square">
             <a:spAutoFit/>
           </a:bodyPr>
           <a:lstStyle/>
@@ -5021,61 +5401,19 @@
               <a:buChar char="•"/>
             </a:pPr>
             <a:r>
-              <a:rPr lang="ko-KR" altLang="en-US" sz="1200" dirty="0">
-                <a:latin typeface="나눔바른고딕" panose="020B0603020101020101" pitchFamily="34" charset="-127"/>
-                <a:ea typeface="나눔바른고딕" panose="020B0603020101020101" pitchFamily="34" charset="-127"/>
-              </a:rPr>
-              <a:t>지형 인식 노드 정리 </a:t>
-            </a:r>
-            <a:r>
-              <a:rPr lang="en-US" altLang="ko-KR" sz="1200" dirty="0">
-                <a:latin typeface="나눔바른고딕" panose="020B0603020101020101" pitchFamily="34" charset="-127"/>
-                <a:ea typeface="나눔바른고딕" panose="020B0603020101020101" pitchFamily="34" charset="-127"/>
-              </a:rPr>
-              <a:t>: </a:t>
-            </a:r>
-            <a:r>
-              <a:rPr lang="ko-KR" altLang="en-US" sz="1200" dirty="0">
-                <a:latin typeface="나눔바른고딕" panose="020B0603020101020101" pitchFamily="34" charset="-127"/>
-                <a:ea typeface="나눔바른고딕" panose="020B0603020101020101" pitchFamily="34" charset="-127"/>
-              </a:rPr>
-              <a:t>노드 </a:t>
-            </a:r>
-            <a:r>
-              <a:rPr lang="ko-KR" altLang="en-US" sz="1200" dirty="0" err="1">
-                <a:latin typeface="나눔바른고딕" panose="020B0603020101020101" pitchFamily="34" charset="-127"/>
-                <a:ea typeface="나눔바른고딕" panose="020B0603020101020101" pitchFamily="34" charset="-127"/>
-              </a:rPr>
-              <a:t>데코레이터</a:t>
-            </a:r>
-            <a:r>
-              <a:rPr lang="ko-KR" altLang="en-US" sz="1200" dirty="0">
-                <a:latin typeface="나눔바른고딕" panose="020B0603020101020101" pitchFamily="34" charset="-127"/>
-                <a:ea typeface="나눔바른고딕" panose="020B0603020101020101" pitchFamily="34" charset="-127"/>
-              </a:rPr>
-              <a:t> 추가</a:t>
-            </a:r>
-            <a:r>
-              <a:rPr lang="en-US" altLang="ko-KR" sz="1200" dirty="0">
-                <a:latin typeface="나눔바른고딕" panose="020B0603020101020101" pitchFamily="34" charset="-127"/>
-                <a:ea typeface="나눔바른고딕" panose="020B0603020101020101" pitchFamily="34" charset="-127"/>
-              </a:rPr>
-              <a:t>, </a:t>
-            </a:r>
-            <a:r>
-              <a:rPr lang="ko-KR" altLang="en-US" sz="1200" dirty="0">
-                <a:latin typeface="나눔바른고딕" panose="020B0603020101020101" pitchFamily="34" charset="-127"/>
-                <a:ea typeface="나눔바른고딕" panose="020B0603020101020101" pitchFamily="34" charset="-127"/>
-              </a:rPr>
-              <a:t>노드 범용화 작업</a:t>
-            </a:r>
-            <a:endParaRPr lang="en-US" altLang="ko-KR" sz="1200" dirty="0">
+              <a:rPr lang="ko-KR" altLang="en-US" sz="1000" dirty="0">
+                <a:latin typeface="나눔바른고딕" panose="020B0603020101020101" pitchFamily="34" charset="-127"/>
+                <a:ea typeface="나눔바른고딕" panose="020B0603020101020101" pitchFamily="34" charset="-127"/>
+              </a:rPr>
+              <a:t>지형 인식 과정에서 분기를 추가</a:t>
+            </a:r>
+            <a:endParaRPr lang="en-US" altLang="ko-KR" sz="1000" dirty="0">
               <a:latin typeface="나눔바른고딕" panose="020B0603020101020101" pitchFamily="34" charset="-127"/>
               <a:ea typeface="나눔바른고딕" panose="020B0603020101020101" pitchFamily="34" charset="-127"/>
             </a:endParaRPr>
           </a:p>
           <a:p>
-            <a:pPr marL="171450" indent="-171450">
+            <a:pPr marL="628650" lvl="1" indent="-171450">
               <a:lnSpc>
                 <a:spcPct val="150000"/>
               </a:lnSpc>
@@ -5083,33 +5421,33 @@
               <a:buChar char="•"/>
             </a:pPr>
             <a:r>
-              <a:rPr lang="ko-KR" altLang="en-US" sz="1200" dirty="0">
-                <a:latin typeface="나눔바른고딕" panose="020B0603020101020101" pitchFamily="34" charset="-127"/>
-                <a:ea typeface="나눔바른고딕" panose="020B0603020101020101" pitchFamily="34" charset="-127"/>
-              </a:rPr>
-              <a:t>지형 유형 추가 </a:t>
-            </a:r>
-            <a:r>
-              <a:rPr lang="en-US" altLang="ko-KR" sz="1200" dirty="0">
-                <a:latin typeface="나눔바른고딕" panose="020B0603020101020101" pitchFamily="34" charset="-127"/>
-                <a:ea typeface="나눔바른고딕" panose="020B0603020101020101" pitchFamily="34" charset="-127"/>
-              </a:rPr>
-              <a:t>: Pole</a:t>
-            </a:r>
-            <a:r>
-              <a:rPr lang="ko-KR" altLang="en-US" sz="1200" dirty="0">
-                <a:latin typeface="나눔바른고딕" panose="020B0603020101020101" pitchFamily="34" charset="-127"/>
-                <a:ea typeface="나눔바른고딕" panose="020B0603020101020101" pitchFamily="34" charset="-127"/>
-              </a:rPr>
-              <a:t> 타입</a:t>
-            </a:r>
-            <a:endParaRPr lang="en-US" altLang="ko-KR" sz="1200" dirty="0">
+              <a:rPr lang="ko-KR" altLang="en-US" sz="1000" dirty="0">
+                <a:latin typeface="나눔바른고딕" panose="020B0603020101020101" pitchFamily="34" charset="-127"/>
+                <a:ea typeface="나눔바른고딕" panose="020B0603020101020101" pitchFamily="34" charset="-127"/>
+              </a:rPr>
+              <a:t>기존 </a:t>
+            </a:r>
+            <a:r>
+              <a:rPr lang="en-US" altLang="ko-KR" sz="1000" dirty="0">
+                <a:latin typeface="나눔바른고딕" panose="020B0603020101020101" pitchFamily="34" charset="-127"/>
+                <a:ea typeface="나눔바른고딕" panose="020B0603020101020101" pitchFamily="34" charset="-127"/>
+              </a:rPr>
+              <a:t>: </a:t>
+            </a:r>
+            <a:r>
+              <a:rPr lang="ko-KR" altLang="en-US" sz="1000" dirty="0">
+                <a:latin typeface="나눔바른고딕" panose="020B0603020101020101" pitchFamily="34" charset="-127"/>
+                <a:ea typeface="나눔바른고딕" panose="020B0603020101020101" pitchFamily="34" charset="-127"/>
+              </a:rPr>
+              <a:t>정면에 장애물이 없으면 그대로 종료</a:t>
+            </a:r>
+            <a:endParaRPr lang="en-US" altLang="ko-KR" sz="1000" dirty="0">
               <a:latin typeface="나눔바른고딕" panose="020B0603020101020101" pitchFamily="34" charset="-127"/>
               <a:ea typeface="나눔바른고딕" panose="020B0603020101020101" pitchFamily="34" charset="-127"/>
             </a:endParaRPr>
           </a:p>
           <a:p>
-            <a:pPr marL="171450" indent="-171450">
+            <a:pPr marL="628650" lvl="1" indent="-171450">
               <a:lnSpc>
                 <a:spcPct val="150000"/>
               </a:lnSpc>
@@ -5117,65 +5455,154 @@
               <a:buChar char="•"/>
             </a:pPr>
             <a:r>
-              <a:rPr lang="ko-KR" altLang="en-US" sz="1200" dirty="0">
-                <a:latin typeface="나눔바른고딕" panose="020B0603020101020101" pitchFamily="34" charset="-127"/>
-                <a:ea typeface="나눔바른고딕" panose="020B0603020101020101" pitchFamily="34" charset="-127"/>
-              </a:rPr>
-              <a:t>액션 추가</a:t>
-            </a:r>
-            <a:r>
-              <a:rPr lang="en-US" altLang="ko-KR" sz="1200" dirty="0">
-                <a:latin typeface="나눔바른고딕" panose="020B0603020101020101" pitchFamily="34" charset="-127"/>
-                <a:ea typeface="나눔바른고딕" panose="020B0603020101020101" pitchFamily="34" charset="-127"/>
-              </a:rPr>
-              <a:t> : </a:t>
-            </a:r>
-            <a:r>
-              <a:rPr lang="ko-KR" altLang="en-US" sz="1200" dirty="0">
-                <a:latin typeface="나눔바른고딕" panose="020B0603020101020101" pitchFamily="34" charset="-127"/>
-                <a:ea typeface="나눔바른고딕" panose="020B0603020101020101" pitchFamily="34" charset="-127"/>
-              </a:rPr>
-              <a:t>절벽 인식</a:t>
-            </a:r>
-            <a:r>
-              <a:rPr lang="en-US" altLang="ko-KR" sz="1200" dirty="0">
+              <a:rPr lang="ko-KR" altLang="en-US" sz="1000" dirty="0">
+                <a:latin typeface="나눔바른고딕" panose="020B0603020101020101" pitchFamily="34" charset="-127"/>
+                <a:ea typeface="나눔바른고딕" panose="020B0603020101020101" pitchFamily="34" charset="-127"/>
+              </a:rPr>
+              <a:t>신규 </a:t>
+            </a:r>
+            <a:r>
+              <a:rPr lang="en-US" altLang="ko-KR" sz="1000" dirty="0">
+                <a:latin typeface="나눔바른고딕" panose="020B0603020101020101" pitchFamily="34" charset="-127"/>
+                <a:ea typeface="나눔바른고딕" panose="020B0603020101020101" pitchFamily="34" charset="-127"/>
+              </a:rPr>
+              <a:t>: </a:t>
+            </a:r>
+            <a:r>
+              <a:rPr lang="ko-KR" altLang="en-US" sz="1000" dirty="0">
+                <a:latin typeface="나눔바른고딕" panose="020B0603020101020101" pitchFamily="34" charset="-127"/>
+                <a:ea typeface="나눔바른고딕" panose="020B0603020101020101" pitchFamily="34" charset="-127"/>
+              </a:rPr>
+              <a:t>정면에 장애물이 없으면</a:t>
+            </a:r>
+            <a:r>
+              <a:rPr lang="en-US" altLang="ko-KR" sz="1000" dirty="0">
                 <a:latin typeface="나눔바른고딕" panose="020B0603020101020101" pitchFamily="34" charset="-127"/>
                 <a:ea typeface="나눔바른고딕" panose="020B0603020101020101" pitchFamily="34" charset="-127"/>
               </a:rPr>
               <a:t>, </a:t>
             </a:r>
             <a:r>
-              <a:rPr lang="ko-KR" altLang="en-US" sz="1200" dirty="0">
-                <a:latin typeface="나눔바른고딕" panose="020B0603020101020101" pitchFamily="34" charset="-127"/>
-                <a:ea typeface="나눔바른고딕" panose="020B0603020101020101" pitchFamily="34" charset="-127"/>
-              </a:rPr>
-              <a:t>특수 장애물 착지 시 전환</a:t>
-            </a:r>
-            <a:r>
-              <a:rPr lang="en-US" altLang="ko-KR" sz="1200" dirty="0">
-                <a:latin typeface="나눔바른고딕" panose="020B0603020101020101" pitchFamily="34" charset="-127"/>
-                <a:ea typeface="나눔바른고딕" panose="020B0603020101020101" pitchFamily="34" charset="-127"/>
-              </a:rPr>
-              <a:t>, </a:t>
-            </a:r>
-            <a:r>
-              <a:rPr lang="ko-KR" altLang="en-US" sz="1200" dirty="0">
-                <a:latin typeface="나눔바른고딕" panose="020B0603020101020101" pitchFamily="34" charset="-127"/>
-                <a:ea typeface="나눔바른고딕" panose="020B0603020101020101" pitchFamily="34" charset="-127"/>
-              </a:rPr>
-              <a:t>가속도에 따른 액션</a:t>
-            </a:r>
-            <a:endParaRPr lang="en-US" altLang="ko-KR" sz="1200" dirty="0">
+              <a:rPr lang="ko-KR" altLang="en-US" sz="1000" dirty="0">
+                <a:latin typeface="나눔바른고딕" panose="020B0603020101020101" pitchFamily="34" charset="-127"/>
+                <a:ea typeface="나눔바른고딕" panose="020B0603020101020101" pitchFamily="34" charset="-127"/>
+              </a:rPr>
+              <a:t>한번 바로 앞이 절벽인지 확인</a:t>
+            </a:r>
+            <a:endParaRPr lang="en-US" altLang="ko-KR" sz="1000" dirty="0">
               <a:latin typeface="나눔바른고딕" panose="020B0603020101020101" pitchFamily="34" charset="-127"/>
               <a:ea typeface="나눔바른고딕" panose="020B0603020101020101" pitchFamily="34" charset="-127"/>
             </a:endParaRPr>
           </a:p>
         </p:txBody>
       </p:sp>
+      <p:sp>
+        <p:nvSpPr>
+          <p:cNvPr id="11" name="직사각형 10">
+            <a:extLst>
+              <a:ext uri="{FF2B5EF4-FFF2-40B4-BE49-F238E27FC236}">
+                <a16:creationId xmlns:a16="http://schemas.microsoft.com/office/drawing/2014/main" id="{421081CC-EE78-7AF2-8880-C7059B060CA8}"/>
+              </a:ext>
+            </a:extLst>
+          </p:cNvPr>
+          <p:cNvSpPr/>
+          <p:nvPr/>
+        </p:nvSpPr>
+        <p:spPr>
+          <a:xfrm>
+            <a:off x="6041662" y="2841931"/>
+            <a:ext cx="3575373" cy="3197361"/>
+          </a:xfrm>
+          <a:prstGeom prst="rect">
+            <a:avLst/>
+          </a:prstGeom>
+        </p:spPr>
+        <p:style>
+          <a:lnRef idx="2">
+            <a:schemeClr val="accent1">
+              <a:shade val="15000"/>
+            </a:schemeClr>
+          </a:lnRef>
+          <a:fillRef idx="1">
+            <a:schemeClr val="accent1"/>
+          </a:fillRef>
+          <a:effectRef idx="0">
+            <a:schemeClr val="accent1"/>
+          </a:effectRef>
+          <a:fontRef idx="minor">
+            <a:schemeClr val="lt1"/>
+          </a:fontRef>
+        </p:style>
+        <p:txBody>
+          <a:bodyPr rtlCol="0" anchor="ctr"/>
+          <a:lstStyle/>
+          <a:p>
+            <a:pPr algn="ctr"/>
+            <a:r>
+              <a:rPr lang="ko-KR" altLang="en-US" dirty="0" err="1"/>
+              <a:t>낭떨어지</a:t>
+            </a:r>
+            <a:r>
+              <a:rPr lang="ko-KR" altLang="en-US" dirty="0"/>
+              <a:t> 인식 후 매달리기</a:t>
+            </a:r>
+          </a:p>
+        </p:txBody>
+      </p:sp>
+      <p:sp>
+        <p:nvSpPr>
+          <p:cNvPr id="4" name="직사각형 3">
+            <a:extLst>
+              <a:ext uri="{FF2B5EF4-FFF2-40B4-BE49-F238E27FC236}">
+                <a16:creationId xmlns:a16="http://schemas.microsoft.com/office/drawing/2014/main" id="{2D63CD54-3F66-9A2C-089B-71F6EB9F4B43}"/>
+              </a:ext>
+            </a:extLst>
+          </p:cNvPr>
+          <p:cNvSpPr/>
+          <p:nvPr/>
+        </p:nvSpPr>
+        <p:spPr>
+          <a:xfrm>
+            <a:off x="2120860" y="2841932"/>
+            <a:ext cx="3575373" cy="3197361"/>
+          </a:xfrm>
+          <a:prstGeom prst="rect">
+            <a:avLst/>
+          </a:prstGeom>
+        </p:spPr>
+        <p:style>
+          <a:lnRef idx="2">
+            <a:schemeClr val="accent1">
+              <a:shade val="15000"/>
+            </a:schemeClr>
+          </a:lnRef>
+          <a:fillRef idx="1">
+            <a:schemeClr val="accent1"/>
+          </a:fillRef>
+          <a:effectRef idx="0">
+            <a:schemeClr val="accent1"/>
+          </a:effectRef>
+          <a:fontRef idx="minor">
+            <a:schemeClr val="lt1"/>
+          </a:fontRef>
+        </p:style>
+        <p:txBody>
+          <a:bodyPr rtlCol="0" anchor="ctr"/>
+          <a:lstStyle/>
+          <a:p>
+            <a:pPr algn="ctr"/>
+            <a:r>
+              <a:rPr lang="ko-KR" altLang="en-US" dirty="0"/>
+              <a:t>추가된 분기 도식</a:t>
+            </a:r>
+            <a:endParaRPr lang="en-US" altLang="ko-KR" dirty="0"/>
+          </a:p>
+        </p:txBody>
+      </p:sp>
     </p:spTree>
     <p:extLst>
       <p:ext uri="{BB962C8B-B14F-4D97-AF65-F5344CB8AC3E}">
-        <p14:creationId xmlns:p14="http://schemas.microsoft.com/office/powerpoint/2010/main" val="3140903062"/>
+        <p14:creationId xmlns:p14="http://schemas.microsoft.com/office/powerpoint/2010/main" val="529022250"/>
       </p:ext>
     </p:extLst>
   </p:cSld>
@@ -5185,7 +5612,7 @@
 </p:sld>
 </file>
 
-<file path=ppt/slides/slide3.xml><?xml version="1.0" encoding="utf-8"?>
+<file path=ppt/slides/slide11.xml><?xml version="1.0" encoding="utf-8"?>
 <p:sld xmlns:a="http://schemas.openxmlformats.org/drawingml/2006/main" xmlns:r="http://schemas.openxmlformats.org/officeDocument/2006/relationships" xmlns:p="http://schemas.openxmlformats.org/presentationml/2006/main">
   <p:cSld>
     <p:spTree>
@@ -5193,7 +5620,7 @@
         <p:cNvPr id="1" name="">
           <a:extLst>
             <a:ext uri="{FF2B5EF4-FFF2-40B4-BE49-F238E27FC236}">
-              <a16:creationId xmlns:a16="http://schemas.microsoft.com/office/drawing/2014/main" id="{DE735819-D7B3-CF39-35EB-069EA87D2EF7}"/>
+              <a16:creationId xmlns:a16="http://schemas.microsoft.com/office/drawing/2014/main" id="{A8D56238-76E4-9E50-A07C-ABC6D13D8966}"/>
             </a:ext>
           </a:extLst>
         </p:cNvPr>
@@ -5213,7 +5640,7 @@
           <p:cNvPr id="8" name="TextBox 7">
             <a:extLst>
               <a:ext uri="{FF2B5EF4-FFF2-40B4-BE49-F238E27FC236}">
-                <a16:creationId xmlns:a16="http://schemas.microsoft.com/office/drawing/2014/main" id="{7893A0CE-E840-1641-1DFF-77DE70CE1BD8}"/>
+                <a16:creationId xmlns:a16="http://schemas.microsoft.com/office/drawing/2014/main" id="{C10CE039-5A9C-762D-4656-54FB6FF9E20B}"/>
               </a:ext>
             </a:extLst>
           </p:cNvPr>
@@ -5255,7 +5682,7 @@
           <p:cNvPr id="10" name="TextBox 9">
             <a:extLst>
               <a:ext uri="{FF2B5EF4-FFF2-40B4-BE49-F238E27FC236}">
-                <a16:creationId xmlns:a16="http://schemas.microsoft.com/office/drawing/2014/main" id="{5BFC52FE-14B5-B053-4E1A-AC5E5AA398AC}"/>
+                <a16:creationId xmlns:a16="http://schemas.microsoft.com/office/drawing/2014/main" id="{05F31773-1F53-E68D-41C3-51D0BCE85CED}"/>
               </a:ext>
             </a:extLst>
           </p:cNvPr>
@@ -5283,7 +5710,7 @@
                 <a:latin typeface="나눔바른고딕" panose="020B0603020101020101" pitchFamily="34" charset="-127"/>
                 <a:ea typeface="나눔바른고딕" panose="020B0603020101020101" pitchFamily="34" charset="-127"/>
               </a:rPr>
-              <a:t>지형 인식 노드 정리</a:t>
+              <a:t>액션 추가</a:t>
             </a:r>
             <a:endParaRPr lang="en-US" altLang="ko-KR" sz="1600" dirty="0">
               <a:latin typeface="나눔바른고딕" panose="020B0603020101020101" pitchFamily="34" charset="-127"/>
@@ -5297,7 +5724,7 @@
           <p:cNvPr id="3" name="직선 연결선 2">
             <a:extLst>
               <a:ext uri="{FF2B5EF4-FFF2-40B4-BE49-F238E27FC236}">
-                <a16:creationId xmlns:a16="http://schemas.microsoft.com/office/drawing/2014/main" id="{78A2120E-10EF-9566-14D3-0DC3EA84A746}"/>
+                <a16:creationId xmlns:a16="http://schemas.microsoft.com/office/drawing/2014/main" id="{3D65B191-ED48-C2B1-3CFE-AEFDD16CBEEE}"/>
               </a:ext>
             </a:extLst>
           </p:cNvPr>
@@ -5340,7 +5767,7 @@
           <p:cNvPr id="12" name="직사각형 11">
             <a:extLst>
               <a:ext uri="{FF2B5EF4-FFF2-40B4-BE49-F238E27FC236}">
-                <a16:creationId xmlns:a16="http://schemas.microsoft.com/office/drawing/2014/main" id="{4377C070-DD2B-5A29-0FD1-4CF5EC95B5E1}"/>
+                <a16:creationId xmlns:a16="http://schemas.microsoft.com/office/drawing/2014/main" id="{BCBE560F-B335-2164-8D29-14394C03809D}"/>
               </a:ext>
             </a:extLst>
           </p:cNvPr>
@@ -5439,68 +5866,7 @@
           <p:cNvPr id="5" name="TextBox 4">
             <a:extLst>
               <a:ext uri="{FF2B5EF4-FFF2-40B4-BE49-F238E27FC236}">
-                <a16:creationId xmlns:a16="http://schemas.microsoft.com/office/drawing/2014/main" id="{31CE87BC-1010-EA34-C28A-01DE8F409152}"/>
-              </a:ext>
-            </a:extLst>
-          </p:cNvPr>
-          <p:cNvSpPr txBox="1"/>
-          <p:nvPr/>
-        </p:nvSpPr>
-        <p:spPr>
-          <a:xfrm>
-            <a:off x="302449" y="1727036"/>
-            <a:ext cx="6520758" cy="534762"/>
-          </a:xfrm>
-          <a:prstGeom prst="rect">
-            <a:avLst/>
-          </a:prstGeom>
-          <a:noFill/>
-        </p:spPr>
-        <p:txBody>
-          <a:bodyPr wrap="square">
-            <a:spAutoFit/>
-          </a:bodyPr>
-          <a:lstStyle/>
-          <a:p>
-            <a:pPr marL="171450" indent="-171450">
-              <a:lnSpc>
-                <a:spcPct val="150000"/>
-              </a:lnSpc>
-              <a:buFont typeface="Arial" panose="020B0604020202020204" pitchFamily="34" charset="0"/>
-              <a:buChar char="•"/>
-            </a:pPr>
-            <a:r>
-              <a:rPr lang="en-US" altLang="ko-KR" sz="1000" dirty="0">
-                <a:latin typeface="나눔바른고딕" panose="020B0603020101020101" pitchFamily="34" charset="-127"/>
-                <a:ea typeface="나눔바른고딕" panose="020B0603020101020101" pitchFamily="34" charset="-127"/>
-              </a:rPr>
-              <a:t>-</a:t>
-            </a:r>
-          </a:p>
-          <a:p>
-            <a:pPr marL="171450" indent="-171450">
-              <a:lnSpc>
-                <a:spcPct val="150000"/>
-              </a:lnSpc>
-              <a:buFont typeface="Arial" panose="020B0604020202020204" pitchFamily="34" charset="0"/>
-              <a:buChar char="•"/>
-            </a:pPr>
-            <a:r>
-              <a:rPr lang="en-US" altLang="ko-KR" sz="1000" dirty="0">
-                <a:latin typeface="나눔바른고딕" panose="020B0603020101020101" pitchFamily="34" charset="-127"/>
-                <a:ea typeface="나눔바른고딕" panose="020B0603020101020101" pitchFamily="34" charset="-127"/>
-              </a:rPr>
-              <a:t>-</a:t>
-            </a:r>
-          </a:p>
-        </p:txBody>
-      </p:sp>
-      <p:sp>
-        <p:nvSpPr>
-          <p:cNvPr id="11" name="TextBox 10">
-            <a:extLst>
-              <a:ext uri="{FF2B5EF4-FFF2-40B4-BE49-F238E27FC236}">
-                <a16:creationId xmlns:a16="http://schemas.microsoft.com/office/drawing/2014/main" id="{B14653B1-0EA2-50B6-A438-6B017EBEA53C}"/>
+                <a16:creationId xmlns:a16="http://schemas.microsoft.com/office/drawing/2014/main" id="{9ABA39A3-5B85-061F-D2FA-FA5D5CE3074C}"/>
               </a:ext>
             </a:extLst>
           </p:cNvPr>
@@ -5529,18 +5895,11 @@
               </a:lnSpc>
             </a:pPr>
             <a:r>
-              <a:rPr lang="ko-KR" altLang="en-US" sz="1200" dirty="0" err="1">
-                <a:latin typeface="나눔바른고딕" panose="020B0603020101020101" pitchFamily="34" charset="-127"/>
-                <a:ea typeface="나눔바른고딕" panose="020B0603020101020101" pitchFamily="34" charset="-127"/>
-              </a:rPr>
-              <a:t>데코레이터</a:t>
-            </a:r>
-            <a:r>
               <a:rPr lang="ko-KR" altLang="en-US" sz="1200" dirty="0">
                 <a:latin typeface="나눔바른고딕" panose="020B0603020101020101" pitchFamily="34" charset="-127"/>
                 <a:ea typeface="나눔바른고딕" panose="020B0603020101020101" pitchFamily="34" charset="-127"/>
               </a:rPr>
-              <a:t> 추가</a:t>
+              <a:t>누락 상황 처리 추가</a:t>
             </a:r>
             <a:endParaRPr lang="en-US" altLang="ko-KR" sz="1200" dirty="0">
               <a:latin typeface="나눔바른고딕" panose="020B0603020101020101" pitchFamily="34" charset="-127"/>
@@ -5549,274 +5908,12 @@
           </a:p>
         </p:txBody>
       </p:sp>
-    </p:spTree>
-    <p:extLst>
-      <p:ext uri="{BB962C8B-B14F-4D97-AF65-F5344CB8AC3E}">
-        <p14:creationId xmlns:p14="http://schemas.microsoft.com/office/powerpoint/2010/main" val="3465933730"/>
-      </p:ext>
-    </p:extLst>
-  </p:cSld>
-  <p:clrMapOvr>
-    <a:masterClrMapping/>
-  </p:clrMapOvr>
-</p:sld>
-</file>
-
-<file path=ppt/slides/slide4.xml><?xml version="1.0" encoding="utf-8"?>
-<p:sld xmlns:a="http://schemas.openxmlformats.org/drawingml/2006/main" xmlns:r="http://schemas.openxmlformats.org/officeDocument/2006/relationships" xmlns:p="http://schemas.openxmlformats.org/presentationml/2006/main">
-  <p:cSld>
-    <p:spTree>
-      <p:nvGrpSpPr>
-        <p:cNvPr id="1" name="">
-          <a:extLst>
-            <a:ext uri="{FF2B5EF4-FFF2-40B4-BE49-F238E27FC236}">
-              <a16:creationId xmlns:a16="http://schemas.microsoft.com/office/drawing/2014/main" id="{0F9F1844-18B0-18CE-83F4-0E3CE77A4880}"/>
-            </a:ext>
-          </a:extLst>
-        </p:cNvPr>
-        <p:cNvGrpSpPr/>
-        <p:nvPr/>
-      </p:nvGrpSpPr>
-      <p:grpSpPr>
-        <a:xfrm>
-          <a:off x="0" y="0"/>
-          <a:ext cx="0" cy="0"/>
-          <a:chOff x="0" y="0"/>
-          <a:chExt cx="0" cy="0"/>
-        </a:xfrm>
-      </p:grpSpPr>
-      <p:sp>
-        <p:nvSpPr>
-          <p:cNvPr id="8" name="TextBox 7">
-            <a:extLst>
-              <a:ext uri="{FF2B5EF4-FFF2-40B4-BE49-F238E27FC236}">
-                <a16:creationId xmlns:a16="http://schemas.microsoft.com/office/drawing/2014/main" id="{ECA14A0A-F134-4C71-53B8-E1E0121EE476}"/>
-              </a:ext>
-            </a:extLst>
-          </p:cNvPr>
-          <p:cNvSpPr txBox="1"/>
-          <p:nvPr/>
-        </p:nvSpPr>
-        <p:spPr>
-          <a:xfrm>
-            <a:off x="302451" y="315453"/>
-            <a:ext cx="4944140" cy="369332"/>
-          </a:xfrm>
-          <a:prstGeom prst="rect">
-            <a:avLst/>
-          </a:prstGeom>
-          <a:noFill/>
-        </p:spPr>
-        <p:txBody>
-          <a:bodyPr wrap="square" rtlCol="0">
-            <a:spAutoFit/>
-          </a:bodyPr>
-          <a:lstStyle/>
-          <a:p>
-            <a:r>
-              <a:rPr lang="ko-KR" altLang="en-US" dirty="0">
-                <a:latin typeface="나눔바른고딕" panose="020B0603020101020101" pitchFamily="34" charset="-127"/>
-                <a:ea typeface="나눔바른고딕" panose="020B0603020101020101" pitchFamily="34" charset="-127"/>
-              </a:rPr>
-              <a:t>이번 주 작업 내역</a:t>
-            </a:r>
-            <a:endParaRPr lang="en-US" altLang="ko-KR" dirty="0">
-              <a:latin typeface="나눔바른고딕" panose="020B0603020101020101" pitchFamily="34" charset="-127"/>
-              <a:ea typeface="나눔바른고딕" panose="020B0603020101020101" pitchFamily="34" charset="-127"/>
-            </a:endParaRPr>
-          </a:p>
-        </p:txBody>
-      </p:sp>
-      <p:sp>
-        <p:nvSpPr>
-          <p:cNvPr id="10" name="TextBox 9">
-            <a:extLst>
-              <a:ext uri="{FF2B5EF4-FFF2-40B4-BE49-F238E27FC236}">
-                <a16:creationId xmlns:a16="http://schemas.microsoft.com/office/drawing/2014/main" id="{EA6B35A1-8B88-D301-3B0A-D9B11BFBFAEB}"/>
-              </a:ext>
-            </a:extLst>
-          </p:cNvPr>
-          <p:cNvSpPr txBox="1"/>
-          <p:nvPr/>
-        </p:nvSpPr>
-        <p:spPr>
-          <a:xfrm>
-            <a:off x="302450" y="1003762"/>
-            <a:ext cx="2694247" cy="338554"/>
-          </a:xfrm>
-          <a:prstGeom prst="rect">
-            <a:avLst/>
-          </a:prstGeom>
-          <a:noFill/>
-        </p:spPr>
-        <p:txBody>
-          <a:bodyPr wrap="square" rtlCol="0">
-            <a:spAutoFit/>
-          </a:bodyPr>
-          <a:lstStyle/>
-          <a:p>
-            <a:r>
-              <a:rPr lang="ko-KR" altLang="en-US" sz="1600" dirty="0">
-                <a:latin typeface="나눔바른고딕" panose="020B0603020101020101" pitchFamily="34" charset="-127"/>
-                <a:ea typeface="나눔바른고딕" panose="020B0603020101020101" pitchFamily="34" charset="-127"/>
-              </a:rPr>
-              <a:t>지형 인식 노드 정리</a:t>
-            </a:r>
-            <a:endParaRPr lang="en-US" altLang="ko-KR" sz="1600" dirty="0">
-              <a:latin typeface="나눔바른고딕" panose="020B0603020101020101" pitchFamily="34" charset="-127"/>
-              <a:ea typeface="나눔바른고딕" panose="020B0603020101020101" pitchFamily="34" charset="-127"/>
-            </a:endParaRPr>
-          </a:p>
-        </p:txBody>
-      </p:sp>
-      <p:cxnSp>
-        <p:nvCxnSpPr>
-          <p:cNvPr id="3" name="직선 연결선 2">
-            <a:extLst>
-              <a:ext uri="{FF2B5EF4-FFF2-40B4-BE49-F238E27FC236}">
-                <a16:creationId xmlns:a16="http://schemas.microsoft.com/office/drawing/2014/main" id="{258A3733-2AD1-4D1A-3DFF-F198994532A5}"/>
-              </a:ext>
-            </a:extLst>
-          </p:cNvPr>
-          <p:cNvCxnSpPr>
-            <a:cxnSpLocks/>
-          </p:cNvCxnSpPr>
-          <p:nvPr/>
-        </p:nvCxnSpPr>
-        <p:spPr>
-          <a:xfrm>
-            <a:off x="387511" y="818707"/>
-            <a:ext cx="11308303" cy="0"/>
-          </a:xfrm>
-          <a:prstGeom prst="line">
-            <a:avLst/>
-          </a:prstGeom>
-          <a:ln>
-            <a:solidFill>
-              <a:schemeClr val="tx2"/>
-            </a:solidFill>
-          </a:ln>
-        </p:spPr>
-        <p:style>
-          <a:lnRef idx="2">
-            <a:schemeClr val="accent1"/>
-          </a:lnRef>
-          <a:fillRef idx="0">
-            <a:schemeClr val="accent1"/>
-          </a:fillRef>
-          <a:effectRef idx="1">
-            <a:schemeClr val="accent1"/>
-          </a:effectRef>
-          <a:fontRef idx="minor">
-            <a:schemeClr val="tx1"/>
-          </a:fontRef>
-        </p:style>
-      </p:cxnSp>
-      <p:sp>
-        <p:nvSpPr>
-          <p:cNvPr id="12" name="직사각형 11">
-            <a:extLst>
-              <a:ext uri="{FF2B5EF4-FFF2-40B4-BE49-F238E27FC236}">
-                <a16:creationId xmlns:a16="http://schemas.microsoft.com/office/drawing/2014/main" id="{964FFFBB-7E15-8E7F-C4CC-6F417C532ADB}"/>
-              </a:ext>
-            </a:extLst>
-          </p:cNvPr>
-          <p:cNvSpPr/>
-          <p:nvPr/>
-        </p:nvSpPr>
-        <p:spPr>
-          <a:xfrm>
-            <a:off x="10443172" y="118011"/>
-            <a:ext cx="1596912" cy="246221"/>
-          </a:xfrm>
-          <a:prstGeom prst="rect">
-            <a:avLst/>
-          </a:prstGeom>
-        </p:spPr>
-        <p:txBody>
-          <a:bodyPr wrap="none">
-            <a:spAutoFit/>
-          </a:bodyPr>
-          <a:lstStyle/>
-          <a:p>
-            <a:r>
-              <a:rPr lang="ko-KR" altLang="en-US" sz="1000" dirty="0" err="1">
-                <a:solidFill>
-                  <a:schemeClr val="bg1">
-                    <a:lumMod val="75000"/>
-                  </a:schemeClr>
-                </a:solidFill>
-                <a:latin typeface="나눔바른고딕" panose="020B0603020101020101" pitchFamily="34" charset="-127"/>
-                <a:ea typeface="나눔바른고딕" panose="020B0603020101020101" pitchFamily="34" charset="-127"/>
-              </a:rPr>
-              <a:t>펄어비스</a:t>
-            </a:r>
-            <a:r>
-              <a:rPr lang="ko-KR" altLang="en-US" sz="1000" dirty="0">
-                <a:solidFill>
-                  <a:schemeClr val="bg1">
-                    <a:lumMod val="75000"/>
-                  </a:schemeClr>
-                </a:solidFill>
-                <a:latin typeface="나눔바른고딕" panose="020B0603020101020101" pitchFamily="34" charset="-127"/>
-                <a:ea typeface="나눔바른고딕" panose="020B0603020101020101" pitchFamily="34" charset="-127"/>
-              </a:rPr>
-              <a:t> </a:t>
-            </a:r>
-            <a:r>
-              <a:rPr lang="en-US" altLang="ko-KR" sz="1000" dirty="0">
-                <a:solidFill>
-                  <a:schemeClr val="bg1">
-                    <a:lumMod val="75000"/>
-                  </a:schemeClr>
-                </a:solidFill>
-                <a:latin typeface="나눔바른고딕" panose="020B0603020101020101" pitchFamily="34" charset="-127"/>
-                <a:ea typeface="나눔바른고딕" panose="020B0603020101020101" pitchFamily="34" charset="-127"/>
-              </a:rPr>
-              <a:t>2026 </a:t>
-            </a:r>
-            <a:r>
-              <a:rPr lang="ko-KR" altLang="en-US" sz="1000" dirty="0">
-                <a:solidFill>
-                  <a:schemeClr val="bg1">
-                    <a:lumMod val="75000"/>
-                  </a:schemeClr>
-                </a:solidFill>
-                <a:latin typeface="나눔바른고딕" panose="020B0603020101020101" pitchFamily="34" charset="-127"/>
-                <a:ea typeface="나눔바른고딕" panose="020B0603020101020101" pitchFamily="34" charset="-127"/>
-              </a:rPr>
-              <a:t>여름 </a:t>
-            </a:r>
-            <a:r>
-              <a:rPr lang="ko-KR" altLang="en-US" sz="1000" dirty="0" err="1">
-                <a:solidFill>
-                  <a:schemeClr val="bg1">
-                    <a:lumMod val="75000"/>
-                  </a:schemeClr>
-                </a:solidFill>
-                <a:latin typeface="나눔바른고딕" panose="020B0603020101020101" pitchFamily="34" charset="-127"/>
-                <a:ea typeface="나눔바른고딕" panose="020B0603020101020101" pitchFamily="34" charset="-127"/>
-              </a:rPr>
-              <a:t>인턴십</a:t>
-            </a:r>
-            <a:endParaRPr lang="ko-KR" altLang="en-US" sz="1000" dirty="0">
-              <a:solidFill>
-                <a:schemeClr val="bg1">
-                  <a:lumMod val="75000"/>
-                </a:schemeClr>
-              </a:solidFill>
-              <a:latin typeface="나눔바른고딕" panose="020B0603020101020101" pitchFamily="34" charset="-127"/>
-              <a:ea typeface="나눔바른고딕" panose="020B0603020101020101" pitchFamily="34" charset="-127"/>
-            </a:endParaRPr>
-          </a:p>
-        </p:txBody>
-      </p:sp>
-      <p:sp>
-        <p:nvSpPr>
-          <p:cNvPr id="5" name="TextBox 4">
-            <a:extLst>
-              <a:ext uri="{FF2B5EF4-FFF2-40B4-BE49-F238E27FC236}">
-                <a16:creationId xmlns:a16="http://schemas.microsoft.com/office/drawing/2014/main" id="{CDFB8DD7-E244-D0A1-3A27-D1D65BBD9152}"/>
+      <p:sp>
+        <p:nvSpPr>
+          <p:cNvPr id="4" name="TextBox 3">
+            <a:extLst>
+              <a:ext uri="{FF2B5EF4-FFF2-40B4-BE49-F238E27FC236}">
+                <a16:creationId xmlns:a16="http://schemas.microsoft.com/office/drawing/2014/main" id="{47D03351-24D6-6754-2E4E-639ADC05AB1C}"/>
               </a:ext>
             </a:extLst>
           </p:cNvPr>
@@ -5826,7 +5923,7 @@
         <p:spPr>
           <a:xfrm>
             <a:off x="302449" y="1727036"/>
-            <a:ext cx="6520758" cy="534762"/>
+            <a:ext cx="6520758" cy="996427"/>
           </a:xfrm>
           <a:prstGeom prst="rect">
             <a:avLst/>
@@ -5847,12 +5944,16 @@
               <a:buChar char="•"/>
             </a:pPr>
             <a:r>
-              <a:rPr lang="en-US" altLang="ko-KR" sz="1000" dirty="0">
-                <a:latin typeface="나눔바른고딕" panose="020B0603020101020101" pitchFamily="34" charset="-127"/>
-                <a:ea typeface="나눔바른고딕" panose="020B0603020101020101" pitchFamily="34" charset="-127"/>
-              </a:rPr>
-              <a:t>-</a:t>
-            </a:r>
+              <a:rPr lang="ko-KR" altLang="en-US" sz="1000" dirty="0">
+                <a:latin typeface="나눔바른고딕" panose="020B0603020101020101" pitchFamily="34" charset="-127"/>
+                <a:ea typeface="나눔바른고딕" panose="020B0603020101020101" pitchFamily="34" charset="-127"/>
+              </a:rPr>
+              <a:t>절벽 인식을 처리하면서 또 누락하거나 상정하지 않은 상황은 없는지 점검</a:t>
+            </a:r>
+            <a:endParaRPr lang="en-US" altLang="ko-KR" sz="1000" dirty="0">
+              <a:latin typeface="나눔바른고딕" panose="020B0603020101020101" pitchFamily="34" charset="-127"/>
+              <a:ea typeface="나눔바른고딕" panose="020B0603020101020101" pitchFamily="34" charset="-127"/>
+            </a:endParaRPr>
           </a:p>
           <a:p>
             <a:pPr marL="171450" indent="-171450">
@@ -5863,353 +5964,33 @@
               <a:buChar char="•"/>
             </a:pPr>
             <a:r>
+              <a:rPr lang="ko-KR" altLang="en-US" sz="1000" dirty="0">
+                <a:latin typeface="나눔바른고딕" panose="020B0603020101020101" pitchFamily="34" charset="-127"/>
+                <a:ea typeface="나눔바른고딕" panose="020B0603020101020101" pitchFamily="34" charset="-127"/>
+              </a:rPr>
+              <a:t>그 과정에서 특수 장애물 위에 착지 시</a:t>
+            </a:r>
+            <a:r>
               <a:rPr lang="en-US" altLang="ko-KR" sz="1000" dirty="0">
                 <a:latin typeface="나눔바른고딕" panose="020B0603020101020101" pitchFamily="34" charset="-127"/>
                 <a:ea typeface="나눔바른고딕" panose="020B0603020101020101" pitchFamily="34" charset="-127"/>
               </a:rPr>
-              <a:t>-</a:t>
-            </a:r>
-          </a:p>
-        </p:txBody>
-      </p:sp>
-      <p:sp>
-        <p:nvSpPr>
-          <p:cNvPr id="11" name="TextBox 10">
-            <a:extLst>
-              <a:ext uri="{FF2B5EF4-FFF2-40B4-BE49-F238E27FC236}">
-                <a16:creationId xmlns:a16="http://schemas.microsoft.com/office/drawing/2014/main" id="{B16192B3-4C1A-B0C6-D680-9E062F4AB3D0}"/>
-              </a:ext>
-            </a:extLst>
-          </p:cNvPr>
-          <p:cNvSpPr txBox="1"/>
-          <p:nvPr/>
-        </p:nvSpPr>
-        <p:spPr>
-          <a:xfrm>
-            <a:off x="302449" y="1342316"/>
-            <a:ext cx="7464813" cy="346249"/>
-          </a:xfrm>
-          <a:prstGeom prst="rect">
-            <a:avLst/>
-          </a:prstGeom>
-          <a:noFill/>
-        </p:spPr>
-        <p:txBody>
-          <a:bodyPr wrap="square" rtlCol="0">
-            <a:spAutoFit/>
-          </a:bodyPr>
-          <a:lstStyle/>
-          <a:p>
-            <a:pPr>
-              <a:lnSpc>
-                <a:spcPct val="150000"/>
-              </a:lnSpc>
-            </a:pPr>
-            <a:r>
-              <a:rPr lang="ko-KR" altLang="en-US" sz="1200" dirty="0">
-                <a:latin typeface="나눔바른고딕" panose="020B0603020101020101" pitchFamily="34" charset="-127"/>
-                <a:ea typeface="나눔바른고딕" panose="020B0603020101020101" pitchFamily="34" charset="-127"/>
-              </a:rPr>
-              <a:t>범용화 작업</a:t>
-            </a:r>
-            <a:endParaRPr lang="en-US" altLang="ko-KR" sz="1200" dirty="0">
+              <a:t>, </a:t>
+            </a:r>
+            <a:r>
+              <a:rPr lang="ko-KR" altLang="en-US" sz="1000" dirty="0">
+                <a:latin typeface="나눔바른고딕" panose="020B0603020101020101" pitchFamily="34" charset="-127"/>
+                <a:ea typeface="나눔바른고딕" panose="020B0603020101020101" pitchFamily="34" charset="-127"/>
+              </a:rPr>
+              <a:t>자동 전환이 필요함을 확인</a:t>
+            </a:r>
+            <a:endParaRPr lang="en-US" altLang="ko-KR" sz="1000" dirty="0">
               <a:latin typeface="나눔바른고딕" panose="020B0603020101020101" pitchFamily="34" charset="-127"/>
               <a:ea typeface="나눔바른고딕" panose="020B0603020101020101" pitchFamily="34" charset="-127"/>
             </a:endParaRPr>
           </a:p>
-        </p:txBody>
-      </p:sp>
-    </p:spTree>
-    <p:extLst>
-      <p:ext uri="{BB962C8B-B14F-4D97-AF65-F5344CB8AC3E}">
-        <p14:creationId xmlns:p14="http://schemas.microsoft.com/office/powerpoint/2010/main" val="3589343841"/>
-      </p:ext>
-    </p:extLst>
-  </p:cSld>
-  <p:clrMapOvr>
-    <a:masterClrMapping/>
-  </p:clrMapOvr>
-</p:sld>
-</file>
-
-<file path=ppt/slides/slide5.xml><?xml version="1.0" encoding="utf-8"?>
-<p:sld xmlns:a="http://schemas.openxmlformats.org/drawingml/2006/main" xmlns:r="http://schemas.openxmlformats.org/officeDocument/2006/relationships" xmlns:p="http://schemas.openxmlformats.org/presentationml/2006/main">
-  <p:cSld>
-    <p:spTree>
-      <p:nvGrpSpPr>
-        <p:cNvPr id="1" name="">
-          <a:extLst>
-            <a:ext uri="{FF2B5EF4-FFF2-40B4-BE49-F238E27FC236}">
-              <a16:creationId xmlns:a16="http://schemas.microsoft.com/office/drawing/2014/main" id="{94AC5628-6096-007D-4F9A-097D06EAA780}"/>
-            </a:ext>
-          </a:extLst>
-        </p:cNvPr>
-        <p:cNvGrpSpPr/>
-        <p:nvPr/>
-      </p:nvGrpSpPr>
-      <p:grpSpPr>
-        <a:xfrm>
-          <a:off x="0" y="0"/>
-          <a:ext cx="0" cy="0"/>
-          <a:chOff x="0" y="0"/>
-          <a:chExt cx="0" cy="0"/>
-        </a:xfrm>
-      </p:grpSpPr>
-      <p:sp>
-        <p:nvSpPr>
-          <p:cNvPr id="8" name="TextBox 7">
-            <a:extLst>
-              <a:ext uri="{FF2B5EF4-FFF2-40B4-BE49-F238E27FC236}">
-                <a16:creationId xmlns:a16="http://schemas.microsoft.com/office/drawing/2014/main" id="{BCBC9F85-F7A3-3F83-1806-6A8A789EB677}"/>
-              </a:ext>
-            </a:extLst>
-          </p:cNvPr>
-          <p:cNvSpPr txBox="1"/>
-          <p:nvPr/>
-        </p:nvSpPr>
-        <p:spPr>
-          <a:xfrm>
-            <a:off x="302451" y="315453"/>
-            <a:ext cx="4944140" cy="369332"/>
-          </a:xfrm>
-          <a:prstGeom prst="rect">
-            <a:avLst/>
-          </a:prstGeom>
-          <a:noFill/>
-        </p:spPr>
-        <p:txBody>
-          <a:bodyPr wrap="square" rtlCol="0">
-            <a:spAutoFit/>
-          </a:bodyPr>
-          <a:lstStyle/>
-          <a:p>
-            <a:r>
-              <a:rPr lang="ko-KR" altLang="en-US" dirty="0">
-                <a:latin typeface="나눔바른고딕" panose="020B0603020101020101" pitchFamily="34" charset="-127"/>
-                <a:ea typeface="나눔바른고딕" panose="020B0603020101020101" pitchFamily="34" charset="-127"/>
-              </a:rPr>
-              <a:t>이번 주 작업 내역</a:t>
-            </a:r>
-            <a:endParaRPr lang="en-US" altLang="ko-KR" dirty="0">
-              <a:latin typeface="나눔바른고딕" panose="020B0603020101020101" pitchFamily="34" charset="-127"/>
-              <a:ea typeface="나눔바른고딕" panose="020B0603020101020101" pitchFamily="34" charset="-127"/>
-            </a:endParaRPr>
-          </a:p>
-        </p:txBody>
-      </p:sp>
-      <p:sp>
-        <p:nvSpPr>
-          <p:cNvPr id="10" name="TextBox 9">
-            <a:extLst>
-              <a:ext uri="{FF2B5EF4-FFF2-40B4-BE49-F238E27FC236}">
-                <a16:creationId xmlns:a16="http://schemas.microsoft.com/office/drawing/2014/main" id="{FD273E2F-7739-7201-81F8-1F5E095D26E7}"/>
-              </a:ext>
-            </a:extLst>
-          </p:cNvPr>
-          <p:cNvSpPr txBox="1"/>
-          <p:nvPr/>
-        </p:nvSpPr>
-        <p:spPr>
-          <a:xfrm>
-            <a:off x="302450" y="1003762"/>
-            <a:ext cx="2694247" cy="338554"/>
-          </a:xfrm>
-          <a:prstGeom prst="rect">
-            <a:avLst/>
-          </a:prstGeom>
-          <a:noFill/>
-        </p:spPr>
-        <p:txBody>
-          <a:bodyPr wrap="square" rtlCol="0">
-            <a:spAutoFit/>
-          </a:bodyPr>
-          <a:lstStyle/>
-          <a:p>
-            <a:r>
-              <a:rPr lang="ko-KR" altLang="en-US" sz="1600" dirty="0">
-                <a:latin typeface="나눔바른고딕" panose="020B0603020101020101" pitchFamily="34" charset="-127"/>
-                <a:ea typeface="나눔바른고딕" panose="020B0603020101020101" pitchFamily="34" charset="-127"/>
-              </a:rPr>
-              <a:t>지형 타입 추가</a:t>
-            </a:r>
-            <a:endParaRPr lang="en-US" altLang="ko-KR" sz="1600" dirty="0">
-              <a:latin typeface="나눔바른고딕" panose="020B0603020101020101" pitchFamily="34" charset="-127"/>
-              <a:ea typeface="나눔바른고딕" panose="020B0603020101020101" pitchFamily="34" charset="-127"/>
-            </a:endParaRPr>
-          </a:p>
-        </p:txBody>
-      </p:sp>
-      <p:cxnSp>
-        <p:nvCxnSpPr>
-          <p:cNvPr id="3" name="직선 연결선 2">
-            <a:extLst>
-              <a:ext uri="{FF2B5EF4-FFF2-40B4-BE49-F238E27FC236}">
-                <a16:creationId xmlns:a16="http://schemas.microsoft.com/office/drawing/2014/main" id="{B40C969E-FCF4-2ECC-59EC-50B8643A5B76}"/>
-              </a:ext>
-            </a:extLst>
-          </p:cNvPr>
-          <p:cNvCxnSpPr>
-            <a:cxnSpLocks/>
-          </p:cNvCxnSpPr>
-          <p:nvPr/>
-        </p:nvCxnSpPr>
-        <p:spPr>
-          <a:xfrm>
-            <a:off x="387511" y="818707"/>
-            <a:ext cx="11308303" cy="0"/>
-          </a:xfrm>
-          <a:prstGeom prst="line">
-            <a:avLst/>
-          </a:prstGeom>
-          <a:ln>
-            <a:solidFill>
-              <a:schemeClr val="tx2"/>
-            </a:solidFill>
-          </a:ln>
-        </p:spPr>
-        <p:style>
-          <a:lnRef idx="2">
-            <a:schemeClr val="accent1"/>
-          </a:lnRef>
-          <a:fillRef idx="0">
-            <a:schemeClr val="accent1"/>
-          </a:fillRef>
-          <a:effectRef idx="1">
-            <a:schemeClr val="accent1"/>
-          </a:effectRef>
-          <a:fontRef idx="minor">
-            <a:schemeClr val="tx1"/>
-          </a:fontRef>
-        </p:style>
-      </p:cxnSp>
-      <p:sp>
-        <p:nvSpPr>
-          <p:cNvPr id="12" name="직사각형 11">
-            <a:extLst>
-              <a:ext uri="{FF2B5EF4-FFF2-40B4-BE49-F238E27FC236}">
-                <a16:creationId xmlns:a16="http://schemas.microsoft.com/office/drawing/2014/main" id="{3A205B8F-1C93-C984-E61E-45A53634FE3C}"/>
-              </a:ext>
-            </a:extLst>
-          </p:cNvPr>
-          <p:cNvSpPr/>
-          <p:nvPr/>
-        </p:nvSpPr>
-        <p:spPr>
-          <a:xfrm>
-            <a:off x="10443172" y="118011"/>
-            <a:ext cx="1596912" cy="246221"/>
-          </a:xfrm>
-          <a:prstGeom prst="rect">
-            <a:avLst/>
-          </a:prstGeom>
-        </p:spPr>
-        <p:txBody>
-          <a:bodyPr wrap="none">
-            <a:spAutoFit/>
-          </a:bodyPr>
-          <a:lstStyle/>
-          <a:p>
-            <a:r>
-              <a:rPr lang="ko-KR" altLang="en-US" sz="1000" dirty="0" err="1">
-                <a:solidFill>
-                  <a:schemeClr val="bg1">
-                    <a:lumMod val="75000"/>
-                  </a:schemeClr>
-                </a:solidFill>
-                <a:latin typeface="나눔바른고딕" panose="020B0603020101020101" pitchFamily="34" charset="-127"/>
-                <a:ea typeface="나눔바른고딕" panose="020B0603020101020101" pitchFamily="34" charset="-127"/>
-              </a:rPr>
-              <a:t>펄어비스</a:t>
-            </a:r>
-            <a:r>
-              <a:rPr lang="ko-KR" altLang="en-US" sz="1000" dirty="0">
-                <a:solidFill>
-                  <a:schemeClr val="bg1">
-                    <a:lumMod val="75000"/>
-                  </a:schemeClr>
-                </a:solidFill>
-                <a:latin typeface="나눔바른고딕" panose="020B0603020101020101" pitchFamily="34" charset="-127"/>
-                <a:ea typeface="나눔바른고딕" panose="020B0603020101020101" pitchFamily="34" charset="-127"/>
-              </a:rPr>
-              <a:t> </a:t>
-            </a:r>
-            <a:r>
-              <a:rPr lang="en-US" altLang="ko-KR" sz="1000" dirty="0">
-                <a:solidFill>
-                  <a:schemeClr val="bg1">
-                    <a:lumMod val="75000"/>
-                  </a:schemeClr>
-                </a:solidFill>
-                <a:latin typeface="나눔바른고딕" panose="020B0603020101020101" pitchFamily="34" charset="-127"/>
-                <a:ea typeface="나눔바른고딕" panose="020B0603020101020101" pitchFamily="34" charset="-127"/>
-              </a:rPr>
-              <a:t>2026 </a:t>
-            </a:r>
-            <a:r>
-              <a:rPr lang="ko-KR" altLang="en-US" sz="1000" dirty="0">
-                <a:solidFill>
-                  <a:schemeClr val="bg1">
-                    <a:lumMod val="75000"/>
-                  </a:schemeClr>
-                </a:solidFill>
-                <a:latin typeface="나눔바른고딕" panose="020B0603020101020101" pitchFamily="34" charset="-127"/>
-                <a:ea typeface="나눔바른고딕" panose="020B0603020101020101" pitchFamily="34" charset="-127"/>
-              </a:rPr>
-              <a:t>여름 </a:t>
-            </a:r>
-            <a:r>
-              <a:rPr lang="ko-KR" altLang="en-US" sz="1000" dirty="0" err="1">
-                <a:solidFill>
-                  <a:schemeClr val="bg1">
-                    <a:lumMod val="75000"/>
-                  </a:schemeClr>
-                </a:solidFill>
-                <a:latin typeface="나눔바른고딕" panose="020B0603020101020101" pitchFamily="34" charset="-127"/>
-                <a:ea typeface="나눔바른고딕" panose="020B0603020101020101" pitchFamily="34" charset="-127"/>
-              </a:rPr>
-              <a:t>인턴십</a:t>
-            </a:r>
-            <a:endParaRPr lang="ko-KR" altLang="en-US" sz="1000" dirty="0">
-              <a:solidFill>
-                <a:schemeClr val="bg1">
-                  <a:lumMod val="75000"/>
-                </a:schemeClr>
-              </a:solidFill>
-              <a:latin typeface="나눔바른고딕" panose="020B0603020101020101" pitchFamily="34" charset="-127"/>
-              <a:ea typeface="나눔바른고딕" panose="020B0603020101020101" pitchFamily="34" charset="-127"/>
-            </a:endParaRPr>
-          </a:p>
-        </p:txBody>
-      </p:sp>
-      <p:sp>
-        <p:nvSpPr>
-          <p:cNvPr id="5" name="TextBox 4">
-            <a:extLst>
-              <a:ext uri="{FF2B5EF4-FFF2-40B4-BE49-F238E27FC236}">
-                <a16:creationId xmlns:a16="http://schemas.microsoft.com/office/drawing/2014/main" id="{22CFA5D7-1740-0566-E198-3D6707C83E07}"/>
-              </a:ext>
-            </a:extLst>
-          </p:cNvPr>
-          <p:cNvSpPr txBox="1"/>
-          <p:nvPr/>
-        </p:nvSpPr>
-        <p:spPr>
-          <a:xfrm>
-            <a:off x="302449" y="1727036"/>
-            <a:ext cx="6520758" cy="534762"/>
-          </a:xfrm>
-          <a:prstGeom prst="rect">
-            <a:avLst/>
-          </a:prstGeom>
-          <a:noFill/>
-        </p:spPr>
-        <p:txBody>
-          <a:bodyPr wrap="square">
-            <a:spAutoFit/>
-          </a:bodyPr>
-          <a:lstStyle/>
-          <a:p>
-            <a:pPr marL="171450" indent="-171450">
+          <a:p>
+            <a:pPr marL="628650" lvl="1" indent="-171450">
               <a:lnSpc>
                 <a:spcPct val="150000"/>
               </a:lnSpc>
@@ -6217,25 +5998,32 @@
               <a:buChar char="•"/>
             </a:pPr>
             <a:r>
+              <a:rPr lang="en-US" altLang="ko-KR" sz="1000" dirty="0">
+                <a:latin typeface="나눔바른고딕" panose="020B0603020101020101" pitchFamily="34" charset="-127"/>
+                <a:ea typeface="나눔바른고딕" panose="020B0603020101020101" pitchFamily="34" charset="-127"/>
+              </a:rPr>
+              <a:t>Beam</a:t>
+            </a:r>
+            <a:r>
               <a:rPr lang="ko-KR" altLang="en-US" sz="1000" dirty="0">
                 <a:latin typeface="나눔바른고딕" panose="020B0603020101020101" pitchFamily="34" charset="-127"/>
                 <a:ea typeface="나눔바른고딕" panose="020B0603020101020101" pitchFamily="34" charset="-127"/>
               </a:rPr>
-              <a:t>일반적인 벽면을 탈 수도 있지만</a:t>
+              <a:t> 장애물의 경우</a:t>
             </a:r>
             <a:r>
               <a:rPr lang="en-US" altLang="ko-KR" sz="1000" dirty="0">
                 <a:latin typeface="나눔바른고딕" panose="020B0603020101020101" pitchFamily="34" charset="-127"/>
                 <a:ea typeface="나눔바른고딕" panose="020B0603020101020101" pitchFamily="34" charset="-127"/>
               </a:rPr>
-              <a:t> </a:t>
+              <a:t>, </a:t>
             </a:r>
             <a:r>
               <a:rPr lang="ko-KR" altLang="en-US" sz="1000" dirty="0">
                 <a:latin typeface="나눔바른고딕" panose="020B0603020101020101" pitchFamily="34" charset="-127"/>
                 <a:ea typeface="나눔바른고딕" panose="020B0603020101020101" pitchFamily="34" charset="-127"/>
               </a:rPr>
-              <a:t>돌출부를 인식하면 우선해서 처리</a:t>
+              <a:t>촘촘하게 배치한 상황에서 떨어지면 가만히 서있음</a:t>
             </a:r>
             <a:endParaRPr lang="en-US" altLang="ko-KR" sz="1000" dirty="0">
               <a:latin typeface="나눔바른고딕" panose="020B0603020101020101" pitchFamily="34" charset="-127"/>
@@ -6243,7 +6031,7 @@
             </a:endParaRPr>
           </a:p>
           <a:p>
-            <a:pPr marL="171450" indent="-171450">
+            <a:pPr marL="628650" lvl="1" indent="-171450">
               <a:lnSpc>
                 <a:spcPct val="150000"/>
               </a:lnSpc>
@@ -6255,7 +6043,35 @@
                 <a:latin typeface="나눔바른고딕" panose="020B0603020101020101" pitchFamily="34" charset="-127"/>
                 <a:ea typeface="나눔바른고딕" panose="020B0603020101020101" pitchFamily="34" charset="-127"/>
               </a:rPr>
-              <a:t>일반적인 이동보다 좀 더 멀리 이동 가능하도록 처리</a:t>
+              <a:t>떨어지는 과정에서 </a:t>
+            </a:r>
+            <a:r>
+              <a:rPr lang="en-US" altLang="ko-KR" sz="1000" dirty="0">
+                <a:latin typeface="나눔바른고딕" panose="020B0603020101020101" pitchFamily="34" charset="-127"/>
+                <a:ea typeface="나눔바른고딕" panose="020B0603020101020101" pitchFamily="34" charset="-127"/>
+              </a:rPr>
+              <a:t>Beam </a:t>
+            </a:r>
+            <a:r>
+              <a:rPr lang="ko-KR" altLang="en-US" sz="1000" dirty="0">
+                <a:latin typeface="나눔바른고딕" panose="020B0603020101020101" pitchFamily="34" charset="-127"/>
+                <a:ea typeface="나눔바른고딕" panose="020B0603020101020101" pitchFamily="34" charset="-127"/>
+              </a:rPr>
+              <a:t>위에 안착하는 경우</a:t>
+            </a:r>
+            <a:r>
+              <a:rPr lang="en-US" altLang="ko-KR" sz="1000" dirty="0">
+                <a:latin typeface="나눔바른고딕" panose="020B0603020101020101" pitchFamily="34" charset="-127"/>
+                <a:ea typeface="나눔바른고딕" panose="020B0603020101020101" pitchFamily="34" charset="-127"/>
+              </a:rPr>
+              <a:t>, </a:t>
+            </a:r>
+            <a:r>
+              <a:rPr lang="ko-KR" altLang="en-US" sz="1000" dirty="0">
+                <a:latin typeface="나눔바른고딕" panose="020B0603020101020101" pitchFamily="34" charset="-127"/>
+                <a:ea typeface="나눔바른고딕" panose="020B0603020101020101" pitchFamily="34" charset="-127"/>
+              </a:rPr>
+              <a:t>해당 장애물 위로 착지하며 상태 전환하도록 처리</a:t>
             </a:r>
             <a:endParaRPr lang="en-US" altLang="ko-KR" sz="1000" dirty="0">
               <a:latin typeface="나눔바른고딕" panose="020B0603020101020101" pitchFamily="34" charset="-127"/>
@@ -6266,529 +6082,63 @@
       </p:sp>
       <p:sp>
         <p:nvSpPr>
-          <p:cNvPr id="11" name="TextBox 10">
-            <a:extLst>
-              <a:ext uri="{FF2B5EF4-FFF2-40B4-BE49-F238E27FC236}">
-                <a16:creationId xmlns:a16="http://schemas.microsoft.com/office/drawing/2014/main" id="{F50CCD4C-6EF5-FEFC-3F13-E33D025FD49B}"/>
-              </a:ext>
-            </a:extLst>
-          </p:cNvPr>
-          <p:cNvSpPr txBox="1"/>
+          <p:cNvPr id="7" name="직사각형 6">
+            <a:extLst>
+              <a:ext uri="{FF2B5EF4-FFF2-40B4-BE49-F238E27FC236}">
+                <a16:creationId xmlns:a16="http://schemas.microsoft.com/office/drawing/2014/main" id="{CE464190-1D80-7343-9AB2-0252CF69404C}"/>
+              </a:ext>
+            </a:extLst>
+          </p:cNvPr>
+          <p:cNvSpPr/>
           <p:nvPr/>
         </p:nvSpPr>
         <p:spPr>
           <a:xfrm>
-            <a:off x="302449" y="1342316"/>
-            <a:ext cx="7464813" cy="346249"/>
-          </a:xfrm>
-          <a:prstGeom prst="rect">
-            <a:avLst/>
-          </a:prstGeom>
-          <a:noFill/>
-        </p:spPr>
-        <p:txBody>
-          <a:bodyPr wrap="square" rtlCol="0">
-            <a:spAutoFit/>
-          </a:bodyPr>
-          <a:lstStyle/>
-          <a:p>
-            <a:pPr>
-              <a:lnSpc>
-                <a:spcPct val="150000"/>
-              </a:lnSpc>
-            </a:pPr>
-            <a:r>
-              <a:rPr lang="ko-KR" altLang="en-US" sz="1200" dirty="0">
-                <a:latin typeface="나눔바른고딕" panose="020B0603020101020101" pitchFamily="34" charset="-127"/>
-                <a:ea typeface="나눔바른고딕" panose="020B0603020101020101" pitchFamily="34" charset="-127"/>
-              </a:rPr>
-              <a:t>장애물에 돌출부 유형 추가</a:t>
-            </a:r>
-            <a:endParaRPr lang="en-US" altLang="ko-KR" sz="1200" dirty="0">
-              <a:latin typeface="나눔바른고딕" panose="020B0603020101020101" pitchFamily="34" charset="-127"/>
-              <a:ea typeface="나눔바른고딕" panose="020B0603020101020101" pitchFamily="34" charset="-127"/>
-            </a:endParaRPr>
-          </a:p>
-        </p:txBody>
-      </p:sp>
-    </p:spTree>
-    <p:extLst>
-      <p:ext uri="{BB962C8B-B14F-4D97-AF65-F5344CB8AC3E}">
-        <p14:creationId xmlns:p14="http://schemas.microsoft.com/office/powerpoint/2010/main" val="1939725433"/>
-      </p:ext>
-    </p:extLst>
-  </p:cSld>
-  <p:clrMapOvr>
-    <a:masterClrMapping/>
-  </p:clrMapOvr>
-</p:sld>
-</file>
-
-<file path=ppt/slides/slide6.xml><?xml version="1.0" encoding="utf-8"?>
-<p:sld xmlns:a="http://schemas.openxmlformats.org/drawingml/2006/main" xmlns:r="http://schemas.openxmlformats.org/officeDocument/2006/relationships" xmlns:p="http://schemas.openxmlformats.org/presentationml/2006/main">
-  <p:cSld>
-    <p:spTree>
-      <p:nvGrpSpPr>
-        <p:cNvPr id="1" name="">
-          <a:extLst>
-            <a:ext uri="{FF2B5EF4-FFF2-40B4-BE49-F238E27FC236}">
-              <a16:creationId xmlns:a16="http://schemas.microsoft.com/office/drawing/2014/main" id="{DB079F37-FB5D-DF82-F33A-226730A42B74}"/>
-            </a:ext>
-          </a:extLst>
-        </p:cNvPr>
-        <p:cNvGrpSpPr/>
-        <p:nvPr/>
-      </p:nvGrpSpPr>
-      <p:grpSpPr>
-        <a:xfrm>
-          <a:off x="0" y="0"/>
-          <a:ext cx="0" cy="0"/>
-          <a:chOff x="0" y="0"/>
-          <a:chExt cx="0" cy="0"/>
-        </a:xfrm>
-      </p:grpSpPr>
-      <p:sp>
-        <p:nvSpPr>
-          <p:cNvPr id="8" name="TextBox 7">
-            <a:extLst>
-              <a:ext uri="{FF2B5EF4-FFF2-40B4-BE49-F238E27FC236}">
-                <a16:creationId xmlns:a16="http://schemas.microsoft.com/office/drawing/2014/main" id="{3D2DB2B5-2DA4-8BF5-1583-88CF4FE2EBBC}"/>
-              </a:ext>
-            </a:extLst>
-          </p:cNvPr>
-          <p:cNvSpPr txBox="1"/>
-          <p:nvPr/>
-        </p:nvSpPr>
-        <p:spPr>
-          <a:xfrm>
-            <a:off x="302451" y="315453"/>
-            <a:ext cx="4944140" cy="369332"/>
-          </a:xfrm>
-          <a:prstGeom prst="rect">
-            <a:avLst/>
-          </a:prstGeom>
-          <a:noFill/>
-        </p:spPr>
-        <p:txBody>
-          <a:bodyPr wrap="square" rtlCol="0">
-            <a:spAutoFit/>
-          </a:bodyPr>
-          <a:lstStyle/>
-          <a:p>
-            <a:r>
-              <a:rPr lang="ko-KR" altLang="en-US" dirty="0">
-                <a:latin typeface="나눔바른고딕" panose="020B0603020101020101" pitchFamily="34" charset="-127"/>
-                <a:ea typeface="나눔바른고딕" panose="020B0603020101020101" pitchFamily="34" charset="-127"/>
-              </a:rPr>
-              <a:t>이번 주 작업 내역</a:t>
-            </a:r>
-            <a:endParaRPr lang="en-US" altLang="ko-KR" dirty="0">
-              <a:latin typeface="나눔바른고딕" panose="020B0603020101020101" pitchFamily="34" charset="-127"/>
-              <a:ea typeface="나눔바른고딕" panose="020B0603020101020101" pitchFamily="34" charset="-127"/>
-            </a:endParaRPr>
-          </a:p>
-        </p:txBody>
-      </p:sp>
-      <p:sp>
-        <p:nvSpPr>
-          <p:cNvPr id="10" name="TextBox 9">
-            <a:extLst>
-              <a:ext uri="{FF2B5EF4-FFF2-40B4-BE49-F238E27FC236}">
-                <a16:creationId xmlns:a16="http://schemas.microsoft.com/office/drawing/2014/main" id="{22CE349F-8415-B927-40A1-901B20F488C1}"/>
-              </a:ext>
-            </a:extLst>
-          </p:cNvPr>
-          <p:cNvSpPr txBox="1"/>
-          <p:nvPr/>
-        </p:nvSpPr>
-        <p:spPr>
-          <a:xfrm>
-            <a:off x="302450" y="1003762"/>
-            <a:ext cx="2694247" cy="338554"/>
-          </a:xfrm>
-          <a:prstGeom prst="rect">
-            <a:avLst/>
-          </a:prstGeom>
-          <a:noFill/>
-        </p:spPr>
-        <p:txBody>
-          <a:bodyPr wrap="square" rtlCol="0">
-            <a:spAutoFit/>
-          </a:bodyPr>
-          <a:lstStyle/>
-          <a:p>
-            <a:r>
-              <a:rPr lang="ko-KR" altLang="en-US" sz="1600" dirty="0">
-                <a:latin typeface="나눔바른고딕" panose="020B0603020101020101" pitchFamily="34" charset="-127"/>
-                <a:ea typeface="나눔바른고딕" panose="020B0603020101020101" pitchFamily="34" charset="-127"/>
-              </a:rPr>
-              <a:t>액션 추가</a:t>
-            </a:r>
-            <a:endParaRPr lang="en-US" altLang="ko-KR" sz="1600" dirty="0">
-              <a:latin typeface="나눔바른고딕" panose="020B0603020101020101" pitchFamily="34" charset="-127"/>
-              <a:ea typeface="나눔바른고딕" panose="020B0603020101020101" pitchFamily="34" charset="-127"/>
-            </a:endParaRPr>
-          </a:p>
-        </p:txBody>
-      </p:sp>
-      <p:cxnSp>
-        <p:nvCxnSpPr>
-          <p:cNvPr id="3" name="직선 연결선 2">
-            <a:extLst>
-              <a:ext uri="{FF2B5EF4-FFF2-40B4-BE49-F238E27FC236}">
-                <a16:creationId xmlns:a16="http://schemas.microsoft.com/office/drawing/2014/main" id="{F90FA9F0-DF07-F50F-F151-D56869541E7A}"/>
-              </a:ext>
-            </a:extLst>
-          </p:cNvPr>
-          <p:cNvCxnSpPr>
-            <a:cxnSpLocks/>
-          </p:cNvCxnSpPr>
-          <p:nvPr/>
-        </p:nvCxnSpPr>
-        <p:spPr>
-          <a:xfrm>
-            <a:off x="387511" y="818707"/>
-            <a:ext cx="11308303" cy="0"/>
-          </a:xfrm>
-          <a:prstGeom prst="line">
-            <a:avLst/>
-          </a:prstGeom>
-          <a:ln>
-            <a:solidFill>
-              <a:schemeClr val="tx2"/>
-            </a:solidFill>
-          </a:ln>
-        </p:spPr>
-        <p:style>
-          <a:lnRef idx="2">
-            <a:schemeClr val="accent1"/>
-          </a:lnRef>
-          <a:fillRef idx="0">
-            <a:schemeClr val="accent1"/>
-          </a:fillRef>
-          <a:effectRef idx="1">
-            <a:schemeClr val="accent1"/>
-          </a:effectRef>
-          <a:fontRef idx="minor">
-            <a:schemeClr val="tx1"/>
-          </a:fontRef>
-        </p:style>
-      </p:cxnSp>
-      <p:sp>
-        <p:nvSpPr>
-          <p:cNvPr id="12" name="직사각형 11">
-            <a:extLst>
-              <a:ext uri="{FF2B5EF4-FFF2-40B4-BE49-F238E27FC236}">
-                <a16:creationId xmlns:a16="http://schemas.microsoft.com/office/drawing/2014/main" id="{38643B37-E2CF-8479-AC63-E0B22268153D}"/>
-              </a:ext>
-            </a:extLst>
-          </p:cNvPr>
-          <p:cNvSpPr/>
-          <p:nvPr/>
-        </p:nvSpPr>
-        <p:spPr>
-          <a:xfrm>
-            <a:off x="10443172" y="118011"/>
-            <a:ext cx="1596912" cy="246221"/>
+            <a:off x="6041662" y="2968931"/>
+            <a:ext cx="3937000" cy="3197361"/>
           </a:xfrm>
           <a:prstGeom prst="rect">
             <a:avLst/>
           </a:prstGeom>
         </p:spPr>
-        <p:txBody>
-          <a:bodyPr wrap="none">
-            <a:spAutoFit/>
-          </a:bodyPr>
-          <a:lstStyle/>
-          <a:p>
-            <a:r>
-              <a:rPr lang="ko-KR" altLang="en-US" sz="1000" dirty="0" err="1">
-                <a:solidFill>
-                  <a:schemeClr val="bg1">
-                    <a:lumMod val="75000"/>
-                  </a:schemeClr>
-                </a:solidFill>
-                <a:latin typeface="나눔바른고딕" panose="020B0603020101020101" pitchFamily="34" charset="-127"/>
-                <a:ea typeface="나눔바른고딕" panose="020B0603020101020101" pitchFamily="34" charset="-127"/>
-              </a:rPr>
-              <a:t>펄어비스</a:t>
-            </a:r>
-            <a:r>
-              <a:rPr lang="ko-KR" altLang="en-US" sz="1000" dirty="0">
-                <a:solidFill>
-                  <a:schemeClr val="bg1">
-                    <a:lumMod val="75000"/>
-                  </a:schemeClr>
-                </a:solidFill>
-                <a:latin typeface="나눔바른고딕" panose="020B0603020101020101" pitchFamily="34" charset="-127"/>
-                <a:ea typeface="나눔바른고딕" panose="020B0603020101020101" pitchFamily="34" charset="-127"/>
-              </a:rPr>
-              <a:t> </a:t>
-            </a:r>
-            <a:r>
-              <a:rPr lang="en-US" altLang="ko-KR" sz="1000" dirty="0">
-                <a:solidFill>
-                  <a:schemeClr val="bg1">
-                    <a:lumMod val="75000"/>
-                  </a:schemeClr>
-                </a:solidFill>
-                <a:latin typeface="나눔바른고딕" panose="020B0603020101020101" pitchFamily="34" charset="-127"/>
-                <a:ea typeface="나눔바른고딕" panose="020B0603020101020101" pitchFamily="34" charset="-127"/>
-              </a:rPr>
-              <a:t>2026 </a:t>
-            </a:r>
-            <a:r>
-              <a:rPr lang="ko-KR" altLang="en-US" sz="1000" dirty="0">
-                <a:solidFill>
-                  <a:schemeClr val="bg1">
-                    <a:lumMod val="75000"/>
-                  </a:schemeClr>
-                </a:solidFill>
-                <a:latin typeface="나눔바른고딕" panose="020B0603020101020101" pitchFamily="34" charset="-127"/>
-                <a:ea typeface="나눔바른고딕" panose="020B0603020101020101" pitchFamily="34" charset="-127"/>
-              </a:rPr>
-              <a:t>여름 </a:t>
-            </a:r>
-            <a:r>
-              <a:rPr lang="ko-KR" altLang="en-US" sz="1000" dirty="0" err="1">
-                <a:solidFill>
-                  <a:schemeClr val="bg1">
-                    <a:lumMod val="75000"/>
-                  </a:schemeClr>
-                </a:solidFill>
-                <a:latin typeface="나눔바른고딕" panose="020B0603020101020101" pitchFamily="34" charset="-127"/>
-                <a:ea typeface="나눔바른고딕" panose="020B0603020101020101" pitchFamily="34" charset="-127"/>
-              </a:rPr>
-              <a:t>인턴십</a:t>
-            </a:r>
-            <a:endParaRPr lang="ko-KR" altLang="en-US" sz="1000" dirty="0">
-              <a:solidFill>
-                <a:schemeClr val="bg1">
-                  <a:lumMod val="75000"/>
-                </a:schemeClr>
-              </a:solidFill>
-              <a:latin typeface="나눔바른고딕" panose="020B0603020101020101" pitchFamily="34" charset="-127"/>
-              <a:ea typeface="나눔바른고딕" panose="020B0603020101020101" pitchFamily="34" charset="-127"/>
-            </a:endParaRPr>
-          </a:p>
-        </p:txBody>
-      </p:sp>
-      <p:sp>
-        <p:nvSpPr>
-          <p:cNvPr id="5" name="TextBox 4">
-            <a:extLst>
-              <a:ext uri="{FF2B5EF4-FFF2-40B4-BE49-F238E27FC236}">
-                <a16:creationId xmlns:a16="http://schemas.microsoft.com/office/drawing/2014/main" id="{BA0DFCF6-42F3-B529-987B-1A766B47C813}"/>
-              </a:ext>
-            </a:extLst>
-          </p:cNvPr>
-          <p:cNvSpPr txBox="1"/>
-          <p:nvPr/>
-        </p:nvSpPr>
-        <p:spPr>
-          <a:xfrm>
-            <a:off x="302449" y="1342316"/>
-            <a:ext cx="7464813" cy="346249"/>
-          </a:xfrm>
-          <a:prstGeom prst="rect">
-            <a:avLst/>
-          </a:prstGeom>
-          <a:noFill/>
-        </p:spPr>
-        <p:txBody>
-          <a:bodyPr wrap="square" rtlCol="0">
-            <a:spAutoFit/>
-          </a:bodyPr>
-          <a:lstStyle/>
-          <a:p>
-            <a:pPr>
-              <a:lnSpc>
-                <a:spcPct val="150000"/>
-              </a:lnSpc>
-            </a:pPr>
-            <a:r>
-              <a:rPr lang="ko-KR" altLang="en-US" sz="1200" dirty="0">
-                <a:latin typeface="나눔바른고딕" panose="020B0603020101020101" pitchFamily="34" charset="-127"/>
-                <a:ea typeface="나눔바른고딕" panose="020B0603020101020101" pitchFamily="34" charset="-127"/>
-              </a:rPr>
-              <a:t>절벽 인식</a:t>
-            </a:r>
-            <a:endParaRPr lang="en-US" altLang="ko-KR" sz="1200" dirty="0">
-              <a:latin typeface="나눔바른고딕" panose="020B0603020101020101" pitchFamily="34" charset="-127"/>
-              <a:ea typeface="나눔바른고딕" panose="020B0603020101020101" pitchFamily="34" charset="-127"/>
-            </a:endParaRPr>
-          </a:p>
-        </p:txBody>
-      </p:sp>
-    </p:spTree>
-    <p:extLst>
-      <p:ext uri="{BB962C8B-B14F-4D97-AF65-F5344CB8AC3E}">
-        <p14:creationId xmlns:p14="http://schemas.microsoft.com/office/powerpoint/2010/main" val="1348324242"/>
-      </p:ext>
-    </p:extLst>
-  </p:cSld>
-  <p:clrMapOvr>
-    <a:masterClrMapping/>
-  </p:clrMapOvr>
-</p:sld>
-</file>
-
-<file path=ppt/slides/slide7.xml><?xml version="1.0" encoding="utf-8"?>
-<p:sld xmlns:a="http://schemas.openxmlformats.org/drawingml/2006/main" xmlns:r="http://schemas.openxmlformats.org/officeDocument/2006/relationships" xmlns:p="http://schemas.openxmlformats.org/presentationml/2006/main">
-  <p:cSld>
-    <p:spTree>
-      <p:nvGrpSpPr>
-        <p:cNvPr id="1" name="">
-          <a:extLst>
-            <a:ext uri="{FF2B5EF4-FFF2-40B4-BE49-F238E27FC236}">
-              <a16:creationId xmlns:a16="http://schemas.microsoft.com/office/drawing/2014/main" id="{A8D56238-76E4-9E50-A07C-ABC6D13D8966}"/>
-            </a:ext>
-          </a:extLst>
-        </p:cNvPr>
-        <p:cNvGrpSpPr/>
-        <p:nvPr/>
-      </p:nvGrpSpPr>
-      <p:grpSpPr>
-        <a:xfrm>
-          <a:off x="0" y="0"/>
-          <a:ext cx="0" cy="0"/>
-          <a:chOff x="0" y="0"/>
-          <a:chExt cx="0" cy="0"/>
-        </a:xfrm>
-      </p:grpSpPr>
-      <p:sp>
-        <p:nvSpPr>
-          <p:cNvPr id="8" name="TextBox 7">
-            <a:extLst>
-              <a:ext uri="{FF2B5EF4-FFF2-40B4-BE49-F238E27FC236}">
-                <a16:creationId xmlns:a16="http://schemas.microsoft.com/office/drawing/2014/main" id="{C10CE039-5A9C-762D-4656-54FB6FF9E20B}"/>
-              </a:ext>
-            </a:extLst>
-          </p:cNvPr>
-          <p:cNvSpPr txBox="1"/>
-          <p:nvPr/>
-        </p:nvSpPr>
-        <p:spPr>
-          <a:xfrm>
-            <a:off x="302451" y="315453"/>
-            <a:ext cx="4944140" cy="369332"/>
-          </a:xfrm>
-          <a:prstGeom prst="rect">
-            <a:avLst/>
-          </a:prstGeom>
-          <a:noFill/>
-        </p:spPr>
-        <p:txBody>
-          <a:bodyPr wrap="square" rtlCol="0">
-            <a:spAutoFit/>
-          </a:bodyPr>
-          <a:lstStyle/>
-          <a:p>
-            <a:r>
-              <a:rPr lang="ko-KR" altLang="en-US" dirty="0">
-                <a:latin typeface="나눔바른고딕" panose="020B0603020101020101" pitchFamily="34" charset="-127"/>
-                <a:ea typeface="나눔바른고딕" panose="020B0603020101020101" pitchFamily="34" charset="-127"/>
-              </a:rPr>
-              <a:t>이번 주 작업 내역</a:t>
-            </a:r>
-            <a:endParaRPr lang="en-US" altLang="ko-KR" dirty="0">
-              <a:latin typeface="나눔바른고딕" panose="020B0603020101020101" pitchFamily="34" charset="-127"/>
-              <a:ea typeface="나눔바른고딕" panose="020B0603020101020101" pitchFamily="34" charset="-127"/>
-            </a:endParaRPr>
-          </a:p>
-        </p:txBody>
-      </p:sp>
-      <p:sp>
-        <p:nvSpPr>
-          <p:cNvPr id="10" name="TextBox 9">
-            <a:extLst>
-              <a:ext uri="{FF2B5EF4-FFF2-40B4-BE49-F238E27FC236}">
-                <a16:creationId xmlns:a16="http://schemas.microsoft.com/office/drawing/2014/main" id="{05F31773-1F53-E68D-41C3-51D0BCE85CED}"/>
-              </a:ext>
-            </a:extLst>
-          </p:cNvPr>
-          <p:cNvSpPr txBox="1"/>
-          <p:nvPr/>
-        </p:nvSpPr>
-        <p:spPr>
-          <a:xfrm>
-            <a:off x="302450" y="1003762"/>
-            <a:ext cx="2694247" cy="338554"/>
-          </a:xfrm>
-          <a:prstGeom prst="rect">
-            <a:avLst/>
-          </a:prstGeom>
-          <a:noFill/>
-        </p:spPr>
-        <p:txBody>
-          <a:bodyPr wrap="square" rtlCol="0">
-            <a:spAutoFit/>
-          </a:bodyPr>
-          <a:lstStyle/>
-          <a:p>
-            <a:r>
-              <a:rPr lang="ko-KR" altLang="en-US" sz="1600" dirty="0">
-                <a:latin typeface="나눔바른고딕" panose="020B0603020101020101" pitchFamily="34" charset="-127"/>
-                <a:ea typeface="나눔바른고딕" panose="020B0603020101020101" pitchFamily="34" charset="-127"/>
-              </a:rPr>
-              <a:t>액션 추가</a:t>
-            </a:r>
-            <a:endParaRPr lang="en-US" altLang="ko-KR" sz="1600" dirty="0">
-              <a:latin typeface="나눔바른고딕" panose="020B0603020101020101" pitchFamily="34" charset="-127"/>
-              <a:ea typeface="나눔바른고딕" panose="020B0603020101020101" pitchFamily="34" charset="-127"/>
-            </a:endParaRPr>
-          </a:p>
-        </p:txBody>
-      </p:sp>
-      <p:cxnSp>
-        <p:nvCxnSpPr>
-          <p:cNvPr id="3" name="직선 연결선 2">
-            <a:extLst>
-              <a:ext uri="{FF2B5EF4-FFF2-40B4-BE49-F238E27FC236}">
-                <a16:creationId xmlns:a16="http://schemas.microsoft.com/office/drawing/2014/main" id="{3D65B191-ED48-C2B1-3CFE-AEFDD16CBEEE}"/>
-              </a:ext>
-            </a:extLst>
-          </p:cNvPr>
-          <p:cNvCxnSpPr>
-            <a:cxnSpLocks/>
-          </p:cNvCxnSpPr>
-          <p:nvPr/>
-        </p:nvCxnSpPr>
-        <p:spPr>
-          <a:xfrm>
-            <a:off x="387511" y="818707"/>
-            <a:ext cx="11308303" cy="0"/>
-          </a:xfrm>
-          <a:prstGeom prst="line">
-            <a:avLst/>
-          </a:prstGeom>
-          <a:ln>
-            <a:solidFill>
-              <a:schemeClr val="tx2"/>
-            </a:solidFill>
-          </a:ln>
-        </p:spPr>
         <p:style>
           <a:lnRef idx="2">
-            <a:schemeClr val="accent1"/>
+            <a:schemeClr val="accent1">
+              <a:shade val="15000"/>
+            </a:schemeClr>
           </a:lnRef>
-          <a:fillRef idx="0">
+          <a:fillRef idx="1">
             <a:schemeClr val="accent1"/>
           </a:fillRef>
-          <a:effectRef idx="1">
+          <a:effectRef idx="0">
             <a:schemeClr val="accent1"/>
           </a:effectRef>
           <a:fontRef idx="minor">
-            <a:schemeClr val="tx1"/>
+            <a:schemeClr val="lt1"/>
           </a:fontRef>
         </p:style>
-      </p:cxnSp>
-      <p:sp>
-        <p:nvSpPr>
-          <p:cNvPr id="12" name="직사각형 11">
-            <a:extLst>
-              <a:ext uri="{FF2B5EF4-FFF2-40B4-BE49-F238E27FC236}">
-                <a16:creationId xmlns:a16="http://schemas.microsoft.com/office/drawing/2014/main" id="{BCBE560F-B335-2164-8D29-14394C03809D}"/>
+        <p:txBody>
+          <a:bodyPr rtlCol="0" anchor="ctr"/>
+          <a:lstStyle/>
+          <a:p>
+            <a:pPr algn="ctr"/>
+            <a:r>
+              <a:rPr lang="en-US" altLang="ko-KR" dirty="0"/>
+              <a:t>Beam</a:t>
+            </a:r>
+            <a:r>
+              <a:rPr lang="ko-KR" altLang="en-US" dirty="0"/>
+              <a:t> 안착 시도</a:t>
+            </a:r>
+          </a:p>
+        </p:txBody>
+      </p:sp>
+      <p:sp>
+        <p:nvSpPr>
+          <p:cNvPr id="11" name="직사각형 10">
+            <a:extLst>
+              <a:ext uri="{FF2B5EF4-FFF2-40B4-BE49-F238E27FC236}">
+                <a16:creationId xmlns:a16="http://schemas.microsoft.com/office/drawing/2014/main" id="{889DFF31-75B8-D760-3A83-4B310436D1FF}"/>
               </a:ext>
             </a:extLst>
           </p:cNvPr>
@@ -6797,135 +6147,42 @@
         </p:nvSpPr>
         <p:spPr>
           <a:xfrm>
-            <a:off x="10443172" y="118011"/>
-            <a:ext cx="1596912" cy="246221"/>
+            <a:off x="1863850" y="2968931"/>
+            <a:ext cx="3937000" cy="3197361"/>
           </a:xfrm>
           <a:prstGeom prst="rect">
             <a:avLst/>
           </a:prstGeom>
         </p:spPr>
-        <p:txBody>
-          <a:bodyPr wrap="none">
-            <a:spAutoFit/>
-          </a:bodyPr>
-          <a:lstStyle/>
-          <a:p>
-            <a:r>
-              <a:rPr lang="ko-KR" altLang="en-US" sz="1000" dirty="0" err="1">
-                <a:solidFill>
-                  <a:schemeClr val="bg1">
-                    <a:lumMod val="75000"/>
-                  </a:schemeClr>
-                </a:solidFill>
-                <a:latin typeface="나눔바른고딕" panose="020B0603020101020101" pitchFamily="34" charset="-127"/>
-                <a:ea typeface="나눔바른고딕" panose="020B0603020101020101" pitchFamily="34" charset="-127"/>
-              </a:rPr>
-              <a:t>펄어비스</a:t>
-            </a:r>
-            <a:r>
-              <a:rPr lang="ko-KR" altLang="en-US" sz="1000" dirty="0">
-                <a:solidFill>
-                  <a:schemeClr val="bg1">
-                    <a:lumMod val="75000"/>
-                  </a:schemeClr>
-                </a:solidFill>
-                <a:latin typeface="나눔바른고딕" panose="020B0603020101020101" pitchFamily="34" charset="-127"/>
-                <a:ea typeface="나눔바른고딕" panose="020B0603020101020101" pitchFamily="34" charset="-127"/>
-              </a:rPr>
-              <a:t> </a:t>
-            </a:r>
-            <a:r>
-              <a:rPr lang="en-US" altLang="ko-KR" sz="1000" dirty="0">
-                <a:solidFill>
-                  <a:schemeClr val="bg1">
-                    <a:lumMod val="75000"/>
-                  </a:schemeClr>
-                </a:solidFill>
-                <a:latin typeface="나눔바른고딕" panose="020B0603020101020101" pitchFamily="34" charset="-127"/>
-                <a:ea typeface="나눔바른고딕" panose="020B0603020101020101" pitchFamily="34" charset="-127"/>
-              </a:rPr>
-              <a:t>2026 </a:t>
-            </a:r>
-            <a:r>
-              <a:rPr lang="ko-KR" altLang="en-US" sz="1000" dirty="0">
-                <a:solidFill>
-                  <a:schemeClr val="bg1">
-                    <a:lumMod val="75000"/>
-                  </a:schemeClr>
-                </a:solidFill>
-                <a:latin typeface="나눔바른고딕" panose="020B0603020101020101" pitchFamily="34" charset="-127"/>
-                <a:ea typeface="나눔바른고딕" panose="020B0603020101020101" pitchFamily="34" charset="-127"/>
-              </a:rPr>
-              <a:t>여름 </a:t>
-            </a:r>
-            <a:r>
-              <a:rPr lang="ko-KR" altLang="en-US" sz="1000" dirty="0" err="1">
-                <a:solidFill>
-                  <a:schemeClr val="bg1">
-                    <a:lumMod val="75000"/>
-                  </a:schemeClr>
-                </a:solidFill>
-                <a:latin typeface="나눔바른고딕" panose="020B0603020101020101" pitchFamily="34" charset="-127"/>
-                <a:ea typeface="나눔바른고딕" panose="020B0603020101020101" pitchFamily="34" charset="-127"/>
-              </a:rPr>
-              <a:t>인턴십</a:t>
-            </a:r>
-            <a:endParaRPr lang="ko-KR" altLang="en-US" sz="1000" dirty="0">
-              <a:solidFill>
-                <a:schemeClr val="bg1">
-                  <a:lumMod val="75000"/>
-                </a:schemeClr>
-              </a:solidFill>
-              <a:latin typeface="나눔바른고딕" panose="020B0603020101020101" pitchFamily="34" charset="-127"/>
-              <a:ea typeface="나눔바른고딕" panose="020B0603020101020101" pitchFamily="34" charset="-127"/>
-            </a:endParaRPr>
-          </a:p>
-        </p:txBody>
-      </p:sp>
-      <p:sp>
-        <p:nvSpPr>
-          <p:cNvPr id="5" name="TextBox 4">
-            <a:extLst>
-              <a:ext uri="{FF2B5EF4-FFF2-40B4-BE49-F238E27FC236}">
-                <a16:creationId xmlns:a16="http://schemas.microsoft.com/office/drawing/2014/main" id="{9ABA39A3-5B85-061F-D2FA-FA5D5CE3074C}"/>
-              </a:ext>
-            </a:extLst>
-          </p:cNvPr>
-          <p:cNvSpPr txBox="1"/>
-          <p:nvPr/>
-        </p:nvSpPr>
-        <p:spPr>
-          <a:xfrm>
-            <a:off x="302449" y="1342316"/>
-            <a:ext cx="7464813" cy="346249"/>
-          </a:xfrm>
-          <a:prstGeom prst="rect">
-            <a:avLst/>
-          </a:prstGeom>
-          <a:noFill/>
-        </p:spPr>
-        <p:txBody>
-          <a:bodyPr wrap="square" rtlCol="0">
-            <a:spAutoFit/>
-          </a:bodyPr>
-          <a:lstStyle/>
-          <a:p>
-            <a:pPr>
-              <a:lnSpc>
-                <a:spcPct val="150000"/>
-              </a:lnSpc>
-            </a:pPr>
-            <a:r>
-              <a:rPr lang="ko-KR" altLang="en-US" sz="1200" dirty="0">
-                <a:latin typeface="나눔바른고딕" panose="020B0603020101020101" pitchFamily="34" charset="-127"/>
-                <a:ea typeface="나눔바른고딕" panose="020B0603020101020101" pitchFamily="34" charset="-127"/>
-              </a:rPr>
-              <a:t>특수 장애물 착지 시 전환</a:t>
-            </a:r>
-            <a:endParaRPr lang="en-US" altLang="ko-KR" sz="1200" dirty="0">
-              <a:latin typeface="나눔바른고딕" panose="020B0603020101020101" pitchFamily="34" charset="-127"/>
-              <a:ea typeface="나눔바른고딕" panose="020B0603020101020101" pitchFamily="34" charset="-127"/>
-            </a:endParaRPr>
+        <p:style>
+          <a:lnRef idx="2">
+            <a:schemeClr val="accent1">
+              <a:shade val="15000"/>
+            </a:schemeClr>
+          </a:lnRef>
+          <a:fillRef idx="1">
+            <a:schemeClr val="accent1"/>
+          </a:fillRef>
+          <a:effectRef idx="0">
+            <a:schemeClr val="accent1"/>
+          </a:effectRef>
+          <a:fontRef idx="minor">
+            <a:schemeClr val="lt1"/>
+          </a:fontRef>
+        </p:style>
+        <p:txBody>
+          <a:bodyPr rtlCol="0" anchor="ctr"/>
+          <a:lstStyle/>
+          <a:p>
+            <a:pPr algn="ctr"/>
+            <a:r>
+              <a:rPr lang="en-US" altLang="ko-KR" dirty="0"/>
+              <a:t>Beam</a:t>
+            </a:r>
+            <a:r>
+              <a:rPr lang="ko-KR" altLang="en-US" dirty="0"/>
+              <a:t> 안착 시도</a:t>
+            </a:r>
           </a:p>
         </p:txBody>
       </p:sp>
@@ -6942,316 +6199,7 @@
 </p:sld>
 </file>
 
-<file path=ppt/slides/slide8.xml><?xml version="1.0" encoding="utf-8"?>
-<p:sld xmlns:a="http://schemas.openxmlformats.org/drawingml/2006/main" xmlns:r="http://schemas.openxmlformats.org/officeDocument/2006/relationships" xmlns:p="http://schemas.openxmlformats.org/presentationml/2006/main">
-  <p:cSld>
-    <p:spTree>
-      <p:nvGrpSpPr>
-        <p:cNvPr id="1" name="">
-          <a:extLst>
-            <a:ext uri="{FF2B5EF4-FFF2-40B4-BE49-F238E27FC236}">
-              <a16:creationId xmlns:a16="http://schemas.microsoft.com/office/drawing/2014/main" id="{9690D0EC-ADDF-E5ED-8CDC-618822F7C27D}"/>
-            </a:ext>
-          </a:extLst>
-        </p:cNvPr>
-        <p:cNvGrpSpPr/>
-        <p:nvPr/>
-      </p:nvGrpSpPr>
-      <p:grpSpPr>
-        <a:xfrm>
-          <a:off x="0" y="0"/>
-          <a:ext cx="0" cy="0"/>
-          <a:chOff x="0" y="0"/>
-          <a:chExt cx="0" cy="0"/>
-        </a:xfrm>
-      </p:grpSpPr>
-      <p:sp>
-        <p:nvSpPr>
-          <p:cNvPr id="8" name="TextBox 7">
-            <a:extLst>
-              <a:ext uri="{FF2B5EF4-FFF2-40B4-BE49-F238E27FC236}">
-                <a16:creationId xmlns:a16="http://schemas.microsoft.com/office/drawing/2014/main" id="{4C2673F8-90EF-5A3B-D7FA-41639C49F078}"/>
-              </a:ext>
-            </a:extLst>
-          </p:cNvPr>
-          <p:cNvSpPr txBox="1"/>
-          <p:nvPr/>
-        </p:nvSpPr>
-        <p:spPr>
-          <a:xfrm>
-            <a:off x="302451" y="315453"/>
-            <a:ext cx="4944140" cy="369332"/>
-          </a:xfrm>
-          <a:prstGeom prst="rect">
-            <a:avLst/>
-          </a:prstGeom>
-          <a:noFill/>
-        </p:spPr>
-        <p:txBody>
-          <a:bodyPr wrap="square" rtlCol="0">
-            <a:spAutoFit/>
-          </a:bodyPr>
-          <a:lstStyle/>
-          <a:p>
-            <a:r>
-              <a:rPr lang="ko-KR" altLang="en-US" dirty="0">
-                <a:latin typeface="나눔바른고딕" panose="020B0603020101020101" pitchFamily="34" charset="-127"/>
-                <a:ea typeface="나눔바른고딕" panose="020B0603020101020101" pitchFamily="34" charset="-127"/>
-              </a:rPr>
-              <a:t>이번 주 작업 내역</a:t>
-            </a:r>
-            <a:endParaRPr lang="en-US" altLang="ko-KR" dirty="0">
-              <a:latin typeface="나눔바른고딕" panose="020B0603020101020101" pitchFamily="34" charset="-127"/>
-              <a:ea typeface="나눔바른고딕" panose="020B0603020101020101" pitchFamily="34" charset="-127"/>
-            </a:endParaRPr>
-          </a:p>
-        </p:txBody>
-      </p:sp>
-      <p:sp>
-        <p:nvSpPr>
-          <p:cNvPr id="10" name="TextBox 9">
-            <a:extLst>
-              <a:ext uri="{FF2B5EF4-FFF2-40B4-BE49-F238E27FC236}">
-                <a16:creationId xmlns:a16="http://schemas.microsoft.com/office/drawing/2014/main" id="{83CABDF4-BD27-8D2C-8723-BFD161AA0233}"/>
-              </a:ext>
-            </a:extLst>
-          </p:cNvPr>
-          <p:cNvSpPr txBox="1"/>
-          <p:nvPr/>
-        </p:nvSpPr>
-        <p:spPr>
-          <a:xfrm>
-            <a:off x="302450" y="1003762"/>
-            <a:ext cx="2694247" cy="338554"/>
-          </a:xfrm>
-          <a:prstGeom prst="rect">
-            <a:avLst/>
-          </a:prstGeom>
-          <a:noFill/>
-        </p:spPr>
-        <p:txBody>
-          <a:bodyPr wrap="square" rtlCol="0">
-            <a:spAutoFit/>
-          </a:bodyPr>
-          <a:lstStyle/>
-          <a:p>
-            <a:r>
-              <a:rPr lang="ko-KR" altLang="en-US" sz="1600" dirty="0">
-                <a:latin typeface="나눔바른고딕" panose="020B0603020101020101" pitchFamily="34" charset="-127"/>
-                <a:ea typeface="나눔바른고딕" panose="020B0603020101020101" pitchFamily="34" charset="-127"/>
-              </a:rPr>
-              <a:t>액션 추가</a:t>
-            </a:r>
-            <a:endParaRPr lang="en-US" altLang="ko-KR" sz="1600" dirty="0">
-              <a:latin typeface="나눔바른고딕" panose="020B0603020101020101" pitchFamily="34" charset="-127"/>
-              <a:ea typeface="나눔바른고딕" panose="020B0603020101020101" pitchFamily="34" charset="-127"/>
-            </a:endParaRPr>
-          </a:p>
-        </p:txBody>
-      </p:sp>
-      <p:cxnSp>
-        <p:nvCxnSpPr>
-          <p:cNvPr id="3" name="직선 연결선 2">
-            <a:extLst>
-              <a:ext uri="{FF2B5EF4-FFF2-40B4-BE49-F238E27FC236}">
-                <a16:creationId xmlns:a16="http://schemas.microsoft.com/office/drawing/2014/main" id="{1415391C-0291-0919-B608-C9158E5E1F16}"/>
-              </a:ext>
-            </a:extLst>
-          </p:cNvPr>
-          <p:cNvCxnSpPr>
-            <a:cxnSpLocks/>
-          </p:cNvCxnSpPr>
-          <p:nvPr/>
-        </p:nvCxnSpPr>
-        <p:spPr>
-          <a:xfrm>
-            <a:off x="387511" y="818707"/>
-            <a:ext cx="11308303" cy="0"/>
-          </a:xfrm>
-          <a:prstGeom prst="line">
-            <a:avLst/>
-          </a:prstGeom>
-          <a:ln>
-            <a:solidFill>
-              <a:schemeClr val="tx2"/>
-            </a:solidFill>
-          </a:ln>
-        </p:spPr>
-        <p:style>
-          <a:lnRef idx="2">
-            <a:schemeClr val="accent1"/>
-          </a:lnRef>
-          <a:fillRef idx="0">
-            <a:schemeClr val="accent1"/>
-          </a:fillRef>
-          <a:effectRef idx="1">
-            <a:schemeClr val="accent1"/>
-          </a:effectRef>
-          <a:fontRef idx="minor">
-            <a:schemeClr val="tx1"/>
-          </a:fontRef>
-        </p:style>
-      </p:cxnSp>
-      <p:sp>
-        <p:nvSpPr>
-          <p:cNvPr id="12" name="직사각형 11">
-            <a:extLst>
-              <a:ext uri="{FF2B5EF4-FFF2-40B4-BE49-F238E27FC236}">
-                <a16:creationId xmlns:a16="http://schemas.microsoft.com/office/drawing/2014/main" id="{6C909F7D-8B3E-66D5-7336-4B3379EFFD27}"/>
-              </a:ext>
-            </a:extLst>
-          </p:cNvPr>
-          <p:cNvSpPr/>
-          <p:nvPr/>
-        </p:nvSpPr>
-        <p:spPr>
-          <a:xfrm>
-            <a:off x="10443172" y="118011"/>
-            <a:ext cx="1596912" cy="246221"/>
-          </a:xfrm>
-          <a:prstGeom prst="rect">
-            <a:avLst/>
-          </a:prstGeom>
-        </p:spPr>
-        <p:txBody>
-          <a:bodyPr wrap="none">
-            <a:spAutoFit/>
-          </a:bodyPr>
-          <a:lstStyle/>
-          <a:p>
-            <a:r>
-              <a:rPr lang="ko-KR" altLang="en-US" sz="1000" dirty="0" err="1">
-                <a:solidFill>
-                  <a:schemeClr val="bg1">
-                    <a:lumMod val="75000"/>
-                  </a:schemeClr>
-                </a:solidFill>
-                <a:latin typeface="나눔바른고딕" panose="020B0603020101020101" pitchFamily="34" charset="-127"/>
-                <a:ea typeface="나눔바른고딕" panose="020B0603020101020101" pitchFamily="34" charset="-127"/>
-              </a:rPr>
-              <a:t>펄어비스</a:t>
-            </a:r>
-            <a:r>
-              <a:rPr lang="ko-KR" altLang="en-US" sz="1000" dirty="0">
-                <a:solidFill>
-                  <a:schemeClr val="bg1">
-                    <a:lumMod val="75000"/>
-                  </a:schemeClr>
-                </a:solidFill>
-                <a:latin typeface="나눔바른고딕" panose="020B0603020101020101" pitchFamily="34" charset="-127"/>
-                <a:ea typeface="나눔바른고딕" panose="020B0603020101020101" pitchFamily="34" charset="-127"/>
-              </a:rPr>
-              <a:t> </a:t>
-            </a:r>
-            <a:r>
-              <a:rPr lang="en-US" altLang="ko-KR" sz="1000" dirty="0">
-                <a:solidFill>
-                  <a:schemeClr val="bg1">
-                    <a:lumMod val="75000"/>
-                  </a:schemeClr>
-                </a:solidFill>
-                <a:latin typeface="나눔바른고딕" panose="020B0603020101020101" pitchFamily="34" charset="-127"/>
-                <a:ea typeface="나눔바른고딕" panose="020B0603020101020101" pitchFamily="34" charset="-127"/>
-              </a:rPr>
-              <a:t>2026 </a:t>
-            </a:r>
-            <a:r>
-              <a:rPr lang="ko-KR" altLang="en-US" sz="1000" dirty="0">
-                <a:solidFill>
-                  <a:schemeClr val="bg1">
-                    <a:lumMod val="75000"/>
-                  </a:schemeClr>
-                </a:solidFill>
-                <a:latin typeface="나눔바른고딕" panose="020B0603020101020101" pitchFamily="34" charset="-127"/>
-                <a:ea typeface="나눔바른고딕" panose="020B0603020101020101" pitchFamily="34" charset="-127"/>
-              </a:rPr>
-              <a:t>여름 </a:t>
-            </a:r>
-            <a:r>
-              <a:rPr lang="ko-KR" altLang="en-US" sz="1000" dirty="0" err="1">
-                <a:solidFill>
-                  <a:schemeClr val="bg1">
-                    <a:lumMod val="75000"/>
-                  </a:schemeClr>
-                </a:solidFill>
-                <a:latin typeface="나눔바른고딕" panose="020B0603020101020101" pitchFamily="34" charset="-127"/>
-                <a:ea typeface="나눔바른고딕" panose="020B0603020101020101" pitchFamily="34" charset="-127"/>
-              </a:rPr>
-              <a:t>인턴십</a:t>
-            </a:r>
-            <a:endParaRPr lang="ko-KR" altLang="en-US" sz="1000" dirty="0">
-              <a:solidFill>
-                <a:schemeClr val="bg1">
-                  <a:lumMod val="75000"/>
-                </a:schemeClr>
-              </a:solidFill>
-              <a:latin typeface="나눔바른고딕" panose="020B0603020101020101" pitchFamily="34" charset="-127"/>
-              <a:ea typeface="나눔바른고딕" panose="020B0603020101020101" pitchFamily="34" charset="-127"/>
-            </a:endParaRPr>
-          </a:p>
-        </p:txBody>
-      </p:sp>
-      <p:sp>
-        <p:nvSpPr>
-          <p:cNvPr id="5" name="TextBox 4">
-            <a:extLst>
-              <a:ext uri="{FF2B5EF4-FFF2-40B4-BE49-F238E27FC236}">
-                <a16:creationId xmlns:a16="http://schemas.microsoft.com/office/drawing/2014/main" id="{B1E56A7D-4C35-68D6-EA63-7EF5E6250444}"/>
-              </a:ext>
-            </a:extLst>
-          </p:cNvPr>
-          <p:cNvSpPr txBox="1"/>
-          <p:nvPr/>
-        </p:nvSpPr>
-        <p:spPr>
-          <a:xfrm>
-            <a:off x="302449" y="1342316"/>
-            <a:ext cx="7464813" cy="346249"/>
-          </a:xfrm>
-          <a:prstGeom prst="rect">
-            <a:avLst/>
-          </a:prstGeom>
-          <a:noFill/>
-        </p:spPr>
-        <p:txBody>
-          <a:bodyPr wrap="square" rtlCol="0">
-            <a:spAutoFit/>
-          </a:bodyPr>
-          <a:lstStyle/>
-          <a:p>
-            <a:pPr>
-              <a:lnSpc>
-                <a:spcPct val="150000"/>
-              </a:lnSpc>
-            </a:pPr>
-            <a:r>
-              <a:rPr lang="ko-KR" altLang="en-US" sz="1200" dirty="0">
-                <a:latin typeface="나눔바른고딕" panose="020B0603020101020101" pitchFamily="34" charset="-127"/>
-                <a:ea typeface="나눔바른고딕" panose="020B0603020101020101" pitchFamily="34" charset="-127"/>
-              </a:rPr>
-              <a:t>가속도에 따른 액션</a:t>
-            </a:r>
-            <a:endParaRPr lang="en-US" altLang="ko-KR" sz="1200" dirty="0">
-              <a:latin typeface="나눔바른고딕" panose="020B0603020101020101" pitchFamily="34" charset="-127"/>
-              <a:ea typeface="나눔바른고딕" panose="020B0603020101020101" pitchFamily="34" charset="-127"/>
-            </a:endParaRPr>
-          </a:p>
-        </p:txBody>
-      </p:sp>
-    </p:spTree>
-    <p:extLst>
-      <p:ext uri="{BB962C8B-B14F-4D97-AF65-F5344CB8AC3E}">
-        <p14:creationId xmlns:p14="http://schemas.microsoft.com/office/powerpoint/2010/main" val="1601023046"/>
-      </p:ext>
-    </p:extLst>
-  </p:cSld>
-  <p:clrMapOvr>
-    <a:masterClrMapping/>
-  </p:clrMapOvr>
-</p:sld>
-</file>
-
-<file path=ppt/slides/slide9.xml><?xml version="1.0" encoding="utf-8"?>
+<file path=ppt/slides/slide12.xml><?xml version="1.0" encoding="utf-8"?>
 <p:sld xmlns:a="http://schemas.openxmlformats.org/drawingml/2006/main" xmlns:r="http://schemas.openxmlformats.org/officeDocument/2006/relationships" xmlns:p="http://schemas.openxmlformats.org/presentationml/2006/main">
   <p:cSld>
     <p:spTree>
@@ -8975,6 +7923,4533 @@
     <p:extLst>
       <p:ext uri="{BB962C8B-B14F-4D97-AF65-F5344CB8AC3E}">
         <p14:creationId xmlns:p14="http://schemas.microsoft.com/office/powerpoint/2010/main" val="2156804411"/>
+      </p:ext>
+    </p:extLst>
+  </p:cSld>
+  <p:clrMapOvr>
+    <a:masterClrMapping/>
+  </p:clrMapOvr>
+</p:sld>
+</file>
+
+<file path=ppt/slides/slide2.xml><?xml version="1.0" encoding="utf-8"?>
+<p:sld xmlns:a="http://schemas.openxmlformats.org/drawingml/2006/main" xmlns:r="http://schemas.openxmlformats.org/officeDocument/2006/relationships" xmlns:p="http://schemas.openxmlformats.org/presentationml/2006/main">
+  <p:cSld>
+    <p:spTree>
+      <p:nvGrpSpPr>
+        <p:cNvPr id="1" name="">
+          <a:extLst>
+            <a:ext uri="{FF2B5EF4-FFF2-40B4-BE49-F238E27FC236}">
+              <a16:creationId xmlns:a16="http://schemas.microsoft.com/office/drawing/2014/main" id="{49DA7EAA-204E-2F90-E52A-6C83B9013025}"/>
+            </a:ext>
+          </a:extLst>
+        </p:cNvPr>
+        <p:cNvGrpSpPr/>
+        <p:nvPr/>
+      </p:nvGrpSpPr>
+      <p:grpSpPr>
+        <a:xfrm>
+          <a:off x="0" y="0"/>
+          <a:ext cx="0" cy="0"/>
+          <a:chOff x="0" y="0"/>
+          <a:chExt cx="0" cy="0"/>
+        </a:xfrm>
+      </p:grpSpPr>
+      <p:sp>
+        <p:nvSpPr>
+          <p:cNvPr id="8" name="TextBox 7">
+            <a:extLst>
+              <a:ext uri="{FF2B5EF4-FFF2-40B4-BE49-F238E27FC236}">
+                <a16:creationId xmlns:a16="http://schemas.microsoft.com/office/drawing/2014/main" id="{701093AF-254C-83D7-8032-465A5FB513FB}"/>
+              </a:ext>
+            </a:extLst>
+          </p:cNvPr>
+          <p:cNvSpPr txBox="1"/>
+          <p:nvPr/>
+        </p:nvSpPr>
+        <p:spPr>
+          <a:xfrm>
+            <a:off x="302451" y="315453"/>
+            <a:ext cx="4944140" cy="369332"/>
+          </a:xfrm>
+          <a:prstGeom prst="rect">
+            <a:avLst/>
+          </a:prstGeom>
+          <a:noFill/>
+        </p:spPr>
+        <p:txBody>
+          <a:bodyPr wrap="square" rtlCol="0">
+            <a:spAutoFit/>
+          </a:bodyPr>
+          <a:lstStyle/>
+          <a:p>
+            <a:r>
+              <a:rPr lang="ko-KR" altLang="en-US" dirty="0">
+                <a:latin typeface="나눔바른고딕" panose="020B0603020101020101" pitchFamily="34" charset="-127"/>
+                <a:ea typeface="나눔바른고딕" panose="020B0603020101020101" pitchFamily="34" charset="-127"/>
+              </a:rPr>
+              <a:t>이번 주 작업 내역</a:t>
+            </a:r>
+            <a:endParaRPr lang="en-US" altLang="ko-KR" dirty="0">
+              <a:latin typeface="나눔바른고딕" panose="020B0603020101020101" pitchFamily="34" charset="-127"/>
+              <a:ea typeface="나눔바른고딕" panose="020B0603020101020101" pitchFamily="34" charset="-127"/>
+            </a:endParaRPr>
+          </a:p>
+        </p:txBody>
+      </p:sp>
+      <p:sp>
+        <p:nvSpPr>
+          <p:cNvPr id="10" name="TextBox 9">
+            <a:extLst>
+              <a:ext uri="{FF2B5EF4-FFF2-40B4-BE49-F238E27FC236}">
+                <a16:creationId xmlns:a16="http://schemas.microsoft.com/office/drawing/2014/main" id="{2D538815-CBEF-E37B-5659-B5091F86B485}"/>
+              </a:ext>
+            </a:extLst>
+          </p:cNvPr>
+          <p:cNvSpPr txBox="1"/>
+          <p:nvPr/>
+        </p:nvSpPr>
+        <p:spPr>
+          <a:xfrm>
+            <a:off x="302450" y="1003762"/>
+            <a:ext cx="5366830" cy="338554"/>
+          </a:xfrm>
+          <a:prstGeom prst="rect">
+            <a:avLst/>
+          </a:prstGeom>
+          <a:noFill/>
+        </p:spPr>
+        <p:txBody>
+          <a:bodyPr wrap="square" rtlCol="0">
+            <a:spAutoFit/>
+          </a:bodyPr>
+          <a:lstStyle/>
+          <a:p>
+            <a:r>
+              <a:rPr lang="ko-KR" altLang="en-US" sz="1600" dirty="0">
+                <a:latin typeface="나눔바른고딕" panose="020B0603020101020101" pitchFamily="34" charset="-127"/>
+                <a:ea typeface="나눔바른고딕" panose="020B0603020101020101" pitchFamily="34" charset="-127"/>
+              </a:rPr>
+              <a:t>주요 작업</a:t>
+            </a:r>
+            <a:endParaRPr lang="en-US" altLang="ko-KR" sz="1600" dirty="0">
+              <a:latin typeface="나눔바른고딕" panose="020B0603020101020101" pitchFamily="34" charset="-127"/>
+              <a:ea typeface="나눔바른고딕" panose="020B0603020101020101" pitchFamily="34" charset="-127"/>
+            </a:endParaRPr>
+          </a:p>
+        </p:txBody>
+      </p:sp>
+      <p:cxnSp>
+        <p:nvCxnSpPr>
+          <p:cNvPr id="3" name="직선 연결선 2">
+            <a:extLst>
+              <a:ext uri="{FF2B5EF4-FFF2-40B4-BE49-F238E27FC236}">
+                <a16:creationId xmlns:a16="http://schemas.microsoft.com/office/drawing/2014/main" id="{76FFFECF-4B1C-95DF-32C3-2D2F19BEDAFB}"/>
+              </a:ext>
+            </a:extLst>
+          </p:cNvPr>
+          <p:cNvCxnSpPr>
+            <a:cxnSpLocks/>
+          </p:cNvCxnSpPr>
+          <p:nvPr/>
+        </p:nvCxnSpPr>
+        <p:spPr>
+          <a:xfrm>
+            <a:off x="387511" y="818707"/>
+            <a:ext cx="11308303" cy="0"/>
+          </a:xfrm>
+          <a:prstGeom prst="line">
+            <a:avLst/>
+          </a:prstGeom>
+          <a:ln>
+            <a:solidFill>
+              <a:schemeClr val="tx2"/>
+            </a:solidFill>
+          </a:ln>
+        </p:spPr>
+        <p:style>
+          <a:lnRef idx="2">
+            <a:schemeClr val="accent1"/>
+          </a:lnRef>
+          <a:fillRef idx="0">
+            <a:schemeClr val="accent1"/>
+          </a:fillRef>
+          <a:effectRef idx="1">
+            <a:schemeClr val="accent1"/>
+          </a:effectRef>
+          <a:fontRef idx="minor">
+            <a:schemeClr val="tx1"/>
+          </a:fontRef>
+        </p:style>
+      </p:cxnSp>
+      <p:sp>
+        <p:nvSpPr>
+          <p:cNvPr id="12" name="직사각형 11"/>
+          <p:cNvSpPr/>
+          <p:nvPr/>
+        </p:nvSpPr>
+        <p:spPr>
+          <a:xfrm>
+            <a:off x="10443172" y="118011"/>
+            <a:ext cx="1596912" cy="246221"/>
+          </a:xfrm>
+          <a:prstGeom prst="rect">
+            <a:avLst/>
+          </a:prstGeom>
+        </p:spPr>
+        <p:txBody>
+          <a:bodyPr wrap="none">
+            <a:spAutoFit/>
+          </a:bodyPr>
+          <a:lstStyle/>
+          <a:p>
+            <a:r>
+              <a:rPr lang="ko-KR" altLang="en-US" sz="1000" dirty="0" err="1">
+                <a:solidFill>
+                  <a:schemeClr val="bg1">
+                    <a:lumMod val="75000"/>
+                  </a:schemeClr>
+                </a:solidFill>
+                <a:latin typeface="나눔바른고딕" panose="020B0603020101020101" pitchFamily="34" charset="-127"/>
+                <a:ea typeface="나눔바른고딕" panose="020B0603020101020101" pitchFamily="34" charset="-127"/>
+              </a:rPr>
+              <a:t>펄어비스</a:t>
+            </a:r>
+            <a:r>
+              <a:rPr lang="ko-KR" altLang="en-US" sz="1000" dirty="0">
+                <a:solidFill>
+                  <a:schemeClr val="bg1">
+                    <a:lumMod val="75000"/>
+                  </a:schemeClr>
+                </a:solidFill>
+                <a:latin typeface="나눔바른고딕" panose="020B0603020101020101" pitchFamily="34" charset="-127"/>
+                <a:ea typeface="나눔바른고딕" panose="020B0603020101020101" pitchFamily="34" charset="-127"/>
+              </a:rPr>
+              <a:t> </a:t>
+            </a:r>
+            <a:r>
+              <a:rPr lang="en-US" altLang="ko-KR" sz="1000" dirty="0">
+                <a:solidFill>
+                  <a:schemeClr val="bg1">
+                    <a:lumMod val="75000"/>
+                  </a:schemeClr>
+                </a:solidFill>
+                <a:latin typeface="나눔바른고딕" panose="020B0603020101020101" pitchFamily="34" charset="-127"/>
+                <a:ea typeface="나눔바른고딕" panose="020B0603020101020101" pitchFamily="34" charset="-127"/>
+              </a:rPr>
+              <a:t>2026 </a:t>
+            </a:r>
+            <a:r>
+              <a:rPr lang="ko-KR" altLang="en-US" sz="1000" dirty="0">
+                <a:solidFill>
+                  <a:schemeClr val="bg1">
+                    <a:lumMod val="75000"/>
+                  </a:schemeClr>
+                </a:solidFill>
+                <a:latin typeface="나눔바른고딕" panose="020B0603020101020101" pitchFamily="34" charset="-127"/>
+                <a:ea typeface="나눔바른고딕" panose="020B0603020101020101" pitchFamily="34" charset="-127"/>
+              </a:rPr>
+              <a:t>여름 </a:t>
+            </a:r>
+            <a:r>
+              <a:rPr lang="ko-KR" altLang="en-US" sz="1000" dirty="0" err="1">
+                <a:solidFill>
+                  <a:schemeClr val="bg1">
+                    <a:lumMod val="75000"/>
+                  </a:schemeClr>
+                </a:solidFill>
+                <a:latin typeface="나눔바른고딕" panose="020B0603020101020101" pitchFamily="34" charset="-127"/>
+                <a:ea typeface="나눔바른고딕" panose="020B0603020101020101" pitchFamily="34" charset="-127"/>
+              </a:rPr>
+              <a:t>인턴십</a:t>
+            </a:r>
+            <a:endParaRPr lang="ko-KR" altLang="en-US" sz="1000" dirty="0">
+              <a:solidFill>
+                <a:schemeClr val="bg1">
+                  <a:lumMod val="75000"/>
+                </a:schemeClr>
+              </a:solidFill>
+              <a:latin typeface="나눔바른고딕" panose="020B0603020101020101" pitchFamily="34" charset="-127"/>
+              <a:ea typeface="나눔바른고딕" panose="020B0603020101020101" pitchFamily="34" charset="-127"/>
+            </a:endParaRPr>
+          </a:p>
+        </p:txBody>
+      </p:sp>
+      <p:sp>
+        <p:nvSpPr>
+          <p:cNvPr id="4" name="TextBox 3">
+            <a:extLst>
+              <a:ext uri="{FF2B5EF4-FFF2-40B4-BE49-F238E27FC236}">
+                <a16:creationId xmlns:a16="http://schemas.microsoft.com/office/drawing/2014/main" id="{BDC3BDF7-0C17-3E65-3F95-62AEFEB0CD86}"/>
+              </a:ext>
+            </a:extLst>
+          </p:cNvPr>
+          <p:cNvSpPr txBox="1"/>
+          <p:nvPr/>
+        </p:nvSpPr>
+        <p:spPr>
+          <a:xfrm>
+            <a:off x="302450" y="1342316"/>
+            <a:ext cx="5138684" cy="900246"/>
+          </a:xfrm>
+          <a:prstGeom prst="rect">
+            <a:avLst/>
+          </a:prstGeom>
+          <a:noFill/>
+        </p:spPr>
+        <p:txBody>
+          <a:bodyPr wrap="square" rtlCol="0">
+            <a:spAutoFit/>
+          </a:bodyPr>
+          <a:lstStyle/>
+          <a:p>
+            <a:pPr marL="171450" indent="-171450">
+              <a:lnSpc>
+                <a:spcPct val="150000"/>
+              </a:lnSpc>
+              <a:buFont typeface="Arial" panose="020B0604020202020204" pitchFamily="34" charset="0"/>
+              <a:buChar char="•"/>
+            </a:pPr>
+            <a:r>
+              <a:rPr lang="ko-KR" altLang="en-US" sz="1200" dirty="0">
+                <a:latin typeface="나눔바른고딕" panose="020B0603020101020101" pitchFamily="34" charset="-127"/>
+                <a:ea typeface="나눔바른고딕" panose="020B0603020101020101" pitchFamily="34" charset="-127"/>
+              </a:rPr>
+              <a:t>노드 정리 </a:t>
+            </a:r>
+            <a:r>
+              <a:rPr lang="en-US" altLang="ko-KR" sz="1200" dirty="0">
+                <a:latin typeface="나눔바른고딕" panose="020B0603020101020101" pitchFamily="34" charset="-127"/>
+                <a:ea typeface="나눔바른고딕" panose="020B0603020101020101" pitchFamily="34" charset="-127"/>
+              </a:rPr>
+              <a:t>: </a:t>
+            </a:r>
+            <a:r>
+              <a:rPr lang="ko-KR" altLang="en-US" sz="1200" dirty="0">
+                <a:latin typeface="나눔바른고딕" panose="020B0603020101020101" pitchFamily="34" charset="-127"/>
+                <a:ea typeface="나눔바른고딕" panose="020B0603020101020101" pitchFamily="34" charset="-127"/>
+              </a:rPr>
+              <a:t>노드 </a:t>
+            </a:r>
+            <a:r>
+              <a:rPr lang="ko-KR" altLang="en-US" sz="1200" dirty="0" err="1">
+                <a:latin typeface="나눔바른고딕" panose="020B0603020101020101" pitchFamily="34" charset="-127"/>
+                <a:ea typeface="나눔바른고딕" panose="020B0603020101020101" pitchFamily="34" charset="-127"/>
+              </a:rPr>
+              <a:t>데코레이터</a:t>
+            </a:r>
+            <a:r>
+              <a:rPr lang="ko-KR" altLang="en-US" sz="1200" dirty="0">
+                <a:latin typeface="나눔바른고딕" panose="020B0603020101020101" pitchFamily="34" charset="-127"/>
+                <a:ea typeface="나눔바른고딕" panose="020B0603020101020101" pitchFamily="34" charset="-127"/>
+              </a:rPr>
+              <a:t> 추가</a:t>
+            </a:r>
+            <a:r>
+              <a:rPr lang="en-US" altLang="ko-KR" sz="1200" dirty="0">
+                <a:latin typeface="나눔바른고딕" panose="020B0603020101020101" pitchFamily="34" charset="-127"/>
+                <a:ea typeface="나눔바른고딕" panose="020B0603020101020101" pitchFamily="34" charset="-127"/>
+              </a:rPr>
+              <a:t>, </a:t>
+            </a:r>
+            <a:r>
+              <a:rPr lang="ko-KR" altLang="en-US" sz="1200" dirty="0">
+                <a:latin typeface="나눔바른고딕" panose="020B0603020101020101" pitchFamily="34" charset="-127"/>
+                <a:ea typeface="나눔바른고딕" panose="020B0603020101020101" pitchFamily="34" charset="-127"/>
+              </a:rPr>
+              <a:t>노드 범용화 작업</a:t>
+            </a:r>
+            <a:endParaRPr lang="en-US" altLang="ko-KR" sz="1200" dirty="0">
+              <a:latin typeface="나눔바른고딕" panose="020B0603020101020101" pitchFamily="34" charset="-127"/>
+              <a:ea typeface="나눔바른고딕" panose="020B0603020101020101" pitchFamily="34" charset="-127"/>
+            </a:endParaRPr>
+          </a:p>
+          <a:p>
+            <a:pPr marL="171450" indent="-171450">
+              <a:lnSpc>
+                <a:spcPct val="150000"/>
+              </a:lnSpc>
+              <a:buFont typeface="Arial" panose="020B0604020202020204" pitchFamily="34" charset="0"/>
+              <a:buChar char="•"/>
+            </a:pPr>
+            <a:r>
+              <a:rPr lang="ko-KR" altLang="en-US" sz="1200" dirty="0">
+                <a:latin typeface="나눔바른고딕" panose="020B0603020101020101" pitchFamily="34" charset="-127"/>
+                <a:ea typeface="나눔바른고딕" panose="020B0603020101020101" pitchFamily="34" charset="-127"/>
+              </a:rPr>
+              <a:t>지형 유형 추가 </a:t>
+            </a:r>
+            <a:r>
+              <a:rPr lang="en-US" altLang="ko-KR" sz="1200" dirty="0">
+                <a:latin typeface="나눔바른고딕" panose="020B0603020101020101" pitchFamily="34" charset="-127"/>
+                <a:ea typeface="나눔바른고딕" panose="020B0603020101020101" pitchFamily="34" charset="-127"/>
+              </a:rPr>
+              <a:t>: Pole</a:t>
+            </a:r>
+            <a:r>
+              <a:rPr lang="ko-KR" altLang="en-US" sz="1200" dirty="0">
+                <a:latin typeface="나눔바른고딕" panose="020B0603020101020101" pitchFamily="34" charset="-127"/>
+                <a:ea typeface="나눔바른고딕" panose="020B0603020101020101" pitchFamily="34" charset="-127"/>
+              </a:rPr>
+              <a:t> 타입</a:t>
+            </a:r>
+            <a:endParaRPr lang="en-US" altLang="ko-KR" sz="1200" dirty="0">
+              <a:latin typeface="나눔바른고딕" panose="020B0603020101020101" pitchFamily="34" charset="-127"/>
+              <a:ea typeface="나눔바른고딕" panose="020B0603020101020101" pitchFamily="34" charset="-127"/>
+            </a:endParaRPr>
+          </a:p>
+          <a:p>
+            <a:pPr marL="171450" indent="-171450">
+              <a:lnSpc>
+                <a:spcPct val="150000"/>
+              </a:lnSpc>
+              <a:buFont typeface="Arial" panose="020B0604020202020204" pitchFamily="34" charset="0"/>
+              <a:buChar char="•"/>
+            </a:pPr>
+            <a:r>
+              <a:rPr lang="ko-KR" altLang="en-US" sz="1200" dirty="0">
+                <a:latin typeface="나눔바른고딕" panose="020B0603020101020101" pitchFamily="34" charset="-127"/>
+                <a:ea typeface="나눔바른고딕" panose="020B0603020101020101" pitchFamily="34" charset="-127"/>
+              </a:rPr>
+              <a:t>액션 추가</a:t>
+            </a:r>
+            <a:r>
+              <a:rPr lang="en-US" altLang="ko-KR" sz="1200" dirty="0">
+                <a:latin typeface="나눔바른고딕" panose="020B0603020101020101" pitchFamily="34" charset="-127"/>
+                <a:ea typeface="나눔바른고딕" panose="020B0603020101020101" pitchFamily="34" charset="-127"/>
+              </a:rPr>
+              <a:t> : </a:t>
+            </a:r>
+            <a:r>
+              <a:rPr lang="ko-KR" altLang="en-US" sz="1200" dirty="0">
+                <a:latin typeface="나눔바른고딕" panose="020B0603020101020101" pitchFamily="34" charset="-127"/>
+                <a:ea typeface="나눔바른고딕" panose="020B0603020101020101" pitchFamily="34" charset="-127"/>
+              </a:rPr>
+              <a:t>바로 절벽 부분 인식</a:t>
+            </a:r>
+            <a:r>
+              <a:rPr lang="en-US" altLang="ko-KR" sz="1200" dirty="0">
+                <a:latin typeface="나눔바른고딕" panose="020B0603020101020101" pitchFamily="34" charset="-127"/>
+                <a:ea typeface="나눔바른고딕" panose="020B0603020101020101" pitchFamily="34" charset="-127"/>
+              </a:rPr>
+              <a:t>, </a:t>
+            </a:r>
+            <a:r>
+              <a:rPr lang="ko-KR" altLang="en-US" sz="1200" dirty="0">
+                <a:latin typeface="나눔바른고딕" panose="020B0603020101020101" pitchFamily="34" charset="-127"/>
+                <a:ea typeface="나눔바른고딕" panose="020B0603020101020101" pitchFamily="34" charset="-127"/>
+              </a:rPr>
+              <a:t>특수 장애물 착지 시 전환</a:t>
+            </a:r>
+            <a:endParaRPr lang="en-US" altLang="ko-KR" sz="1200" dirty="0">
+              <a:latin typeface="나눔바른고딕" panose="020B0603020101020101" pitchFamily="34" charset="-127"/>
+              <a:ea typeface="나눔바른고딕" panose="020B0603020101020101" pitchFamily="34" charset="-127"/>
+            </a:endParaRPr>
+          </a:p>
+        </p:txBody>
+      </p:sp>
+      <p:sp>
+        <p:nvSpPr>
+          <p:cNvPr id="5" name="직사각형 4">
+            <a:extLst>
+              <a:ext uri="{FF2B5EF4-FFF2-40B4-BE49-F238E27FC236}">
+                <a16:creationId xmlns:a16="http://schemas.microsoft.com/office/drawing/2014/main" id="{4FA32DEB-CBC2-8FE3-95D6-458D3D7B4658}"/>
+              </a:ext>
+            </a:extLst>
+          </p:cNvPr>
+          <p:cNvSpPr/>
+          <p:nvPr/>
+        </p:nvSpPr>
+        <p:spPr>
+          <a:xfrm>
+            <a:off x="1132428" y="2554750"/>
+            <a:ext cx="9772638" cy="3987797"/>
+          </a:xfrm>
+          <a:prstGeom prst="rect">
+            <a:avLst/>
+          </a:prstGeom>
+        </p:spPr>
+        <p:style>
+          <a:lnRef idx="2">
+            <a:schemeClr val="accent1">
+              <a:shade val="15000"/>
+            </a:schemeClr>
+          </a:lnRef>
+          <a:fillRef idx="1">
+            <a:schemeClr val="accent1"/>
+          </a:fillRef>
+          <a:effectRef idx="0">
+            <a:schemeClr val="accent1"/>
+          </a:effectRef>
+          <a:fontRef idx="minor">
+            <a:schemeClr val="lt1"/>
+          </a:fontRef>
+        </p:style>
+        <p:txBody>
+          <a:bodyPr rtlCol="0" anchor="ctr"/>
+          <a:lstStyle/>
+          <a:p>
+            <a:pPr algn="ctr"/>
+            <a:r>
+              <a:rPr lang="ko-KR" altLang="en-US" dirty="0"/>
+              <a:t>영상 추가</a:t>
+            </a:r>
+          </a:p>
+        </p:txBody>
+      </p:sp>
+    </p:spTree>
+    <p:extLst>
+      <p:ext uri="{BB962C8B-B14F-4D97-AF65-F5344CB8AC3E}">
+        <p14:creationId xmlns:p14="http://schemas.microsoft.com/office/powerpoint/2010/main" val="3140903062"/>
+      </p:ext>
+    </p:extLst>
+  </p:cSld>
+  <p:clrMapOvr>
+    <a:masterClrMapping/>
+  </p:clrMapOvr>
+</p:sld>
+</file>
+
+<file path=ppt/slides/slide3.xml><?xml version="1.0" encoding="utf-8"?>
+<p:sld xmlns:a="http://schemas.openxmlformats.org/drawingml/2006/main" xmlns:r="http://schemas.openxmlformats.org/officeDocument/2006/relationships" xmlns:p="http://schemas.openxmlformats.org/presentationml/2006/main">
+  <p:cSld>
+    <p:spTree>
+      <p:nvGrpSpPr>
+        <p:cNvPr id="1" name="">
+          <a:extLst>
+            <a:ext uri="{FF2B5EF4-FFF2-40B4-BE49-F238E27FC236}">
+              <a16:creationId xmlns:a16="http://schemas.microsoft.com/office/drawing/2014/main" id="{DE735819-D7B3-CF39-35EB-069EA87D2EF7}"/>
+            </a:ext>
+          </a:extLst>
+        </p:cNvPr>
+        <p:cNvGrpSpPr/>
+        <p:nvPr/>
+      </p:nvGrpSpPr>
+      <p:grpSpPr>
+        <a:xfrm>
+          <a:off x="0" y="0"/>
+          <a:ext cx="0" cy="0"/>
+          <a:chOff x="0" y="0"/>
+          <a:chExt cx="0" cy="0"/>
+        </a:xfrm>
+      </p:grpSpPr>
+      <p:sp>
+        <p:nvSpPr>
+          <p:cNvPr id="8" name="TextBox 7">
+            <a:extLst>
+              <a:ext uri="{FF2B5EF4-FFF2-40B4-BE49-F238E27FC236}">
+                <a16:creationId xmlns:a16="http://schemas.microsoft.com/office/drawing/2014/main" id="{7893A0CE-E840-1641-1DFF-77DE70CE1BD8}"/>
+              </a:ext>
+            </a:extLst>
+          </p:cNvPr>
+          <p:cNvSpPr txBox="1"/>
+          <p:nvPr/>
+        </p:nvSpPr>
+        <p:spPr>
+          <a:xfrm>
+            <a:off x="302451" y="315453"/>
+            <a:ext cx="4944140" cy="369332"/>
+          </a:xfrm>
+          <a:prstGeom prst="rect">
+            <a:avLst/>
+          </a:prstGeom>
+          <a:noFill/>
+        </p:spPr>
+        <p:txBody>
+          <a:bodyPr wrap="square" rtlCol="0">
+            <a:spAutoFit/>
+          </a:bodyPr>
+          <a:lstStyle/>
+          <a:p>
+            <a:r>
+              <a:rPr lang="ko-KR" altLang="en-US" dirty="0">
+                <a:latin typeface="나눔바른고딕" panose="020B0603020101020101" pitchFamily="34" charset="-127"/>
+                <a:ea typeface="나눔바른고딕" panose="020B0603020101020101" pitchFamily="34" charset="-127"/>
+              </a:rPr>
+              <a:t>이번 주 작업 내역</a:t>
+            </a:r>
+            <a:endParaRPr lang="en-US" altLang="ko-KR" dirty="0">
+              <a:latin typeface="나눔바른고딕" panose="020B0603020101020101" pitchFamily="34" charset="-127"/>
+              <a:ea typeface="나눔바른고딕" panose="020B0603020101020101" pitchFamily="34" charset="-127"/>
+            </a:endParaRPr>
+          </a:p>
+        </p:txBody>
+      </p:sp>
+      <p:sp>
+        <p:nvSpPr>
+          <p:cNvPr id="10" name="TextBox 9">
+            <a:extLst>
+              <a:ext uri="{FF2B5EF4-FFF2-40B4-BE49-F238E27FC236}">
+                <a16:creationId xmlns:a16="http://schemas.microsoft.com/office/drawing/2014/main" id="{5BFC52FE-14B5-B053-4E1A-AC5E5AA398AC}"/>
+              </a:ext>
+            </a:extLst>
+          </p:cNvPr>
+          <p:cNvSpPr txBox="1"/>
+          <p:nvPr/>
+        </p:nvSpPr>
+        <p:spPr>
+          <a:xfrm>
+            <a:off x="302450" y="1003762"/>
+            <a:ext cx="2694247" cy="338554"/>
+          </a:xfrm>
+          <a:prstGeom prst="rect">
+            <a:avLst/>
+          </a:prstGeom>
+          <a:noFill/>
+        </p:spPr>
+        <p:txBody>
+          <a:bodyPr wrap="square" rtlCol="0">
+            <a:spAutoFit/>
+          </a:bodyPr>
+          <a:lstStyle/>
+          <a:p>
+            <a:r>
+              <a:rPr lang="ko-KR" altLang="en-US" sz="1600" dirty="0">
+                <a:latin typeface="나눔바른고딕" panose="020B0603020101020101" pitchFamily="34" charset="-127"/>
+                <a:ea typeface="나눔바른고딕" panose="020B0603020101020101" pitchFamily="34" charset="-127"/>
+              </a:rPr>
+              <a:t>노드 정리</a:t>
+            </a:r>
+            <a:endParaRPr lang="en-US" altLang="ko-KR" sz="1600" dirty="0">
+              <a:latin typeface="나눔바른고딕" panose="020B0603020101020101" pitchFamily="34" charset="-127"/>
+              <a:ea typeface="나눔바른고딕" panose="020B0603020101020101" pitchFamily="34" charset="-127"/>
+            </a:endParaRPr>
+          </a:p>
+        </p:txBody>
+      </p:sp>
+      <p:cxnSp>
+        <p:nvCxnSpPr>
+          <p:cNvPr id="3" name="직선 연결선 2">
+            <a:extLst>
+              <a:ext uri="{FF2B5EF4-FFF2-40B4-BE49-F238E27FC236}">
+                <a16:creationId xmlns:a16="http://schemas.microsoft.com/office/drawing/2014/main" id="{78A2120E-10EF-9566-14D3-0DC3EA84A746}"/>
+              </a:ext>
+            </a:extLst>
+          </p:cNvPr>
+          <p:cNvCxnSpPr>
+            <a:cxnSpLocks/>
+          </p:cNvCxnSpPr>
+          <p:nvPr/>
+        </p:nvCxnSpPr>
+        <p:spPr>
+          <a:xfrm>
+            <a:off x="387511" y="818707"/>
+            <a:ext cx="11308303" cy="0"/>
+          </a:xfrm>
+          <a:prstGeom prst="line">
+            <a:avLst/>
+          </a:prstGeom>
+          <a:ln>
+            <a:solidFill>
+              <a:schemeClr val="tx2"/>
+            </a:solidFill>
+          </a:ln>
+        </p:spPr>
+        <p:style>
+          <a:lnRef idx="2">
+            <a:schemeClr val="accent1"/>
+          </a:lnRef>
+          <a:fillRef idx="0">
+            <a:schemeClr val="accent1"/>
+          </a:fillRef>
+          <a:effectRef idx="1">
+            <a:schemeClr val="accent1"/>
+          </a:effectRef>
+          <a:fontRef idx="minor">
+            <a:schemeClr val="tx1"/>
+          </a:fontRef>
+        </p:style>
+      </p:cxnSp>
+      <p:sp>
+        <p:nvSpPr>
+          <p:cNvPr id="12" name="직사각형 11">
+            <a:extLst>
+              <a:ext uri="{FF2B5EF4-FFF2-40B4-BE49-F238E27FC236}">
+                <a16:creationId xmlns:a16="http://schemas.microsoft.com/office/drawing/2014/main" id="{4377C070-DD2B-5A29-0FD1-4CF5EC95B5E1}"/>
+              </a:ext>
+            </a:extLst>
+          </p:cNvPr>
+          <p:cNvSpPr/>
+          <p:nvPr/>
+        </p:nvSpPr>
+        <p:spPr>
+          <a:xfrm>
+            <a:off x="10443172" y="118011"/>
+            <a:ext cx="1596912" cy="246221"/>
+          </a:xfrm>
+          <a:prstGeom prst="rect">
+            <a:avLst/>
+          </a:prstGeom>
+        </p:spPr>
+        <p:txBody>
+          <a:bodyPr wrap="none">
+            <a:spAutoFit/>
+          </a:bodyPr>
+          <a:lstStyle/>
+          <a:p>
+            <a:r>
+              <a:rPr lang="ko-KR" altLang="en-US" sz="1000" dirty="0" err="1">
+                <a:solidFill>
+                  <a:schemeClr val="bg1">
+                    <a:lumMod val="75000"/>
+                  </a:schemeClr>
+                </a:solidFill>
+                <a:latin typeface="나눔바른고딕" panose="020B0603020101020101" pitchFamily="34" charset="-127"/>
+                <a:ea typeface="나눔바른고딕" panose="020B0603020101020101" pitchFamily="34" charset="-127"/>
+              </a:rPr>
+              <a:t>펄어비스</a:t>
+            </a:r>
+            <a:r>
+              <a:rPr lang="ko-KR" altLang="en-US" sz="1000" dirty="0">
+                <a:solidFill>
+                  <a:schemeClr val="bg1">
+                    <a:lumMod val="75000"/>
+                  </a:schemeClr>
+                </a:solidFill>
+                <a:latin typeface="나눔바른고딕" panose="020B0603020101020101" pitchFamily="34" charset="-127"/>
+                <a:ea typeface="나눔바른고딕" panose="020B0603020101020101" pitchFamily="34" charset="-127"/>
+              </a:rPr>
+              <a:t> </a:t>
+            </a:r>
+            <a:r>
+              <a:rPr lang="en-US" altLang="ko-KR" sz="1000" dirty="0">
+                <a:solidFill>
+                  <a:schemeClr val="bg1">
+                    <a:lumMod val="75000"/>
+                  </a:schemeClr>
+                </a:solidFill>
+                <a:latin typeface="나눔바른고딕" panose="020B0603020101020101" pitchFamily="34" charset="-127"/>
+                <a:ea typeface="나눔바른고딕" panose="020B0603020101020101" pitchFamily="34" charset="-127"/>
+              </a:rPr>
+              <a:t>2026 </a:t>
+            </a:r>
+            <a:r>
+              <a:rPr lang="ko-KR" altLang="en-US" sz="1000" dirty="0">
+                <a:solidFill>
+                  <a:schemeClr val="bg1">
+                    <a:lumMod val="75000"/>
+                  </a:schemeClr>
+                </a:solidFill>
+                <a:latin typeface="나눔바른고딕" panose="020B0603020101020101" pitchFamily="34" charset="-127"/>
+                <a:ea typeface="나눔바른고딕" panose="020B0603020101020101" pitchFamily="34" charset="-127"/>
+              </a:rPr>
+              <a:t>여름 </a:t>
+            </a:r>
+            <a:r>
+              <a:rPr lang="ko-KR" altLang="en-US" sz="1000" dirty="0" err="1">
+                <a:solidFill>
+                  <a:schemeClr val="bg1">
+                    <a:lumMod val="75000"/>
+                  </a:schemeClr>
+                </a:solidFill>
+                <a:latin typeface="나눔바른고딕" panose="020B0603020101020101" pitchFamily="34" charset="-127"/>
+                <a:ea typeface="나눔바른고딕" panose="020B0603020101020101" pitchFamily="34" charset="-127"/>
+              </a:rPr>
+              <a:t>인턴십</a:t>
+            </a:r>
+            <a:endParaRPr lang="ko-KR" altLang="en-US" sz="1000" dirty="0">
+              <a:solidFill>
+                <a:schemeClr val="bg1">
+                  <a:lumMod val="75000"/>
+                </a:schemeClr>
+              </a:solidFill>
+              <a:latin typeface="나눔바른고딕" panose="020B0603020101020101" pitchFamily="34" charset="-127"/>
+              <a:ea typeface="나눔바른고딕" panose="020B0603020101020101" pitchFamily="34" charset="-127"/>
+            </a:endParaRPr>
+          </a:p>
+        </p:txBody>
+      </p:sp>
+      <p:sp>
+        <p:nvSpPr>
+          <p:cNvPr id="5" name="TextBox 4">
+            <a:extLst>
+              <a:ext uri="{FF2B5EF4-FFF2-40B4-BE49-F238E27FC236}">
+                <a16:creationId xmlns:a16="http://schemas.microsoft.com/office/drawing/2014/main" id="{31CE87BC-1010-EA34-C28A-01DE8F409152}"/>
+              </a:ext>
+            </a:extLst>
+          </p:cNvPr>
+          <p:cNvSpPr txBox="1"/>
+          <p:nvPr/>
+        </p:nvSpPr>
+        <p:spPr>
+          <a:xfrm>
+            <a:off x="302449" y="1727036"/>
+            <a:ext cx="6520758" cy="1458091"/>
+          </a:xfrm>
+          <a:prstGeom prst="rect">
+            <a:avLst/>
+          </a:prstGeom>
+          <a:noFill/>
+        </p:spPr>
+        <p:txBody>
+          <a:bodyPr wrap="square">
+            <a:spAutoFit/>
+          </a:bodyPr>
+          <a:lstStyle/>
+          <a:p>
+            <a:pPr marL="171450" indent="-171450">
+              <a:lnSpc>
+                <a:spcPct val="150000"/>
+              </a:lnSpc>
+              <a:buFont typeface="Arial" panose="020B0604020202020204" pitchFamily="34" charset="0"/>
+              <a:buChar char="•"/>
+            </a:pPr>
+            <a:r>
+              <a:rPr lang="en-US" altLang="ko-KR" sz="1000" dirty="0">
+                <a:latin typeface="나눔바른고딕" panose="020B0603020101020101" pitchFamily="34" charset="-127"/>
+                <a:ea typeface="나눔바른고딕" panose="020B0603020101020101" pitchFamily="34" charset="-127"/>
+              </a:rPr>
+              <a:t>Selector </a:t>
+            </a:r>
+            <a:r>
+              <a:rPr lang="ko-KR" altLang="en-US" sz="1000" dirty="0">
+                <a:latin typeface="나눔바른고딕" panose="020B0603020101020101" pitchFamily="34" charset="-127"/>
+                <a:ea typeface="나눔바른고딕" panose="020B0603020101020101" pitchFamily="34" charset="-127"/>
+              </a:rPr>
+              <a:t>노드 역할의 의미가 모호</a:t>
+            </a:r>
+            <a:endParaRPr lang="en-US" altLang="ko-KR" sz="1000" dirty="0">
+              <a:latin typeface="나눔바른고딕" panose="020B0603020101020101" pitchFamily="34" charset="-127"/>
+              <a:ea typeface="나눔바른고딕" panose="020B0603020101020101" pitchFamily="34" charset="-127"/>
+            </a:endParaRPr>
+          </a:p>
+          <a:p>
+            <a:pPr marL="628650" lvl="1" indent="-171450">
+              <a:lnSpc>
+                <a:spcPct val="150000"/>
+              </a:lnSpc>
+              <a:buFont typeface="Arial" panose="020B0604020202020204" pitchFamily="34" charset="0"/>
+              <a:buChar char="•"/>
+            </a:pPr>
+            <a:r>
+              <a:rPr lang="en-US" altLang="ko-KR" sz="1000" dirty="0">
+                <a:latin typeface="나눔바른고딕" panose="020B0603020101020101" pitchFamily="34" charset="-127"/>
+                <a:ea typeface="나눔바른고딕" panose="020B0603020101020101" pitchFamily="34" charset="-127"/>
+              </a:rPr>
+              <a:t>Sequence </a:t>
+            </a:r>
+            <a:r>
+              <a:rPr lang="ko-KR" altLang="en-US" sz="1000" dirty="0">
+                <a:latin typeface="나눔바른고딕" panose="020B0603020101020101" pitchFamily="34" charset="-127"/>
+                <a:ea typeface="나눔바른고딕" panose="020B0603020101020101" pitchFamily="34" charset="-127"/>
+              </a:rPr>
+              <a:t>노드는 자식들을 순차적으로 실행하는 역할을 수행</a:t>
+            </a:r>
+            <a:endParaRPr lang="en-US" altLang="ko-KR" sz="1000" dirty="0">
+              <a:latin typeface="나눔바른고딕" panose="020B0603020101020101" pitchFamily="34" charset="-127"/>
+              <a:ea typeface="나눔바른고딕" panose="020B0603020101020101" pitchFamily="34" charset="-127"/>
+            </a:endParaRPr>
+          </a:p>
+          <a:p>
+            <a:pPr marL="628650" lvl="1" indent="-171450">
+              <a:lnSpc>
+                <a:spcPct val="150000"/>
+              </a:lnSpc>
+              <a:buFont typeface="Arial" panose="020B0604020202020204" pitchFamily="34" charset="0"/>
+              <a:buChar char="•"/>
+            </a:pPr>
+            <a:r>
+              <a:rPr lang="ko-KR" altLang="en-US" sz="1000" dirty="0">
+                <a:latin typeface="나눔바른고딕" panose="020B0603020101020101" pitchFamily="34" charset="-127"/>
+                <a:ea typeface="나눔바른고딕" panose="020B0603020101020101" pitchFamily="34" charset="-127"/>
+              </a:rPr>
+              <a:t>단순히 </a:t>
+            </a:r>
+            <a:r>
+              <a:rPr lang="en-US" altLang="ko-KR" sz="1000" dirty="0">
+                <a:latin typeface="나눔바른고딕" panose="020B0603020101020101" pitchFamily="34" charset="-127"/>
+                <a:ea typeface="나눔바른고딕" panose="020B0603020101020101" pitchFamily="34" charset="-127"/>
+              </a:rPr>
+              <a:t>switch </a:t>
+            </a:r>
+            <a:r>
+              <a:rPr lang="ko-KR" altLang="en-US" sz="1000" dirty="0">
+                <a:latin typeface="나눔바른고딕" panose="020B0603020101020101" pitchFamily="34" charset="-127"/>
+                <a:ea typeface="나눔바른고딕" panose="020B0603020101020101" pitchFamily="34" charset="-127"/>
+              </a:rPr>
+              <a:t>역할을 하는 노드이며</a:t>
+            </a:r>
+            <a:r>
+              <a:rPr lang="en-US" altLang="ko-KR" sz="1000" dirty="0">
+                <a:latin typeface="나눔바른고딕" panose="020B0603020101020101" pitchFamily="34" charset="-127"/>
+                <a:ea typeface="나눔바른고딕" panose="020B0603020101020101" pitchFamily="34" charset="-127"/>
+              </a:rPr>
+              <a:t>, </a:t>
+            </a:r>
+            <a:r>
+              <a:rPr lang="ko-KR" altLang="en-US" sz="1000" dirty="0">
+                <a:latin typeface="나눔바른고딕" panose="020B0603020101020101" pitchFamily="34" charset="-127"/>
+                <a:ea typeface="나눔바른고딕" panose="020B0603020101020101" pitchFamily="34" charset="-127"/>
+              </a:rPr>
+              <a:t>조건도 필요할 때마다 상속하여 새로 만들어야 함</a:t>
+            </a:r>
+            <a:endParaRPr lang="en-US" altLang="ko-KR" sz="1000" dirty="0">
+              <a:latin typeface="나눔바른고딕" panose="020B0603020101020101" pitchFamily="34" charset="-127"/>
+              <a:ea typeface="나눔바른고딕" panose="020B0603020101020101" pitchFamily="34" charset="-127"/>
+            </a:endParaRPr>
+          </a:p>
+          <a:p>
+            <a:pPr marL="171450" indent="-171450">
+              <a:lnSpc>
+                <a:spcPct val="150000"/>
+              </a:lnSpc>
+              <a:buFont typeface="Arial" panose="020B0604020202020204" pitchFamily="34" charset="0"/>
+              <a:buChar char="•"/>
+            </a:pPr>
+            <a:r>
+              <a:rPr lang="en-US" altLang="ko-KR" sz="1000" dirty="0">
+                <a:latin typeface="나눔바른고딕" panose="020B0603020101020101" pitchFamily="34" charset="-127"/>
+                <a:ea typeface="나눔바른고딕" panose="020B0603020101020101" pitchFamily="34" charset="-127"/>
+              </a:rPr>
+              <a:t> Selector </a:t>
+            </a:r>
+            <a:r>
+              <a:rPr lang="ko-KR" altLang="en-US" sz="1000" dirty="0">
+                <a:latin typeface="나눔바른고딕" panose="020B0603020101020101" pitchFamily="34" charset="-127"/>
+                <a:ea typeface="나눔바른고딕" panose="020B0603020101020101" pitchFamily="34" charset="-127"/>
+              </a:rPr>
+              <a:t>노드의 수정</a:t>
+            </a:r>
+            <a:endParaRPr lang="en-US" altLang="ko-KR" sz="1000" dirty="0">
+              <a:latin typeface="나눔바른고딕" panose="020B0603020101020101" pitchFamily="34" charset="-127"/>
+              <a:ea typeface="나눔바른고딕" panose="020B0603020101020101" pitchFamily="34" charset="-127"/>
+            </a:endParaRPr>
+          </a:p>
+          <a:p>
+            <a:pPr marL="628650" lvl="1" indent="-171450">
+              <a:lnSpc>
+                <a:spcPct val="150000"/>
+              </a:lnSpc>
+              <a:buFont typeface="Arial" panose="020B0604020202020204" pitchFamily="34" charset="0"/>
+              <a:buChar char="•"/>
+            </a:pPr>
+            <a:r>
+              <a:rPr lang="ko-KR" altLang="en-US" sz="1000" dirty="0">
+                <a:latin typeface="나눔바른고딕" panose="020B0603020101020101" pitchFamily="34" charset="-127"/>
+                <a:ea typeface="나눔바른고딕" panose="020B0603020101020101" pitchFamily="34" charset="-127"/>
+              </a:rPr>
+              <a:t>조건을 객체화 시키고</a:t>
+            </a:r>
+            <a:r>
+              <a:rPr lang="en-US" altLang="ko-KR" sz="1000" dirty="0">
+                <a:latin typeface="나눔바른고딕" panose="020B0603020101020101" pitchFamily="34" charset="-127"/>
+                <a:ea typeface="나눔바른고딕" panose="020B0603020101020101" pitchFamily="34" charset="-127"/>
+              </a:rPr>
+              <a:t>, </a:t>
+            </a:r>
+            <a:r>
+              <a:rPr lang="ko-KR" altLang="en-US" sz="1000" dirty="0">
+                <a:latin typeface="나눔바른고딕" panose="020B0603020101020101" pitchFamily="34" charset="-127"/>
+                <a:ea typeface="나눔바른고딕" panose="020B0603020101020101" pitchFamily="34" charset="-127"/>
+              </a:rPr>
+              <a:t>각 노드에 조건을 달 수 있도록 구조 변경</a:t>
+            </a:r>
+            <a:endParaRPr lang="en-US" altLang="ko-KR" sz="1000" dirty="0">
+              <a:latin typeface="나눔바른고딕" panose="020B0603020101020101" pitchFamily="34" charset="-127"/>
+              <a:ea typeface="나눔바른고딕" panose="020B0603020101020101" pitchFamily="34" charset="-127"/>
+            </a:endParaRPr>
+          </a:p>
+          <a:p>
+            <a:pPr marL="628650" lvl="1" indent="-171450">
+              <a:lnSpc>
+                <a:spcPct val="150000"/>
+              </a:lnSpc>
+              <a:buFont typeface="Arial" panose="020B0604020202020204" pitchFamily="34" charset="0"/>
+              <a:buChar char="•"/>
+            </a:pPr>
+            <a:r>
+              <a:rPr lang="en-US" altLang="ko-KR" sz="1000" dirty="0">
+                <a:latin typeface="나눔바른고딕" panose="020B0603020101020101" pitchFamily="34" charset="-127"/>
+                <a:ea typeface="나눔바른고딕" panose="020B0603020101020101" pitchFamily="34" charset="-127"/>
+              </a:rPr>
+              <a:t>Selector, Sequence</a:t>
+            </a:r>
+            <a:r>
+              <a:rPr lang="ko-KR" altLang="en-US" sz="1000" dirty="0">
+                <a:latin typeface="나눔바른고딕" panose="020B0603020101020101" pitchFamily="34" charset="-127"/>
+                <a:ea typeface="나눔바른고딕" panose="020B0603020101020101" pitchFamily="34" charset="-127"/>
+              </a:rPr>
+              <a:t>는 자식 노드들에 달린 조건을 평가하고</a:t>
+            </a:r>
+            <a:r>
+              <a:rPr lang="en-US" altLang="ko-KR" sz="1000" dirty="0">
+                <a:latin typeface="나눔바른고딕" panose="020B0603020101020101" pitchFamily="34" charset="-127"/>
+                <a:ea typeface="나눔바른고딕" panose="020B0603020101020101" pitchFamily="34" charset="-127"/>
+              </a:rPr>
+              <a:t>, </a:t>
+            </a:r>
+            <a:r>
+              <a:rPr lang="ko-KR" altLang="en-US" sz="1000" dirty="0">
+                <a:latin typeface="나눔바른고딕" panose="020B0603020101020101" pitchFamily="34" charset="-127"/>
+                <a:ea typeface="나눔바른고딕" panose="020B0603020101020101" pitchFamily="34" charset="-127"/>
+              </a:rPr>
+              <a:t>노드 실행 여부를 결정</a:t>
+            </a:r>
+            <a:endParaRPr lang="en-US" altLang="ko-KR" sz="1000" dirty="0">
+              <a:latin typeface="나눔바른고딕" panose="020B0603020101020101" pitchFamily="34" charset="-127"/>
+              <a:ea typeface="나눔바른고딕" panose="020B0603020101020101" pitchFamily="34" charset="-127"/>
+            </a:endParaRPr>
+          </a:p>
+        </p:txBody>
+      </p:sp>
+      <p:sp>
+        <p:nvSpPr>
+          <p:cNvPr id="11" name="TextBox 10">
+            <a:extLst>
+              <a:ext uri="{FF2B5EF4-FFF2-40B4-BE49-F238E27FC236}">
+                <a16:creationId xmlns:a16="http://schemas.microsoft.com/office/drawing/2014/main" id="{B14653B1-0EA2-50B6-A438-6B017EBEA53C}"/>
+              </a:ext>
+            </a:extLst>
+          </p:cNvPr>
+          <p:cNvSpPr txBox="1"/>
+          <p:nvPr/>
+        </p:nvSpPr>
+        <p:spPr>
+          <a:xfrm>
+            <a:off x="302449" y="1342316"/>
+            <a:ext cx="7464813" cy="346249"/>
+          </a:xfrm>
+          <a:prstGeom prst="rect">
+            <a:avLst/>
+          </a:prstGeom>
+          <a:noFill/>
+        </p:spPr>
+        <p:txBody>
+          <a:bodyPr wrap="square" rtlCol="0">
+            <a:spAutoFit/>
+          </a:bodyPr>
+          <a:lstStyle/>
+          <a:p>
+            <a:pPr>
+              <a:lnSpc>
+                <a:spcPct val="150000"/>
+              </a:lnSpc>
+            </a:pPr>
+            <a:r>
+              <a:rPr lang="ko-KR" altLang="en-US" sz="1200" dirty="0" err="1">
+                <a:latin typeface="나눔바른고딕" panose="020B0603020101020101" pitchFamily="34" charset="-127"/>
+                <a:ea typeface="나눔바른고딕" panose="020B0603020101020101" pitchFamily="34" charset="-127"/>
+              </a:rPr>
+              <a:t>데코레이터</a:t>
+            </a:r>
+            <a:r>
+              <a:rPr lang="ko-KR" altLang="en-US" sz="1200" dirty="0">
+                <a:latin typeface="나눔바른고딕" panose="020B0603020101020101" pitchFamily="34" charset="-127"/>
+                <a:ea typeface="나눔바른고딕" panose="020B0603020101020101" pitchFamily="34" charset="-127"/>
+              </a:rPr>
+              <a:t> 추가</a:t>
+            </a:r>
+            <a:endParaRPr lang="en-US" altLang="ko-KR" sz="1200" dirty="0">
+              <a:latin typeface="나눔바른고딕" panose="020B0603020101020101" pitchFamily="34" charset="-127"/>
+              <a:ea typeface="나눔바른고딕" panose="020B0603020101020101" pitchFamily="34" charset="-127"/>
+            </a:endParaRPr>
+          </a:p>
+        </p:txBody>
+      </p:sp>
+      <p:sp>
+        <p:nvSpPr>
+          <p:cNvPr id="15" name="TextBox 14">
+            <a:extLst>
+              <a:ext uri="{FF2B5EF4-FFF2-40B4-BE49-F238E27FC236}">
+                <a16:creationId xmlns:a16="http://schemas.microsoft.com/office/drawing/2014/main" id="{6C57A23F-B579-CF9E-9D87-CCD317A4363D}"/>
+              </a:ext>
+            </a:extLst>
+          </p:cNvPr>
+          <p:cNvSpPr txBox="1"/>
+          <p:nvPr/>
+        </p:nvSpPr>
+        <p:spPr>
+          <a:xfrm>
+            <a:off x="8603554" y="1363475"/>
+            <a:ext cx="1839618" cy="303929"/>
+          </a:xfrm>
+          <a:prstGeom prst="rect">
+            <a:avLst/>
+          </a:prstGeom>
+          <a:noFill/>
+        </p:spPr>
+        <p:txBody>
+          <a:bodyPr wrap="square">
+            <a:spAutoFit/>
+          </a:bodyPr>
+          <a:lstStyle/>
+          <a:p>
+            <a:pPr algn="ctr">
+              <a:lnSpc>
+                <a:spcPct val="150000"/>
+              </a:lnSpc>
+            </a:pPr>
+            <a:r>
+              <a:rPr lang="ko-KR" altLang="en-US" sz="1000" dirty="0">
+                <a:latin typeface="나눔바른고딕" panose="020B0603020101020101" pitchFamily="34" charset="-127"/>
+                <a:ea typeface="나눔바른고딕" panose="020B0603020101020101" pitchFamily="34" charset="-127"/>
+              </a:rPr>
+              <a:t>변경 전</a:t>
+            </a:r>
+            <a:endParaRPr lang="en-US" altLang="ko-KR" sz="1000" dirty="0">
+              <a:latin typeface="나눔바른고딕" panose="020B0603020101020101" pitchFamily="34" charset="-127"/>
+              <a:ea typeface="나눔바른고딕" panose="020B0603020101020101" pitchFamily="34" charset="-127"/>
+            </a:endParaRPr>
+          </a:p>
+        </p:txBody>
+      </p:sp>
+    </p:spTree>
+    <p:extLst>
+      <p:ext uri="{BB962C8B-B14F-4D97-AF65-F5344CB8AC3E}">
+        <p14:creationId xmlns:p14="http://schemas.microsoft.com/office/powerpoint/2010/main" val="3465933730"/>
+      </p:ext>
+    </p:extLst>
+  </p:cSld>
+  <p:clrMapOvr>
+    <a:masterClrMapping/>
+  </p:clrMapOvr>
+</p:sld>
+</file>
+
+<file path=ppt/slides/slide4.xml><?xml version="1.0" encoding="utf-8"?>
+<p:sld xmlns:a="http://schemas.openxmlformats.org/drawingml/2006/main" xmlns:r="http://schemas.openxmlformats.org/officeDocument/2006/relationships" xmlns:p="http://schemas.openxmlformats.org/presentationml/2006/main">
+  <p:cSld>
+    <p:spTree>
+      <p:nvGrpSpPr>
+        <p:cNvPr id="1" name="">
+          <a:extLst>
+            <a:ext uri="{FF2B5EF4-FFF2-40B4-BE49-F238E27FC236}">
+              <a16:creationId xmlns:a16="http://schemas.microsoft.com/office/drawing/2014/main" id="{43831968-98F9-F74F-E674-D2672A4F06D9}"/>
+            </a:ext>
+          </a:extLst>
+        </p:cNvPr>
+        <p:cNvGrpSpPr/>
+        <p:nvPr/>
+      </p:nvGrpSpPr>
+      <p:grpSpPr>
+        <a:xfrm>
+          <a:off x="0" y="0"/>
+          <a:ext cx="0" cy="0"/>
+          <a:chOff x="0" y="0"/>
+          <a:chExt cx="0" cy="0"/>
+        </a:xfrm>
+      </p:grpSpPr>
+      <p:sp>
+        <p:nvSpPr>
+          <p:cNvPr id="8" name="TextBox 7">
+            <a:extLst>
+              <a:ext uri="{FF2B5EF4-FFF2-40B4-BE49-F238E27FC236}">
+                <a16:creationId xmlns:a16="http://schemas.microsoft.com/office/drawing/2014/main" id="{B3266D14-86DD-67FE-E5C1-90FEE20EF69C}"/>
+              </a:ext>
+            </a:extLst>
+          </p:cNvPr>
+          <p:cNvSpPr txBox="1"/>
+          <p:nvPr/>
+        </p:nvSpPr>
+        <p:spPr>
+          <a:xfrm>
+            <a:off x="302451" y="315453"/>
+            <a:ext cx="4944140" cy="369332"/>
+          </a:xfrm>
+          <a:prstGeom prst="rect">
+            <a:avLst/>
+          </a:prstGeom>
+          <a:noFill/>
+        </p:spPr>
+        <p:txBody>
+          <a:bodyPr wrap="square" rtlCol="0">
+            <a:spAutoFit/>
+          </a:bodyPr>
+          <a:lstStyle/>
+          <a:p>
+            <a:r>
+              <a:rPr lang="ko-KR" altLang="en-US" dirty="0">
+                <a:latin typeface="나눔바른고딕" panose="020B0603020101020101" pitchFamily="34" charset="-127"/>
+                <a:ea typeface="나눔바른고딕" panose="020B0603020101020101" pitchFamily="34" charset="-127"/>
+              </a:rPr>
+              <a:t>이번 주 작업 내역</a:t>
+            </a:r>
+            <a:endParaRPr lang="en-US" altLang="ko-KR" dirty="0">
+              <a:latin typeface="나눔바른고딕" panose="020B0603020101020101" pitchFamily="34" charset="-127"/>
+              <a:ea typeface="나눔바른고딕" panose="020B0603020101020101" pitchFamily="34" charset="-127"/>
+            </a:endParaRPr>
+          </a:p>
+        </p:txBody>
+      </p:sp>
+      <p:sp>
+        <p:nvSpPr>
+          <p:cNvPr id="10" name="TextBox 9">
+            <a:extLst>
+              <a:ext uri="{FF2B5EF4-FFF2-40B4-BE49-F238E27FC236}">
+                <a16:creationId xmlns:a16="http://schemas.microsoft.com/office/drawing/2014/main" id="{7301DB53-0E97-756B-4302-A86518A3DD4B}"/>
+              </a:ext>
+            </a:extLst>
+          </p:cNvPr>
+          <p:cNvSpPr txBox="1"/>
+          <p:nvPr/>
+        </p:nvSpPr>
+        <p:spPr>
+          <a:xfrm>
+            <a:off x="302450" y="1003762"/>
+            <a:ext cx="2694247" cy="338554"/>
+          </a:xfrm>
+          <a:prstGeom prst="rect">
+            <a:avLst/>
+          </a:prstGeom>
+          <a:noFill/>
+        </p:spPr>
+        <p:txBody>
+          <a:bodyPr wrap="square" rtlCol="0">
+            <a:spAutoFit/>
+          </a:bodyPr>
+          <a:lstStyle/>
+          <a:p>
+            <a:r>
+              <a:rPr lang="ko-KR" altLang="en-US" sz="1600" dirty="0">
+                <a:latin typeface="나눔바른고딕" panose="020B0603020101020101" pitchFamily="34" charset="-127"/>
+                <a:ea typeface="나눔바른고딕" panose="020B0603020101020101" pitchFamily="34" charset="-127"/>
+              </a:rPr>
+              <a:t>노드 정리</a:t>
+            </a:r>
+            <a:endParaRPr lang="en-US" altLang="ko-KR" sz="1600" dirty="0">
+              <a:latin typeface="나눔바른고딕" panose="020B0603020101020101" pitchFamily="34" charset="-127"/>
+              <a:ea typeface="나눔바른고딕" panose="020B0603020101020101" pitchFamily="34" charset="-127"/>
+            </a:endParaRPr>
+          </a:p>
+        </p:txBody>
+      </p:sp>
+      <p:cxnSp>
+        <p:nvCxnSpPr>
+          <p:cNvPr id="3" name="직선 연결선 2">
+            <a:extLst>
+              <a:ext uri="{FF2B5EF4-FFF2-40B4-BE49-F238E27FC236}">
+                <a16:creationId xmlns:a16="http://schemas.microsoft.com/office/drawing/2014/main" id="{7B35EA1E-2287-A500-2A0F-E4ACE5F442E7}"/>
+              </a:ext>
+            </a:extLst>
+          </p:cNvPr>
+          <p:cNvCxnSpPr>
+            <a:cxnSpLocks/>
+          </p:cNvCxnSpPr>
+          <p:nvPr/>
+        </p:nvCxnSpPr>
+        <p:spPr>
+          <a:xfrm>
+            <a:off x="387511" y="818707"/>
+            <a:ext cx="11308303" cy="0"/>
+          </a:xfrm>
+          <a:prstGeom prst="line">
+            <a:avLst/>
+          </a:prstGeom>
+          <a:ln>
+            <a:solidFill>
+              <a:schemeClr val="tx2"/>
+            </a:solidFill>
+          </a:ln>
+        </p:spPr>
+        <p:style>
+          <a:lnRef idx="2">
+            <a:schemeClr val="accent1"/>
+          </a:lnRef>
+          <a:fillRef idx="0">
+            <a:schemeClr val="accent1"/>
+          </a:fillRef>
+          <a:effectRef idx="1">
+            <a:schemeClr val="accent1"/>
+          </a:effectRef>
+          <a:fontRef idx="minor">
+            <a:schemeClr val="tx1"/>
+          </a:fontRef>
+        </p:style>
+      </p:cxnSp>
+      <p:sp>
+        <p:nvSpPr>
+          <p:cNvPr id="12" name="직사각형 11">
+            <a:extLst>
+              <a:ext uri="{FF2B5EF4-FFF2-40B4-BE49-F238E27FC236}">
+                <a16:creationId xmlns:a16="http://schemas.microsoft.com/office/drawing/2014/main" id="{B9CC03B5-469E-1E78-989D-E2039C735094}"/>
+              </a:ext>
+            </a:extLst>
+          </p:cNvPr>
+          <p:cNvSpPr/>
+          <p:nvPr/>
+        </p:nvSpPr>
+        <p:spPr>
+          <a:xfrm>
+            <a:off x="10443172" y="118011"/>
+            <a:ext cx="1596912" cy="246221"/>
+          </a:xfrm>
+          <a:prstGeom prst="rect">
+            <a:avLst/>
+          </a:prstGeom>
+        </p:spPr>
+        <p:txBody>
+          <a:bodyPr wrap="none">
+            <a:spAutoFit/>
+          </a:bodyPr>
+          <a:lstStyle/>
+          <a:p>
+            <a:r>
+              <a:rPr lang="ko-KR" altLang="en-US" sz="1000" dirty="0" err="1">
+                <a:solidFill>
+                  <a:schemeClr val="bg1">
+                    <a:lumMod val="75000"/>
+                  </a:schemeClr>
+                </a:solidFill>
+                <a:latin typeface="나눔바른고딕" panose="020B0603020101020101" pitchFamily="34" charset="-127"/>
+                <a:ea typeface="나눔바른고딕" panose="020B0603020101020101" pitchFamily="34" charset="-127"/>
+              </a:rPr>
+              <a:t>펄어비스</a:t>
+            </a:r>
+            <a:r>
+              <a:rPr lang="ko-KR" altLang="en-US" sz="1000" dirty="0">
+                <a:solidFill>
+                  <a:schemeClr val="bg1">
+                    <a:lumMod val="75000"/>
+                  </a:schemeClr>
+                </a:solidFill>
+                <a:latin typeface="나눔바른고딕" panose="020B0603020101020101" pitchFamily="34" charset="-127"/>
+                <a:ea typeface="나눔바른고딕" panose="020B0603020101020101" pitchFamily="34" charset="-127"/>
+              </a:rPr>
+              <a:t> </a:t>
+            </a:r>
+            <a:r>
+              <a:rPr lang="en-US" altLang="ko-KR" sz="1000" dirty="0">
+                <a:solidFill>
+                  <a:schemeClr val="bg1">
+                    <a:lumMod val="75000"/>
+                  </a:schemeClr>
+                </a:solidFill>
+                <a:latin typeface="나눔바른고딕" panose="020B0603020101020101" pitchFamily="34" charset="-127"/>
+                <a:ea typeface="나눔바른고딕" panose="020B0603020101020101" pitchFamily="34" charset="-127"/>
+              </a:rPr>
+              <a:t>2026 </a:t>
+            </a:r>
+            <a:r>
+              <a:rPr lang="ko-KR" altLang="en-US" sz="1000" dirty="0">
+                <a:solidFill>
+                  <a:schemeClr val="bg1">
+                    <a:lumMod val="75000"/>
+                  </a:schemeClr>
+                </a:solidFill>
+                <a:latin typeface="나눔바른고딕" panose="020B0603020101020101" pitchFamily="34" charset="-127"/>
+                <a:ea typeface="나눔바른고딕" panose="020B0603020101020101" pitchFamily="34" charset="-127"/>
+              </a:rPr>
+              <a:t>여름 </a:t>
+            </a:r>
+            <a:r>
+              <a:rPr lang="ko-KR" altLang="en-US" sz="1000" dirty="0" err="1">
+                <a:solidFill>
+                  <a:schemeClr val="bg1">
+                    <a:lumMod val="75000"/>
+                  </a:schemeClr>
+                </a:solidFill>
+                <a:latin typeface="나눔바른고딕" panose="020B0603020101020101" pitchFamily="34" charset="-127"/>
+                <a:ea typeface="나눔바른고딕" panose="020B0603020101020101" pitchFamily="34" charset="-127"/>
+              </a:rPr>
+              <a:t>인턴십</a:t>
+            </a:r>
+            <a:endParaRPr lang="ko-KR" altLang="en-US" sz="1000" dirty="0">
+              <a:solidFill>
+                <a:schemeClr val="bg1">
+                  <a:lumMod val="75000"/>
+                </a:schemeClr>
+              </a:solidFill>
+              <a:latin typeface="나눔바른고딕" panose="020B0603020101020101" pitchFamily="34" charset="-127"/>
+              <a:ea typeface="나눔바른고딕" panose="020B0603020101020101" pitchFamily="34" charset="-127"/>
+            </a:endParaRPr>
+          </a:p>
+        </p:txBody>
+      </p:sp>
+      <p:sp>
+        <p:nvSpPr>
+          <p:cNvPr id="5" name="TextBox 4">
+            <a:extLst>
+              <a:ext uri="{FF2B5EF4-FFF2-40B4-BE49-F238E27FC236}">
+                <a16:creationId xmlns:a16="http://schemas.microsoft.com/office/drawing/2014/main" id="{380AFC3A-2828-798A-3D1E-7FA72C1E0BAE}"/>
+              </a:ext>
+            </a:extLst>
+          </p:cNvPr>
+          <p:cNvSpPr txBox="1"/>
+          <p:nvPr/>
+        </p:nvSpPr>
+        <p:spPr>
+          <a:xfrm>
+            <a:off x="302449" y="1727036"/>
+            <a:ext cx="6520758" cy="1458091"/>
+          </a:xfrm>
+          <a:prstGeom prst="rect">
+            <a:avLst/>
+          </a:prstGeom>
+          <a:noFill/>
+        </p:spPr>
+        <p:txBody>
+          <a:bodyPr wrap="square">
+            <a:spAutoFit/>
+          </a:bodyPr>
+          <a:lstStyle/>
+          <a:p>
+            <a:pPr marL="171450" indent="-171450">
+              <a:lnSpc>
+                <a:spcPct val="150000"/>
+              </a:lnSpc>
+              <a:buFont typeface="Arial" panose="020B0604020202020204" pitchFamily="34" charset="0"/>
+              <a:buChar char="•"/>
+            </a:pPr>
+            <a:r>
+              <a:rPr lang="en-US" altLang="ko-KR" sz="1000" dirty="0">
+                <a:latin typeface="나눔바른고딕" panose="020B0603020101020101" pitchFamily="34" charset="-127"/>
+                <a:ea typeface="나눔바른고딕" panose="020B0603020101020101" pitchFamily="34" charset="-127"/>
+              </a:rPr>
+              <a:t>Selector </a:t>
+            </a:r>
+            <a:r>
+              <a:rPr lang="ko-KR" altLang="en-US" sz="1000" dirty="0">
+                <a:latin typeface="나눔바른고딕" panose="020B0603020101020101" pitchFamily="34" charset="-127"/>
+                <a:ea typeface="나눔바른고딕" panose="020B0603020101020101" pitchFamily="34" charset="-127"/>
+              </a:rPr>
+              <a:t>노드 역할의 의미가 모호</a:t>
+            </a:r>
+            <a:endParaRPr lang="en-US" altLang="ko-KR" sz="1000" dirty="0">
+              <a:latin typeface="나눔바른고딕" panose="020B0603020101020101" pitchFamily="34" charset="-127"/>
+              <a:ea typeface="나눔바른고딕" panose="020B0603020101020101" pitchFamily="34" charset="-127"/>
+            </a:endParaRPr>
+          </a:p>
+          <a:p>
+            <a:pPr marL="628650" lvl="1" indent="-171450">
+              <a:lnSpc>
+                <a:spcPct val="150000"/>
+              </a:lnSpc>
+              <a:buFont typeface="Arial" panose="020B0604020202020204" pitchFamily="34" charset="0"/>
+              <a:buChar char="•"/>
+            </a:pPr>
+            <a:r>
+              <a:rPr lang="en-US" altLang="ko-KR" sz="1000" dirty="0">
+                <a:latin typeface="나눔바른고딕" panose="020B0603020101020101" pitchFamily="34" charset="-127"/>
+                <a:ea typeface="나눔바른고딕" panose="020B0603020101020101" pitchFamily="34" charset="-127"/>
+              </a:rPr>
+              <a:t>Sequence </a:t>
+            </a:r>
+            <a:r>
+              <a:rPr lang="ko-KR" altLang="en-US" sz="1000" dirty="0">
+                <a:latin typeface="나눔바른고딕" panose="020B0603020101020101" pitchFamily="34" charset="-127"/>
+                <a:ea typeface="나눔바른고딕" panose="020B0603020101020101" pitchFamily="34" charset="-127"/>
+              </a:rPr>
+              <a:t>노드는 자식들을 순차적으로 실행하는 역할을 수행</a:t>
+            </a:r>
+            <a:endParaRPr lang="en-US" altLang="ko-KR" sz="1000" dirty="0">
+              <a:latin typeface="나눔바른고딕" panose="020B0603020101020101" pitchFamily="34" charset="-127"/>
+              <a:ea typeface="나눔바른고딕" panose="020B0603020101020101" pitchFamily="34" charset="-127"/>
+            </a:endParaRPr>
+          </a:p>
+          <a:p>
+            <a:pPr marL="628650" lvl="1" indent="-171450">
+              <a:lnSpc>
+                <a:spcPct val="150000"/>
+              </a:lnSpc>
+              <a:buFont typeface="Arial" panose="020B0604020202020204" pitchFamily="34" charset="0"/>
+              <a:buChar char="•"/>
+            </a:pPr>
+            <a:r>
+              <a:rPr lang="ko-KR" altLang="en-US" sz="1000" dirty="0">
+                <a:latin typeface="나눔바른고딕" panose="020B0603020101020101" pitchFamily="34" charset="-127"/>
+                <a:ea typeface="나눔바른고딕" panose="020B0603020101020101" pitchFamily="34" charset="-127"/>
+              </a:rPr>
+              <a:t>단순히 </a:t>
+            </a:r>
+            <a:r>
+              <a:rPr lang="en-US" altLang="ko-KR" sz="1000" dirty="0">
+                <a:latin typeface="나눔바른고딕" panose="020B0603020101020101" pitchFamily="34" charset="-127"/>
+                <a:ea typeface="나눔바른고딕" panose="020B0603020101020101" pitchFamily="34" charset="-127"/>
+              </a:rPr>
+              <a:t>switch </a:t>
+            </a:r>
+            <a:r>
+              <a:rPr lang="ko-KR" altLang="en-US" sz="1000" dirty="0">
+                <a:latin typeface="나눔바른고딕" panose="020B0603020101020101" pitchFamily="34" charset="-127"/>
+                <a:ea typeface="나눔바른고딕" panose="020B0603020101020101" pitchFamily="34" charset="-127"/>
+              </a:rPr>
+              <a:t>역할을 하는 노드이며</a:t>
+            </a:r>
+            <a:r>
+              <a:rPr lang="en-US" altLang="ko-KR" sz="1000" dirty="0">
+                <a:latin typeface="나눔바른고딕" panose="020B0603020101020101" pitchFamily="34" charset="-127"/>
+                <a:ea typeface="나눔바른고딕" panose="020B0603020101020101" pitchFamily="34" charset="-127"/>
+              </a:rPr>
+              <a:t>, </a:t>
+            </a:r>
+            <a:r>
+              <a:rPr lang="ko-KR" altLang="en-US" sz="1000" dirty="0">
+                <a:latin typeface="나눔바른고딕" panose="020B0603020101020101" pitchFamily="34" charset="-127"/>
+                <a:ea typeface="나눔바른고딕" panose="020B0603020101020101" pitchFamily="34" charset="-127"/>
+              </a:rPr>
+              <a:t>조건도 필요할 때마다 상속하여 새로 만들어야 함</a:t>
+            </a:r>
+            <a:endParaRPr lang="en-US" altLang="ko-KR" sz="1000" dirty="0">
+              <a:latin typeface="나눔바른고딕" panose="020B0603020101020101" pitchFamily="34" charset="-127"/>
+              <a:ea typeface="나눔바른고딕" panose="020B0603020101020101" pitchFamily="34" charset="-127"/>
+            </a:endParaRPr>
+          </a:p>
+          <a:p>
+            <a:pPr marL="171450" indent="-171450">
+              <a:lnSpc>
+                <a:spcPct val="150000"/>
+              </a:lnSpc>
+              <a:buFont typeface="Arial" panose="020B0604020202020204" pitchFamily="34" charset="0"/>
+              <a:buChar char="•"/>
+            </a:pPr>
+            <a:r>
+              <a:rPr lang="en-US" altLang="ko-KR" sz="1000" dirty="0">
+                <a:latin typeface="나눔바른고딕" panose="020B0603020101020101" pitchFamily="34" charset="-127"/>
+                <a:ea typeface="나눔바른고딕" panose="020B0603020101020101" pitchFamily="34" charset="-127"/>
+              </a:rPr>
+              <a:t> Selector </a:t>
+            </a:r>
+            <a:r>
+              <a:rPr lang="ko-KR" altLang="en-US" sz="1000" dirty="0">
+                <a:latin typeface="나눔바른고딕" panose="020B0603020101020101" pitchFamily="34" charset="-127"/>
+                <a:ea typeface="나눔바른고딕" panose="020B0603020101020101" pitchFamily="34" charset="-127"/>
+              </a:rPr>
+              <a:t>노드의 수정</a:t>
+            </a:r>
+            <a:endParaRPr lang="en-US" altLang="ko-KR" sz="1000" dirty="0">
+              <a:latin typeface="나눔바른고딕" panose="020B0603020101020101" pitchFamily="34" charset="-127"/>
+              <a:ea typeface="나눔바른고딕" panose="020B0603020101020101" pitchFamily="34" charset="-127"/>
+            </a:endParaRPr>
+          </a:p>
+          <a:p>
+            <a:pPr marL="628650" lvl="1" indent="-171450">
+              <a:lnSpc>
+                <a:spcPct val="150000"/>
+              </a:lnSpc>
+              <a:buFont typeface="Arial" panose="020B0604020202020204" pitchFamily="34" charset="0"/>
+              <a:buChar char="•"/>
+            </a:pPr>
+            <a:r>
+              <a:rPr lang="ko-KR" altLang="en-US" sz="1000" dirty="0">
+                <a:latin typeface="나눔바른고딕" panose="020B0603020101020101" pitchFamily="34" charset="-127"/>
+                <a:ea typeface="나눔바른고딕" panose="020B0603020101020101" pitchFamily="34" charset="-127"/>
+              </a:rPr>
+              <a:t>조건을 객체화 시키고</a:t>
+            </a:r>
+            <a:r>
+              <a:rPr lang="en-US" altLang="ko-KR" sz="1000" dirty="0">
+                <a:latin typeface="나눔바른고딕" panose="020B0603020101020101" pitchFamily="34" charset="-127"/>
+                <a:ea typeface="나눔바른고딕" panose="020B0603020101020101" pitchFamily="34" charset="-127"/>
+              </a:rPr>
+              <a:t>, </a:t>
+            </a:r>
+            <a:r>
+              <a:rPr lang="ko-KR" altLang="en-US" sz="1000" dirty="0">
+                <a:latin typeface="나눔바른고딕" panose="020B0603020101020101" pitchFamily="34" charset="-127"/>
+                <a:ea typeface="나눔바른고딕" panose="020B0603020101020101" pitchFamily="34" charset="-127"/>
+              </a:rPr>
+              <a:t>각 노드에 조건을 달 수 있도록 구조 변경</a:t>
+            </a:r>
+            <a:endParaRPr lang="en-US" altLang="ko-KR" sz="1000" dirty="0">
+              <a:latin typeface="나눔바른고딕" panose="020B0603020101020101" pitchFamily="34" charset="-127"/>
+              <a:ea typeface="나눔바른고딕" panose="020B0603020101020101" pitchFamily="34" charset="-127"/>
+            </a:endParaRPr>
+          </a:p>
+          <a:p>
+            <a:pPr marL="628650" lvl="1" indent="-171450">
+              <a:lnSpc>
+                <a:spcPct val="150000"/>
+              </a:lnSpc>
+              <a:buFont typeface="Arial" panose="020B0604020202020204" pitchFamily="34" charset="0"/>
+              <a:buChar char="•"/>
+            </a:pPr>
+            <a:r>
+              <a:rPr lang="en-US" altLang="ko-KR" sz="1000" dirty="0">
+                <a:latin typeface="나눔바른고딕" panose="020B0603020101020101" pitchFamily="34" charset="-127"/>
+                <a:ea typeface="나눔바른고딕" panose="020B0603020101020101" pitchFamily="34" charset="-127"/>
+              </a:rPr>
+              <a:t>Selector, Sequence</a:t>
+            </a:r>
+            <a:r>
+              <a:rPr lang="ko-KR" altLang="en-US" sz="1000" dirty="0">
+                <a:latin typeface="나눔바른고딕" panose="020B0603020101020101" pitchFamily="34" charset="-127"/>
+                <a:ea typeface="나눔바른고딕" panose="020B0603020101020101" pitchFamily="34" charset="-127"/>
+              </a:rPr>
+              <a:t>는 자식 노드들에 달린 조건을 평가하고</a:t>
+            </a:r>
+            <a:r>
+              <a:rPr lang="en-US" altLang="ko-KR" sz="1000" dirty="0">
+                <a:latin typeface="나눔바른고딕" panose="020B0603020101020101" pitchFamily="34" charset="-127"/>
+                <a:ea typeface="나눔바른고딕" panose="020B0603020101020101" pitchFamily="34" charset="-127"/>
+              </a:rPr>
+              <a:t>, </a:t>
+            </a:r>
+            <a:r>
+              <a:rPr lang="ko-KR" altLang="en-US" sz="1000" dirty="0">
+                <a:latin typeface="나눔바른고딕" panose="020B0603020101020101" pitchFamily="34" charset="-127"/>
+                <a:ea typeface="나눔바른고딕" panose="020B0603020101020101" pitchFamily="34" charset="-127"/>
+              </a:rPr>
+              <a:t>노드 실행 여부를 결정</a:t>
+            </a:r>
+            <a:endParaRPr lang="en-US" altLang="ko-KR" sz="1000" dirty="0">
+              <a:latin typeface="나눔바른고딕" panose="020B0603020101020101" pitchFamily="34" charset="-127"/>
+              <a:ea typeface="나눔바른고딕" panose="020B0603020101020101" pitchFamily="34" charset="-127"/>
+            </a:endParaRPr>
+          </a:p>
+        </p:txBody>
+      </p:sp>
+      <p:sp>
+        <p:nvSpPr>
+          <p:cNvPr id="11" name="TextBox 10">
+            <a:extLst>
+              <a:ext uri="{FF2B5EF4-FFF2-40B4-BE49-F238E27FC236}">
+                <a16:creationId xmlns:a16="http://schemas.microsoft.com/office/drawing/2014/main" id="{319419BD-F07F-FB8C-F698-CA32348DE7AB}"/>
+              </a:ext>
+            </a:extLst>
+          </p:cNvPr>
+          <p:cNvSpPr txBox="1"/>
+          <p:nvPr/>
+        </p:nvSpPr>
+        <p:spPr>
+          <a:xfrm>
+            <a:off x="302449" y="1342316"/>
+            <a:ext cx="7464813" cy="346249"/>
+          </a:xfrm>
+          <a:prstGeom prst="rect">
+            <a:avLst/>
+          </a:prstGeom>
+          <a:noFill/>
+        </p:spPr>
+        <p:txBody>
+          <a:bodyPr wrap="square" rtlCol="0">
+            <a:spAutoFit/>
+          </a:bodyPr>
+          <a:lstStyle/>
+          <a:p>
+            <a:pPr>
+              <a:lnSpc>
+                <a:spcPct val="150000"/>
+              </a:lnSpc>
+            </a:pPr>
+            <a:r>
+              <a:rPr lang="ko-KR" altLang="en-US" sz="1200" dirty="0" err="1">
+                <a:latin typeface="나눔바른고딕" panose="020B0603020101020101" pitchFamily="34" charset="-127"/>
+                <a:ea typeface="나눔바른고딕" panose="020B0603020101020101" pitchFamily="34" charset="-127"/>
+              </a:rPr>
+              <a:t>데코레이터</a:t>
+            </a:r>
+            <a:r>
+              <a:rPr lang="ko-KR" altLang="en-US" sz="1200" dirty="0">
+                <a:latin typeface="나눔바른고딕" panose="020B0603020101020101" pitchFamily="34" charset="-127"/>
+                <a:ea typeface="나눔바른고딕" panose="020B0603020101020101" pitchFamily="34" charset="-127"/>
+              </a:rPr>
+              <a:t> 추가</a:t>
+            </a:r>
+            <a:endParaRPr lang="en-US" altLang="ko-KR" sz="1200" dirty="0">
+              <a:latin typeface="나눔바른고딕" panose="020B0603020101020101" pitchFamily="34" charset="-127"/>
+              <a:ea typeface="나눔바른고딕" panose="020B0603020101020101" pitchFamily="34" charset="-127"/>
+            </a:endParaRPr>
+          </a:p>
+        </p:txBody>
+      </p:sp>
+      <p:sp>
+        <p:nvSpPr>
+          <p:cNvPr id="4" name="TextBox 3">
+            <a:extLst>
+              <a:ext uri="{FF2B5EF4-FFF2-40B4-BE49-F238E27FC236}">
+                <a16:creationId xmlns:a16="http://schemas.microsoft.com/office/drawing/2014/main" id="{C0444BEE-E26B-1DC8-EF27-5281D112074B}"/>
+              </a:ext>
+            </a:extLst>
+          </p:cNvPr>
+          <p:cNvSpPr txBox="1"/>
+          <p:nvPr/>
+        </p:nvSpPr>
+        <p:spPr>
+          <a:xfrm>
+            <a:off x="8603554" y="1363475"/>
+            <a:ext cx="1839618" cy="303929"/>
+          </a:xfrm>
+          <a:prstGeom prst="rect">
+            <a:avLst/>
+          </a:prstGeom>
+          <a:noFill/>
+        </p:spPr>
+        <p:txBody>
+          <a:bodyPr wrap="square">
+            <a:spAutoFit/>
+          </a:bodyPr>
+          <a:lstStyle/>
+          <a:p>
+            <a:pPr algn="ctr">
+              <a:lnSpc>
+                <a:spcPct val="150000"/>
+              </a:lnSpc>
+            </a:pPr>
+            <a:r>
+              <a:rPr lang="ko-KR" altLang="en-US" sz="1000" dirty="0">
+                <a:latin typeface="나눔바른고딕" panose="020B0603020101020101" pitchFamily="34" charset="-127"/>
+                <a:ea typeface="나눔바른고딕" panose="020B0603020101020101" pitchFamily="34" charset="-127"/>
+              </a:rPr>
+              <a:t>변경 후</a:t>
+            </a:r>
+            <a:endParaRPr lang="en-US" altLang="ko-KR" sz="1000" dirty="0">
+              <a:latin typeface="나눔바른고딕" panose="020B0603020101020101" pitchFamily="34" charset="-127"/>
+              <a:ea typeface="나눔바른고딕" panose="020B0603020101020101" pitchFamily="34" charset="-127"/>
+            </a:endParaRPr>
+          </a:p>
+        </p:txBody>
+      </p:sp>
+    </p:spTree>
+    <p:extLst>
+      <p:ext uri="{BB962C8B-B14F-4D97-AF65-F5344CB8AC3E}">
+        <p14:creationId xmlns:p14="http://schemas.microsoft.com/office/powerpoint/2010/main" val="23416031"/>
+      </p:ext>
+    </p:extLst>
+  </p:cSld>
+  <p:clrMapOvr>
+    <a:masterClrMapping/>
+  </p:clrMapOvr>
+</p:sld>
+</file>
+
+<file path=ppt/slides/slide5.xml><?xml version="1.0" encoding="utf-8"?>
+<p:sld xmlns:a="http://schemas.openxmlformats.org/drawingml/2006/main" xmlns:r="http://schemas.openxmlformats.org/officeDocument/2006/relationships" xmlns:p="http://schemas.openxmlformats.org/presentationml/2006/main">
+  <p:cSld>
+    <p:spTree>
+      <p:nvGrpSpPr>
+        <p:cNvPr id="1" name="">
+          <a:extLst>
+            <a:ext uri="{FF2B5EF4-FFF2-40B4-BE49-F238E27FC236}">
+              <a16:creationId xmlns:a16="http://schemas.microsoft.com/office/drawing/2014/main" id="{0F9F1844-18B0-18CE-83F4-0E3CE77A4880}"/>
+            </a:ext>
+          </a:extLst>
+        </p:cNvPr>
+        <p:cNvGrpSpPr/>
+        <p:nvPr/>
+      </p:nvGrpSpPr>
+      <p:grpSpPr>
+        <a:xfrm>
+          <a:off x="0" y="0"/>
+          <a:ext cx="0" cy="0"/>
+          <a:chOff x="0" y="0"/>
+          <a:chExt cx="0" cy="0"/>
+        </a:xfrm>
+      </p:grpSpPr>
+      <p:sp>
+        <p:nvSpPr>
+          <p:cNvPr id="8" name="TextBox 7">
+            <a:extLst>
+              <a:ext uri="{FF2B5EF4-FFF2-40B4-BE49-F238E27FC236}">
+                <a16:creationId xmlns:a16="http://schemas.microsoft.com/office/drawing/2014/main" id="{ECA14A0A-F134-4C71-53B8-E1E0121EE476}"/>
+              </a:ext>
+            </a:extLst>
+          </p:cNvPr>
+          <p:cNvSpPr txBox="1"/>
+          <p:nvPr/>
+        </p:nvSpPr>
+        <p:spPr>
+          <a:xfrm>
+            <a:off x="302451" y="315453"/>
+            <a:ext cx="4944140" cy="369332"/>
+          </a:xfrm>
+          <a:prstGeom prst="rect">
+            <a:avLst/>
+          </a:prstGeom>
+          <a:noFill/>
+        </p:spPr>
+        <p:txBody>
+          <a:bodyPr wrap="square" rtlCol="0">
+            <a:spAutoFit/>
+          </a:bodyPr>
+          <a:lstStyle/>
+          <a:p>
+            <a:r>
+              <a:rPr lang="ko-KR" altLang="en-US" dirty="0">
+                <a:latin typeface="나눔바른고딕" panose="020B0603020101020101" pitchFamily="34" charset="-127"/>
+                <a:ea typeface="나눔바른고딕" panose="020B0603020101020101" pitchFamily="34" charset="-127"/>
+              </a:rPr>
+              <a:t>이번 주 작업 내역</a:t>
+            </a:r>
+            <a:endParaRPr lang="en-US" altLang="ko-KR" dirty="0">
+              <a:latin typeface="나눔바른고딕" panose="020B0603020101020101" pitchFamily="34" charset="-127"/>
+              <a:ea typeface="나눔바른고딕" panose="020B0603020101020101" pitchFamily="34" charset="-127"/>
+            </a:endParaRPr>
+          </a:p>
+        </p:txBody>
+      </p:sp>
+      <p:sp>
+        <p:nvSpPr>
+          <p:cNvPr id="10" name="TextBox 9">
+            <a:extLst>
+              <a:ext uri="{FF2B5EF4-FFF2-40B4-BE49-F238E27FC236}">
+                <a16:creationId xmlns:a16="http://schemas.microsoft.com/office/drawing/2014/main" id="{EA6B35A1-8B88-D301-3B0A-D9B11BFBFAEB}"/>
+              </a:ext>
+            </a:extLst>
+          </p:cNvPr>
+          <p:cNvSpPr txBox="1"/>
+          <p:nvPr/>
+        </p:nvSpPr>
+        <p:spPr>
+          <a:xfrm>
+            <a:off x="302450" y="1003762"/>
+            <a:ext cx="2694247" cy="338554"/>
+          </a:xfrm>
+          <a:prstGeom prst="rect">
+            <a:avLst/>
+          </a:prstGeom>
+          <a:noFill/>
+        </p:spPr>
+        <p:txBody>
+          <a:bodyPr wrap="square" rtlCol="0">
+            <a:spAutoFit/>
+          </a:bodyPr>
+          <a:lstStyle/>
+          <a:p>
+            <a:r>
+              <a:rPr lang="ko-KR" altLang="en-US" sz="1600" dirty="0">
+                <a:latin typeface="나눔바른고딕" panose="020B0603020101020101" pitchFamily="34" charset="-127"/>
+                <a:ea typeface="나눔바른고딕" panose="020B0603020101020101" pitchFamily="34" charset="-127"/>
+              </a:rPr>
+              <a:t>노드 정리</a:t>
+            </a:r>
+            <a:endParaRPr lang="en-US" altLang="ko-KR" sz="1600" dirty="0">
+              <a:latin typeface="나눔바른고딕" panose="020B0603020101020101" pitchFamily="34" charset="-127"/>
+              <a:ea typeface="나눔바른고딕" panose="020B0603020101020101" pitchFamily="34" charset="-127"/>
+            </a:endParaRPr>
+          </a:p>
+        </p:txBody>
+      </p:sp>
+      <p:cxnSp>
+        <p:nvCxnSpPr>
+          <p:cNvPr id="3" name="직선 연결선 2">
+            <a:extLst>
+              <a:ext uri="{FF2B5EF4-FFF2-40B4-BE49-F238E27FC236}">
+                <a16:creationId xmlns:a16="http://schemas.microsoft.com/office/drawing/2014/main" id="{258A3733-2AD1-4D1A-3DFF-F198994532A5}"/>
+              </a:ext>
+            </a:extLst>
+          </p:cNvPr>
+          <p:cNvCxnSpPr>
+            <a:cxnSpLocks/>
+          </p:cNvCxnSpPr>
+          <p:nvPr/>
+        </p:nvCxnSpPr>
+        <p:spPr>
+          <a:xfrm>
+            <a:off x="387511" y="818707"/>
+            <a:ext cx="11308303" cy="0"/>
+          </a:xfrm>
+          <a:prstGeom prst="line">
+            <a:avLst/>
+          </a:prstGeom>
+          <a:ln>
+            <a:solidFill>
+              <a:schemeClr val="tx2"/>
+            </a:solidFill>
+          </a:ln>
+        </p:spPr>
+        <p:style>
+          <a:lnRef idx="2">
+            <a:schemeClr val="accent1"/>
+          </a:lnRef>
+          <a:fillRef idx="0">
+            <a:schemeClr val="accent1"/>
+          </a:fillRef>
+          <a:effectRef idx="1">
+            <a:schemeClr val="accent1"/>
+          </a:effectRef>
+          <a:fontRef idx="minor">
+            <a:schemeClr val="tx1"/>
+          </a:fontRef>
+        </p:style>
+      </p:cxnSp>
+      <p:sp>
+        <p:nvSpPr>
+          <p:cNvPr id="12" name="직사각형 11">
+            <a:extLst>
+              <a:ext uri="{FF2B5EF4-FFF2-40B4-BE49-F238E27FC236}">
+                <a16:creationId xmlns:a16="http://schemas.microsoft.com/office/drawing/2014/main" id="{964FFFBB-7E15-8E7F-C4CC-6F417C532ADB}"/>
+              </a:ext>
+            </a:extLst>
+          </p:cNvPr>
+          <p:cNvSpPr/>
+          <p:nvPr/>
+        </p:nvSpPr>
+        <p:spPr>
+          <a:xfrm>
+            <a:off x="10443172" y="118011"/>
+            <a:ext cx="1596912" cy="246221"/>
+          </a:xfrm>
+          <a:prstGeom prst="rect">
+            <a:avLst/>
+          </a:prstGeom>
+        </p:spPr>
+        <p:txBody>
+          <a:bodyPr wrap="none">
+            <a:spAutoFit/>
+          </a:bodyPr>
+          <a:lstStyle/>
+          <a:p>
+            <a:r>
+              <a:rPr lang="ko-KR" altLang="en-US" sz="1000" dirty="0" err="1">
+                <a:solidFill>
+                  <a:schemeClr val="bg1">
+                    <a:lumMod val="75000"/>
+                  </a:schemeClr>
+                </a:solidFill>
+                <a:latin typeface="나눔바른고딕" panose="020B0603020101020101" pitchFamily="34" charset="-127"/>
+                <a:ea typeface="나눔바른고딕" panose="020B0603020101020101" pitchFamily="34" charset="-127"/>
+              </a:rPr>
+              <a:t>펄어비스</a:t>
+            </a:r>
+            <a:r>
+              <a:rPr lang="ko-KR" altLang="en-US" sz="1000" dirty="0">
+                <a:solidFill>
+                  <a:schemeClr val="bg1">
+                    <a:lumMod val="75000"/>
+                  </a:schemeClr>
+                </a:solidFill>
+                <a:latin typeface="나눔바른고딕" panose="020B0603020101020101" pitchFamily="34" charset="-127"/>
+                <a:ea typeface="나눔바른고딕" panose="020B0603020101020101" pitchFamily="34" charset="-127"/>
+              </a:rPr>
+              <a:t> </a:t>
+            </a:r>
+            <a:r>
+              <a:rPr lang="en-US" altLang="ko-KR" sz="1000" dirty="0">
+                <a:solidFill>
+                  <a:schemeClr val="bg1">
+                    <a:lumMod val="75000"/>
+                  </a:schemeClr>
+                </a:solidFill>
+                <a:latin typeface="나눔바른고딕" panose="020B0603020101020101" pitchFamily="34" charset="-127"/>
+                <a:ea typeface="나눔바른고딕" panose="020B0603020101020101" pitchFamily="34" charset="-127"/>
+              </a:rPr>
+              <a:t>2026 </a:t>
+            </a:r>
+            <a:r>
+              <a:rPr lang="ko-KR" altLang="en-US" sz="1000" dirty="0">
+                <a:solidFill>
+                  <a:schemeClr val="bg1">
+                    <a:lumMod val="75000"/>
+                  </a:schemeClr>
+                </a:solidFill>
+                <a:latin typeface="나눔바른고딕" panose="020B0603020101020101" pitchFamily="34" charset="-127"/>
+                <a:ea typeface="나눔바른고딕" panose="020B0603020101020101" pitchFamily="34" charset="-127"/>
+              </a:rPr>
+              <a:t>여름 </a:t>
+            </a:r>
+            <a:r>
+              <a:rPr lang="ko-KR" altLang="en-US" sz="1000" dirty="0" err="1">
+                <a:solidFill>
+                  <a:schemeClr val="bg1">
+                    <a:lumMod val="75000"/>
+                  </a:schemeClr>
+                </a:solidFill>
+                <a:latin typeface="나눔바른고딕" panose="020B0603020101020101" pitchFamily="34" charset="-127"/>
+                <a:ea typeface="나눔바른고딕" panose="020B0603020101020101" pitchFamily="34" charset="-127"/>
+              </a:rPr>
+              <a:t>인턴십</a:t>
+            </a:r>
+            <a:endParaRPr lang="ko-KR" altLang="en-US" sz="1000" dirty="0">
+              <a:solidFill>
+                <a:schemeClr val="bg1">
+                  <a:lumMod val="75000"/>
+                </a:schemeClr>
+              </a:solidFill>
+              <a:latin typeface="나눔바른고딕" panose="020B0603020101020101" pitchFamily="34" charset="-127"/>
+              <a:ea typeface="나눔바른고딕" panose="020B0603020101020101" pitchFamily="34" charset="-127"/>
+            </a:endParaRPr>
+          </a:p>
+        </p:txBody>
+      </p:sp>
+      <p:sp>
+        <p:nvSpPr>
+          <p:cNvPr id="5" name="TextBox 4">
+            <a:extLst>
+              <a:ext uri="{FF2B5EF4-FFF2-40B4-BE49-F238E27FC236}">
+                <a16:creationId xmlns:a16="http://schemas.microsoft.com/office/drawing/2014/main" id="{CDFB8DD7-E244-D0A1-3A27-D1D65BBD9152}"/>
+              </a:ext>
+            </a:extLst>
+          </p:cNvPr>
+          <p:cNvSpPr txBox="1"/>
+          <p:nvPr/>
+        </p:nvSpPr>
+        <p:spPr>
+          <a:xfrm>
+            <a:off x="302449" y="1727036"/>
+            <a:ext cx="6520758" cy="1458091"/>
+          </a:xfrm>
+          <a:prstGeom prst="rect">
+            <a:avLst/>
+          </a:prstGeom>
+          <a:noFill/>
+        </p:spPr>
+        <p:txBody>
+          <a:bodyPr wrap="square">
+            <a:spAutoFit/>
+          </a:bodyPr>
+          <a:lstStyle/>
+          <a:p>
+            <a:pPr marL="171450" indent="-171450">
+              <a:lnSpc>
+                <a:spcPct val="150000"/>
+              </a:lnSpc>
+              <a:buFont typeface="Arial" panose="020B0604020202020204" pitchFamily="34" charset="0"/>
+              <a:buChar char="•"/>
+            </a:pPr>
+            <a:r>
+              <a:rPr lang="ko-KR" altLang="en-US" sz="1000" dirty="0">
+                <a:latin typeface="나눔바른고딕" panose="020B0603020101020101" pitchFamily="34" charset="-127"/>
+                <a:ea typeface="나눔바른고딕" panose="020B0603020101020101" pitchFamily="34" charset="-127"/>
+              </a:rPr>
+              <a:t>기존엔 당장에 필요한 노드들을 구현</a:t>
+            </a:r>
+            <a:endParaRPr lang="en-US" altLang="ko-KR" sz="1000" dirty="0">
+              <a:latin typeface="나눔바른고딕" panose="020B0603020101020101" pitchFamily="34" charset="-127"/>
+              <a:ea typeface="나눔바른고딕" panose="020B0603020101020101" pitchFamily="34" charset="-127"/>
+            </a:endParaRPr>
+          </a:p>
+          <a:p>
+            <a:pPr marL="628650" lvl="1" indent="-171450">
+              <a:lnSpc>
+                <a:spcPct val="150000"/>
+              </a:lnSpc>
+              <a:buFont typeface="Arial" panose="020B0604020202020204" pitchFamily="34" charset="0"/>
+              <a:buChar char="•"/>
+            </a:pPr>
+            <a:r>
+              <a:rPr lang="ko-KR" altLang="en-US" sz="1000" dirty="0">
+                <a:latin typeface="나눔바른고딕" panose="020B0603020101020101" pitchFamily="34" charset="-127"/>
+                <a:ea typeface="나눔바른고딕" panose="020B0603020101020101" pitchFamily="34" charset="-127"/>
+              </a:rPr>
+              <a:t>추상화되지 않고</a:t>
+            </a:r>
+            <a:r>
+              <a:rPr lang="en-US" altLang="ko-KR" sz="1000" dirty="0">
+                <a:latin typeface="나눔바른고딕" panose="020B0603020101020101" pitchFamily="34" charset="-127"/>
+                <a:ea typeface="나눔바른고딕" panose="020B0603020101020101" pitchFamily="34" charset="-127"/>
+              </a:rPr>
+              <a:t>, </a:t>
+            </a:r>
+            <a:r>
+              <a:rPr lang="ko-KR" altLang="en-US" sz="1000" dirty="0">
+                <a:latin typeface="나눔바른고딕" panose="020B0603020101020101" pitchFamily="34" charset="-127"/>
+                <a:ea typeface="나눔바른고딕" panose="020B0603020101020101" pitchFamily="34" charset="-127"/>
+              </a:rPr>
+              <a:t>정리되지 않은 노드들이 중구난방으로 콘텐츠 코드에 작성</a:t>
+            </a:r>
+            <a:endParaRPr lang="en-US" altLang="ko-KR" sz="1000" dirty="0">
+              <a:latin typeface="나눔바른고딕" panose="020B0603020101020101" pitchFamily="34" charset="-127"/>
+              <a:ea typeface="나눔바른고딕" panose="020B0603020101020101" pitchFamily="34" charset="-127"/>
+            </a:endParaRPr>
+          </a:p>
+          <a:p>
+            <a:pPr marL="171450" indent="-171450">
+              <a:lnSpc>
+                <a:spcPct val="150000"/>
+              </a:lnSpc>
+              <a:buFont typeface="Arial" panose="020B0604020202020204" pitchFamily="34" charset="0"/>
+              <a:buChar char="•"/>
+            </a:pPr>
+            <a:r>
+              <a:rPr lang="ko-KR" altLang="en-US" sz="1000" dirty="0">
+                <a:latin typeface="나눔바른고딕" panose="020B0603020101020101" pitchFamily="34" charset="-127"/>
+                <a:ea typeface="나눔바른고딕" panose="020B0603020101020101" pitchFamily="34" charset="-127"/>
+              </a:rPr>
+              <a:t>노드들의 공통 사항을 찾고</a:t>
+            </a:r>
+            <a:r>
+              <a:rPr lang="en-US" altLang="ko-KR" sz="1000" dirty="0">
+                <a:latin typeface="나눔바른고딕" panose="020B0603020101020101" pitchFamily="34" charset="-127"/>
+                <a:ea typeface="나눔바른고딕" panose="020B0603020101020101" pitchFamily="34" charset="-127"/>
+              </a:rPr>
+              <a:t>, </a:t>
+            </a:r>
+            <a:r>
+              <a:rPr lang="ko-KR" altLang="en-US" sz="1000" dirty="0">
+                <a:latin typeface="나눔바른고딕" panose="020B0603020101020101" pitchFamily="34" charset="-127"/>
+                <a:ea typeface="나눔바른고딕" panose="020B0603020101020101" pitchFamily="34" charset="-127"/>
+              </a:rPr>
+              <a:t>보다 여러 상황에서 다양하게 사용할 수 있도록 정리</a:t>
+            </a:r>
+            <a:endParaRPr lang="en-US" altLang="ko-KR" sz="1000" dirty="0">
+              <a:latin typeface="나눔바른고딕" panose="020B0603020101020101" pitchFamily="34" charset="-127"/>
+              <a:ea typeface="나눔바른고딕" panose="020B0603020101020101" pitchFamily="34" charset="-127"/>
+            </a:endParaRPr>
+          </a:p>
+          <a:p>
+            <a:pPr marL="628650" lvl="1" indent="-171450">
+              <a:lnSpc>
+                <a:spcPct val="150000"/>
+              </a:lnSpc>
+              <a:buFont typeface="Arial" panose="020B0604020202020204" pitchFamily="34" charset="0"/>
+              <a:buChar char="•"/>
+            </a:pPr>
+            <a:r>
+              <a:rPr lang="ko-KR" altLang="en-US" sz="1000" dirty="0" err="1">
+                <a:latin typeface="나눔바른고딕" panose="020B0603020101020101" pitchFamily="34" charset="-127"/>
+                <a:ea typeface="나눔바른고딕" panose="020B0603020101020101" pitchFamily="34" charset="-127"/>
+              </a:rPr>
+              <a:t>데코레이터를</a:t>
+            </a:r>
+            <a:r>
+              <a:rPr lang="ko-KR" altLang="en-US" sz="1000" dirty="0">
+                <a:latin typeface="나눔바른고딕" panose="020B0603020101020101" pitchFamily="34" charset="-127"/>
+                <a:ea typeface="나눔바른고딕" panose="020B0603020101020101" pitchFamily="34" charset="-127"/>
+              </a:rPr>
+              <a:t> 추가하며 </a:t>
+            </a:r>
+            <a:r>
+              <a:rPr lang="en-US" altLang="ko-KR" sz="1000" dirty="0">
+                <a:latin typeface="나눔바른고딕" panose="020B0603020101020101" pitchFamily="34" charset="-127"/>
+                <a:ea typeface="나눔바른고딕" panose="020B0603020101020101" pitchFamily="34" charset="-127"/>
+              </a:rPr>
+              <a:t>Task </a:t>
+            </a:r>
+            <a:r>
+              <a:rPr lang="ko-KR" altLang="en-US" sz="1000" dirty="0">
+                <a:latin typeface="나눔바른고딕" panose="020B0603020101020101" pitchFamily="34" charset="-127"/>
+                <a:ea typeface="나눔바른고딕" panose="020B0603020101020101" pitchFamily="34" charset="-127"/>
+              </a:rPr>
+              <a:t>노드와 조건 판단 부분을 분리</a:t>
+            </a:r>
+            <a:endParaRPr lang="en-US" altLang="ko-KR" sz="1000" dirty="0">
+              <a:latin typeface="나눔바른고딕" panose="020B0603020101020101" pitchFamily="34" charset="-127"/>
+              <a:ea typeface="나눔바른고딕" panose="020B0603020101020101" pitchFamily="34" charset="-127"/>
+            </a:endParaRPr>
+          </a:p>
+          <a:p>
+            <a:pPr marL="628650" lvl="1" indent="-171450">
+              <a:lnSpc>
+                <a:spcPct val="150000"/>
+              </a:lnSpc>
+              <a:buFont typeface="Arial" panose="020B0604020202020204" pitchFamily="34" charset="0"/>
+              <a:buChar char="•"/>
+            </a:pPr>
+            <a:r>
+              <a:rPr lang="en-US" altLang="ko-KR" sz="1000" dirty="0">
+                <a:latin typeface="나눔바른고딕" panose="020B0603020101020101" pitchFamily="34" charset="-127"/>
+                <a:ea typeface="나눔바른고딕" panose="020B0603020101020101" pitchFamily="34" charset="-127"/>
+              </a:rPr>
+              <a:t>Task </a:t>
+            </a:r>
+            <a:r>
+              <a:rPr lang="ko-KR" altLang="en-US" sz="1000" dirty="0">
+                <a:latin typeface="나눔바른고딕" panose="020B0603020101020101" pitchFamily="34" charset="-127"/>
+                <a:ea typeface="나눔바른고딕" panose="020B0603020101020101" pitchFamily="34" charset="-127"/>
+              </a:rPr>
+              <a:t>노드 </a:t>
+            </a:r>
+            <a:r>
+              <a:rPr lang="en-US" altLang="ko-KR" sz="1000" dirty="0">
+                <a:latin typeface="나눔바른고딕" panose="020B0603020101020101" pitchFamily="34" charset="-127"/>
+                <a:ea typeface="나눔바른고딕" panose="020B0603020101020101" pitchFamily="34" charset="-127"/>
+              </a:rPr>
+              <a:t>: </a:t>
+            </a:r>
+            <a:r>
+              <a:rPr lang="ko-KR" altLang="en-US" sz="1000" dirty="0" err="1">
+                <a:latin typeface="나눔바른고딕" panose="020B0603020101020101" pitchFamily="34" charset="-127"/>
+                <a:ea typeface="나눔바른고딕" panose="020B0603020101020101" pitchFamily="34" charset="-127"/>
+              </a:rPr>
+              <a:t>레이캐스트를</a:t>
+            </a:r>
+            <a:r>
+              <a:rPr lang="ko-KR" altLang="en-US" sz="1000" dirty="0">
+                <a:latin typeface="나눔바른고딕" panose="020B0603020101020101" pitchFamily="34" charset="-127"/>
+                <a:ea typeface="나눔바른고딕" panose="020B0603020101020101" pitchFamily="34" charset="-127"/>
+              </a:rPr>
+              <a:t> 통해 지형 인식 전담</a:t>
+            </a:r>
+            <a:endParaRPr lang="en-US" altLang="ko-KR" sz="1000" dirty="0">
+              <a:latin typeface="나눔바른고딕" panose="020B0603020101020101" pitchFamily="34" charset="-127"/>
+              <a:ea typeface="나눔바른고딕" panose="020B0603020101020101" pitchFamily="34" charset="-127"/>
+            </a:endParaRPr>
+          </a:p>
+          <a:p>
+            <a:pPr marL="628650" lvl="1" indent="-171450">
+              <a:lnSpc>
+                <a:spcPct val="150000"/>
+              </a:lnSpc>
+              <a:buFont typeface="Arial" panose="020B0604020202020204" pitchFamily="34" charset="0"/>
+              <a:buChar char="•"/>
+            </a:pPr>
+            <a:r>
+              <a:rPr lang="ko-KR" altLang="en-US" sz="1000" dirty="0" err="1">
+                <a:latin typeface="나눔바른고딕" panose="020B0603020101020101" pitchFamily="34" charset="-127"/>
+                <a:ea typeface="나눔바른고딕" panose="020B0603020101020101" pitchFamily="34" charset="-127"/>
+              </a:rPr>
+              <a:t>데코레이터</a:t>
+            </a:r>
+            <a:r>
+              <a:rPr lang="ko-KR" altLang="en-US" sz="1000" dirty="0">
+                <a:latin typeface="나눔바른고딕" panose="020B0603020101020101" pitchFamily="34" charset="-127"/>
+                <a:ea typeface="나눔바른고딕" panose="020B0603020101020101" pitchFamily="34" charset="-127"/>
+              </a:rPr>
+              <a:t> </a:t>
+            </a:r>
+            <a:r>
+              <a:rPr lang="en-US" altLang="ko-KR" sz="1000" dirty="0">
+                <a:latin typeface="나눔바른고딕" panose="020B0603020101020101" pitchFamily="34" charset="-127"/>
+                <a:ea typeface="나눔바른고딕" panose="020B0603020101020101" pitchFamily="34" charset="-127"/>
+              </a:rPr>
+              <a:t>: </a:t>
+            </a:r>
+            <a:r>
+              <a:rPr lang="ko-KR" altLang="en-US" sz="1000" dirty="0">
+                <a:latin typeface="나눔바른고딕" panose="020B0603020101020101" pitchFamily="34" charset="-127"/>
+                <a:ea typeface="나눔바른고딕" panose="020B0603020101020101" pitchFamily="34" charset="-127"/>
+              </a:rPr>
+              <a:t>결과 변화 없이 현재 상태에서 판단만 진행</a:t>
+            </a:r>
+            <a:endParaRPr lang="en-US" altLang="ko-KR" sz="1000" dirty="0">
+              <a:latin typeface="나눔바른고딕" panose="020B0603020101020101" pitchFamily="34" charset="-127"/>
+              <a:ea typeface="나눔바른고딕" panose="020B0603020101020101" pitchFamily="34" charset="-127"/>
+            </a:endParaRPr>
+          </a:p>
+        </p:txBody>
+      </p:sp>
+      <p:sp>
+        <p:nvSpPr>
+          <p:cNvPr id="11" name="TextBox 10">
+            <a:extLst>
+              <a:ext uri="{FF2B5EF4-FFF2-40B4-BE49-F238E27FC236}">
+                <a16:creationId xmlns:a16="http://schemas.microsoft.com/office/drawing/2014/main" id="{B16192B3-4C1A-B0C6-D680-9E062F4AB3D0}"/>
+              </a:ext>
+            </a:extLst>
+          </p:cNvPr>
+          <p:cNvSpPr txBox="1"/>
+          <p:nvPr/>
+        </p:nvSpPr>
+        <p:spPr>
+          <a:xfrm>
+            <a:off x="302449" y="1342316"/>
+            <a:ext cx="7464813" cy="346249"/>
+          </a:xfrm>
+          <a:prstGeom prst="rect">
+            <a:avLst/>
+          </a:prstGeom>
+          <a:noFill/>
+        </p:spPr>
+        <p:txBody>
+          <a:bodyPr wrap="square" rtlCol="0">
+            <a:spAutoFit/>
+          </a:bodyPr>
+          <a:lstStyle/>
+          <a:p>
+            <a:pPr>
+              <a:lnSpc>
+                <a:spcPct val="150000"/>
+              </a:lnSpc>
+            </a:pPr>
+            <a:r>
+              <a:rPr lang="ko-KR" altLang="en-US" sz="1200" dirty="0">
+                <a:latin typeface="나눔바른고딕" panose="020B0603020101020101" pitchFamily="34" charset="-127"/>
+                <a:ea typeface="나눔바른고딕" panose="020B0603020101020101" pitchFamily="34" charset="-127"/>
+              </a:rPr>
+              <a:t>범용화 작업</a:t>
+            </a:r>
+            <a:endParaRPr lang="en-US" altLang="ko-KR" sz="1200" dirty="0">
+              <a:latin typeface="나눔바른고딕" panose="020B0603020101020101" pitchFamily="34" charset="-127"/>
+              <a:ea typeface="나눔바른고딕" panose="020B0603020101020101" pitchFamily="34" charset="-127"/>
+            </a:endParaRPr>
+          </a:p>
+        </p:txBody>
+      </p:sp>
+    </p:spTree>
+    <p:extLst>
+      <p:ext uri="{BB962C8B-B14F-4D97-AF65-F5344CB8AC3E}">
+        <p14:creationId xmlns:p14="http://schemas.microsoft.com/office/powerpoint/2010/main" val="3589343841"/>
+      </p:ext>
+    </p:extLst>
+  </p:cSld>
+  <p:clrMapOvr>
+    <a:masterClrMapping/>
+  </p:clrMapOvr>
+</p:sld>
+</file>
+
+<file path=ppt/slides/slide6.xml><?xml version="1.0" encoding="utf-8"?>
+<p:sld xmlns:a="http://schemas.openxmlformats.org/drawingml/2006/main" xmlns:r="http://schemas.openxmlformats.org/officeDocument/2006/relationships" xmlns:p="http://schemas.openxmlformats.org/presentationml/2006/main">
+  <p:cSld>
+    <p:spTree>
+      <p:nvGrpSpPr>
+        <p:cNvPr id="1" name="">
+          <a:extLst>
+            <a:ext uri="{FF2B5EF4-FFF2-40B4-BE49-F238E27FC236}">
+              <a16:creationId xmlns:a16="http://schemas.microsoft.com/office/drawing/2014/main" id="{FE2868A6-1828-2E86-12D0-3402BF3F26F2}"/>
+            </a:ext>
+          </a:extLst>
+        </p:cNvPr>
+        <p:cNvGrpSpPr/>
+        <p:nvPr/>
+      </p:nvGrpSpPr>
+      <p:grpSpPr>
+        <a:xfrm>
+          <a:off x="0" y="0"/>
+          <a:ext cx="0" cy="0"/>
+          <a:chOff x="0" y="0"/>
+          <a:chExt cx="0" cy="0"/>
+        </a:xfrm>
+      </p:grpSpPr>
+      <p:sp>
+        <p:nvSpPr>
+          <p:cNvPr id="8" name="TextBox 7">
+            <a:extLst>
+              <a:ext uri="{FF2B5EF4-FFF2-40B4-BE49-F238E27FC236}">
+                <a16:creationId xmlns:a16="http://schemas.microsoft.com/office/drawing/2014/main" id="{7E83E23D-5BEC-677E-07A7-E2BB773B5B14}"/>
+              </a:ext>
+            </a:extLst>
+          </p:cNvPr>
+          <p:cNvSpPr txBox="1"/>
+          <p:nvPr/>
+        </p:nvSpPr>
+        <p:spPr>
+          <a:xfrm>
+            <a:off x="302451" y="315453"/>
+            <a:ext cx="4944140" cy="369332"/>
+          </a:xfrm>
+          <a:prstGeom prst="rect">
+            <a:avLst/>
+          </a:prstGeom>
+          <a:noFill/>
+        </p:spPr>
+        <p:txBody>
+          <a:bodyPr wrap="square" rtlCol="0">
+            <a:spAutoFit/>
+          </a:bodyPr>
+          <a:lstStyle/>
+          <a:p>
+            <a:r>
+              <a:rPr lang="ko-KR" altLang="en-US" dirty="0">
+                <a:latin typeface="나눔바른고딕" panose="020B0603020101020101" pitchFamily="34" charset="-127"/>
+                <a:ea typeface="나눔바른고딕" panose="020B0603020101020101" pitchFamily="34" charset="-127"/>
+              </a:rPr>
+              <a:t>이번 주 작업 내역</a:t>
+            </a:r>
+            <a:endParaRPr lang="en-US" altLang="ko-KR" dirty="0">
+              <a:latin typeface="나눔바른고딕" panose="020B0603020101020101" pitchFamily="34" charset="-127"/>
+              <a:ea typeface="나눔바른고딕" panose="020B0603020101020101" pitchFamily="34" charset="-127"/>
+            </a:endParaRPr>
+          </a:p>
+        </p:txBody>
+      </p:sp>
+      <p:sp>
+        <p:nvSpPr>
+          <p:cNvPr id="10" name="TextBox 9">
+            <a:extLst>
+              <a:ext uri="{FF2B5EF4-FFF2-40B4-BE49-F238E27FC236}">
+                <a16:creationId xmlns:a16="http://schemas.microsoft.com/office/drawing/2014/main" id="{F7B47656-BFCA-B2B8-E5A5-C96919241820}"/>
+              </a:ext>
+            </a:extLst>
+          </p:cNvPr>
+          <p:cNvSpPr txBox="1"/>
+          <p:nvPr/>
+        </p:nvSpPr>
+        <p:spPr>
+          <a:xfrm>
+            <a:off x="302450" y="1003762"/>
+            <a:ext cx="2694247" cy="338554"/>
+          </a:xfrm>
+          <a:prstGeom prst="rect">
+            <a:avLst/>
+          </a:prstGeom>
+          <a:noFill/>
+        </p:spPr>
+        <p:txBody>
+          <a:bodyPr wrap="square" rtlCol="0">
+            <a:spAutoFit/>
+          </a:bodyPr>
+          <a:lstStyle/>
+          <a:p>
+            <a:r>
+              <a:rPr lang="ko-KR" altLang="en-US" sz="1600" dirty="0">
+                <a:latin typeface="나눔바른고딕" panose="020B0603020101020101" pitchFamily="34" charset="-127"/>
+                <a:ea typeface="나눔바른고딕" panose="020B0603020101020101" pitchFamily="34" charset="-127"/>
+              </a:rPr>
+              <a:t>노드 정리</a:t>
+            </a:r>
+            <a:endParaRPr lang="en-US" altLang="ko-KR" sz="1600" dirty="0">
+              <a:latin typeface="나눔바른고딕" panose="020B0603020101020101" pitchFamily="34" charset="-127"/>
+              <a:ea typeface="나눔바른고딕" panose="020B0603020101020101" pitchFamily="34" charset="-127"/>
+            </a:endParaRPr>
+          </a:p>
+        </p:txBody>
+      </p:sp>
+      <p:cxnSp>
+        <p:nvCxnSpPr>
+          <p:cNvPr id="3" name="직선 연결선 2">
+            <a:extLst>
+              <a:ext uri="{FF2B5EF4-FFF2-40B4-BE49-F238E27FC236}">
+                <a16:creationId xmlns:a16="http://schemas.microsoft.com/office/drawing/2014/main" id="{D8D14E91-40FC-81FC-AF1F-A00431D16D26}"/>
+              </a:ext>
+            </a:extLst>
+          </p:cNvPr>
+          <p:cNvCxnSpPr>
+            <a:cxnSpLocks/>
+          </p:cNvCxnSpPr>
+          <p:nvPr/>
+        </p:nvCxnSpPr>
+        <p:spPr>
+          <a:xfrm>
+            <a:off x="387511" y="818707"/>
+            <a:ext cx="11308303" cy="0"/>
+          </a:xfrm>
+          <a:prstGeom prst="line">
+            <a:avLst/>
+          </a:prstGeom>
+          <a:ln>
+            <a:solidFill>
+              <a:schemeClr val="tx2"/>
+            </a:solidFill>
+          </a:ln>
+        </p:spPr>
+        <p:style>
+          <a:lnRef idx="2">
+            <a:schemeClr val="accent1"/>
+          </a:lnRef>
+          <a:fillRef idx="0">
+            <a:schemeClr val="accent1"/>
+          </a:fillRef>
+          <a:effectRef idx="1">
+            <a:schemeClr val="accent1"/>
+          </a:effectRef>
+          <a:fontRef idx="minor">
+            <a:schemeClr val="tx1"/>
+          </a:fontRef>
+        </p:style>
+      </p:cxnSp>
+      <p:sp>
+        <p:nvSpPr>
+          <p:cNvPr id="12" name="직사각형 11">
+            <a:extLst>
+              <a:ext uri="{FF2B5EF4-FFF2-40B4-BE49-F238E27FC236}">
+                <a16:creationId xmlns:a16="http://schemas.microsoft.com/office/drawing/2014/main" id="{DE1D474A-AAC3-7283-1333-29BE0B25893E}"/>
+              </a:ext>
+            </a:extLst>
+          </p:cNvPr>
+          <p:cNvSpPr/>
+          <p:nvPr/>
+        </p:nvSpPr>
+        <p:spPr>
+          <a:xfrm>
+            <a:off x="10443172" y="118011"/>
+            <a:ext cx="1596912" cy="246221"/>
+          </a:xfrm>
+          <a:prstGeom prst="rect">
+            <a:avLst/>
+          </a:prstGeom>
+        </p:spPr>
+        <p:txBody>
+          <a:bodyPr wrap="none">
+            <a:spAutoFit/>
+          </a:bodyPr>
+          <a:lstStyle/>
+          <a:p>
+            <a:r>
+              <a:rPr lang="ko-KR" altLang="en-US" sz="1000" dirty="0" err="1">
+                <a:solidFill>
+                  <a:schemeClr val="bg1">
+                    <a:lumMod val="75000"/>
+                  </a:schemeClr>
+                </a:solidFill>
+                <a:latin typeface="나눔바른고딕" panose="020B0603020101020101" pitchFamily="34" charset="-127"/>
+                <a:ea typeface="나눔바른고딕" panose="020B0603020101020101" pitchFamily="34" charset="-127"/>
+              </a:rPr>
+              <a:t>펄어비스</a:t>
+            </a:r>
+            <a:r>
+              <a:rPr lang="ko-KR" altLang="en-US" sz="1000" dirty="0">
+                <a:solidFill>
+                  <a:schemeClr val="bg1">
+                    <a:lumMod val="75000"/>
+                  </a:schemeClr>
+                </a:solidFill>
+                <a:latin typeface="나눔바른고딕" panose="020B0603020101020101" pitchFamily="34" charset="-127"/>
+                <a:ea typeface="나눔바른고딕" panose="020B0603020101020101" pitchFamily="34" charset="-127"/>
+              </a:rPr>
+              <a:t> </a:t>
+            </a:r>
+            <a:r>
+              <a:rPr lang="en-US" altLang="ko-KR" sz="1000" dirty="0">
+                <a:solidFill>
+                  <a:schemeClr val="bg1">
+                    <a:lumMod val="75000"/>
+                  </a:schemeClr>
+                </a:solidFill>
+                <a:latin typeface="나눔바른고딕" panose="020B0603020101020101" pitchFamily="34" charset="-127"/>
+                <a:ea typeface="나눔바른고딕" panose="020B0603020101020101" pitchFamily="34" charset="-127"/>
+              </a:rPr>
+              <a:t>2026 </a:t>
+            </a:r>
+            <a:r>
+              <a:rPr lang="ko-KR" altLang="en-US" sz="1000" dirty="0">
+                <a:solidFill>
+                  <a:schemeClr val="bg1">
+                    <a:lumMod val="75000"/>
+                  </a:schemeClr>
+                </a:solidFill>
+                <a:latin typeface="나눔바른고딕" panose="020B0603020101020101" pitchFamily="34" charset="-127"/>
+                <a:ea typeface="나눔바른고딕" panose="020B0603020101020101" pitchFamily="34" charset="-127"/>
+              </a:rPr>
+              <a:t>여름 </a:t>
+            </a:r>
+            <a:r>
+              <a:rPr lang="ko-KR" altLang="en-US" sz="1000" dirty="0" err="1">
+                <a:solidFill>
+                  <a:schemeClr val="bg1">
+                    <a:lumMod val="75000"/>
+                  </a:schemeClr>
+                </a:solidFill>
+                <a:latin typeface="나눔바른고딕" panose="020B0603020101020101" pitchFamily="34" charset="-127"/>
+                <a:ea typeface="나눔바른고딕" panose="020B0603020101020101" pitchFamily="34" charset="-127"/>
+              </a:rPr>
+              <a:t>인턴십</a:t>
+            </a:r>
+            <a:endParaRPr lang="ko-KR" altLang="en-US" sz="1000" dirty="0">
+              <a:solidFill>
+                <a:schemeClr val="bg1">
+                  <a:lumMod val="75000"/>
+                </a:schemeClr>
+              </a:solidFill>
+              <a:latin typeface="나눔바른고딕" panose="020B0603020101020101" pitchFamily="34" charset="-127"/>
+              <a:ea typeface="나눔바른고딕" panose="020B0603020101020101" pitchFamily="34" charset="-127"/>
+            </a:endParaRPr>
+          </a:p>
+        </p:txBody>
+      </p:sp>
+      <p:sp>
+        <p:nvSpPr>
+          <p:cNvPr id="5" name="TextBox 4">
+            <a:extLst>
+              <a:ext uri="{FF2B5EF4-FFF2-40B4-BE49-F238E27FC236}">
+                <a16:creationId xmlns:a16="http://schemas.microsoft.com/office/drawing/2014/main" id="{355D51E4-47C9-D40F-2269-2852C530E92D}"/>
+              </a:ext>
+            </a:extLst>
+          </p:cNvPr>
+          <p:cNvSpPr txBox="1"/>
+          <p:nvPr/>
+        </p:nvSpPr>
+        <p:spPr>
+          <a:xfrm>
+            <a:off x="302449" y="1727036"/>
+            <a:ext cx="6520758" cy="534762"/>
+          </a:xfrm>
+          <a:prstGeom prst="rect">
+            <a:avLst/>
+          </a:prstGeom>
+          <a:noFill/>
+        </p:spPr>
+        <p:txBody>
+          <a:bodyPr wrap="square">
+            <a:spAutoFit/>
+          </a:bodyPr>
+          <a:lstStyle/>
+          <a:p>
+            <a:pPr marL="171450" indent="-171450">
+              <a:lnSpc>
+                <a:spcPct val="150000"/>
+              </a:lnSpc>
+              <a:buFont typeface="Arial" panose="020B0604020202020204" pitchFamily="34" charset="0"/>
+              <a:buChar char="•"/>
+            </a:pPr>
+            <a:r>
+              <a:rPr lang="ko-KR" altLang="en-US" sz="1000" dirty="0">
+                <a:latin typeface="나눔바른고딕" panose="020B0603020101020101" pitchFamily="34" charset="-127"/>
+                <a:ea typeface="나눔바른고딕" panose="020B0603020101020101" pitchFamily="34" charset="-127"/>
+              </a:rPr>
+              <a:t>이 과정에서 시스템을 이루는 요소들의 정립도 같이 이루어짐</a:t>
+            </a:r>
+            <a:endParaRPr lang="en-US" altLang="ko-KR" sz="1000" dirty="0">
+              <a:latin typeface="나눔바른고딕" panose="020B0603020101020101" pitchFamily="34" charset="-127"/>
+              <a:ea typeface="나눔바른고딕" panose="020B0603020101020101" pitchFamily="34" charset="-127"/>
+            </a:endParaRPr>
+          </a:p>
+          <a:p>
+            <a:pPr marL="171450" indent="-171450">
+              <a:lnSpc>
+                <a:spcPct val="150000"/>
+              </a:lnSpc>
+              <a:buFont typeface="Arial" panose="020B0604020202020204" pitchFamily="34" charset="0"/>
+              <a:buChar char="•"/>
+            </a:pPr>
+            <a:r>
+              <a:rPr lang="ko-KR" altLang="en-US" sz="1000" dirty="0">
+                <a:latin typeface="나눔바른고딕" panose="020B0603020101020101" pitchFamily="34" charset="-127"/>
+                <a:ea typeface="나눔바른고딕" panose="020B0603020101020101" pitchFamily="34" charset="-127"/>
+              </a:rPr>
+              <a:t>초기엔 모호했던 요소들을 좀 더 명확하게 구분</a:t>
+            </a:r>
+            <a:endParaRPr lang="en-US" altLang="ko-KR" sz="1000" dirty="0">
+              <a:latin typeface="나눔바른고딕" panose="020B0603020101020101" pitchFamily="34" charset="-127"/>
+              <a:ea typeface="나눔바른고딕" panose="020B0603020101020101" pitchFamily="34" charset="-127"/>
+            </a:endParaRPr>
+          </a:p>
+        </p:txBody>
+      </p:sp>
+      <p:sp>
+        <p:nvSpPr>
+          <p:cNvPr id="11" name="TextBox 10">
+            <a:extLst>
+              <a:ext uri="{FF2B5EF4-FFF2-40B4-BE49-F238E27FC236}">
+                <a16:creationId xmlns:a16="http://schemas.microsoft.com/office/drawing/2014/main" id="{37757B59-774B-8E51-6C9F-63AC994527F3}"/>
+              </a:ext>
+            </a:extLst>
+          </p:cNvPr>
+          <p:cNvSpPr txBox="1"/>
+          <p:nvPr/>
+        </p:nvSpPr>
+        <p:spPr>
+          <a:xfrm>
+            <a:off x="302449" y="1342316"/>
+            <a:ext cx="7464813" cy="346249"/>
+          </a:xfrm>
+          <a:prstGeom prst="rect">
+            <a:avLst/>
+          </a:prstGeom>
+          <a:noFill/>
+        </p:spPr>
+        <p:txBody>
+          <a:bodyPr wrap="square" rtlCol="0">
+            <a:spAutoFit/>
+          </a:bodyPr>
+          <a:lstStyle/>
+          <a:p>
+            <a:pPr>
+              <a:lnSpc>
+                <a:spcPct val="150000"/>
+              </a:lnSpc>
+            </a:pPr>
+            <a:r>
+              <a:rPr lang="ko-KR" altLang="en-US" sz="1200" dirty="0">
+                <a:latin typeface="나눔바른고딕" panose="020B0603020101020101" pitchFamily="34" charset="-127"/>
+                <a:ea typeface="나눔바른고딕" panose="020B0603020101020101" pitchFamily="34" charset="-127"/>
+              </a:rPr>
+              <a:t>범용화 작업</a:t>
+            </a:r>
+            <a:endParaRPr lang="en-US" altLang="ko-KR" sz="1200" dirty="0">
+              <a:latin typeface="나눔바른고딕" panose="020B0603020101020101" pitchFamily="34" charset="-127"/>
+              <a:ea typeface="나눔바른고딕" panose="020B0603020101020101" pitchFamily="34" charset="-127"/>
+            </a:endParaRPr>
+          </a:p>
+        </p:txBody>
+      </p:sp>
+      <p:sp>
+        <p:nvSpPr>
+          <p:cNvPr id="2" name="직사각형 1">
+            <a:extLst>
+              <a:ext uri="{FF2B5EF4-FFF2-40B4-BE49-F238E27FC236}">
+                <a16:creationId xmlns:a16="http://schemas.microsoft.com/office/drawing/2014/main" id="{71F21607-9037-8A6A-C993-8FC574C518F7}"/>
+              </a:ext>
+            </a:extLst>
+          </p:cNvPr>
+          <p:cNvSpPr/>
+          <p:nvPr/>
+        </p:nvSpPr>
+        <p:spPr>
+          <a:xfrm>
+            <a:off x="3401053" y="2810821"/>
+            <a:ext cx="4792133" cy="3068817"/>
+          </a:xfrm>
+          <a:prstGeom prst="rect">
+            <a:avLst/>
+          </a:prstGeom>
+        </p:spPr>
+        <p:style>
+          <a:lnRef idx="2">
+            <a:schemeClr val="accent1">
+              <a:shade val="15000"/>
+            </a:schemeClr>
+          </a:lnRef>
+          <a:fillRef idx="1">
+            <a:schemeClr val="accent1"/>
+          </a:fillRef>
+          <a:effectRef idx="0">
+            <a:schemeClr val="accent1"/>
+          </a:effectRef>
+          <a:fontRef idx="minor">
+            <a:schemeClr val="lt1"/>
+          </a:fontRef>
+        </p:style>
+        <p:txBody>
+          <a:bodyPr rtlCol="0" anchor="ctr"/>
+          <a:lstStyle/>
+          <a:p>
+            <a:pPr algn="ctr"/>
+            <a:r>
+              <a:rPr lang="ko-KR" altLang="en-US" dirty="0"/>
+              <a:t>간이 요약도</a:t>
+            </a:r>
+          </a:p>
+        </p:txBody>
+      </p:sp>
+    </p:spTree>
+    <p:extLst>
+      <p:ext uri="{BB962C8B-B14F-4D97-AF65-F5344CB8AC3E}">
+        <p14:creationId xmlns:p14="http://schemas.microsoft.com/office/powerpoint/2010/main" val="2504489782"/>
+      </p:ext>
+    </p:extLst>
+  </p:cSld>
+  <p:clrMapOvr>
+    <a:masterClrMapping/>
+  </p:clrMapOvr>
+</p:sld>
+</file>
+
+<file path=ppt/slides/slide7.xml><?xml version="1.0" encoding="utf-8"?>
+<p:sld xmlns:a="http://schemas.openxmlformats.org/drawingml/2006/main" xmlns:r="http://schemas.openxmlformats.org/officeDocument/2006/relationships" xmlns:p="http://schemas.openxmlformats.org/presentationml/2006/main">
+  <p:cSld>
+    <p:spTree>
+      <p:nvGrpSpPr>
+        <p:cNvPr id="1" name="">
+          <a:extLst>
+            <a:ext uri="{FF2B5EF4-FFF2-40B4-BE49-F238E27FC236}">
+              <a16:creationId xmlns:a16="http://schemas.microsoft.com/office/drawing/2014/main" id="{94AC5628-6096-007D-4F9A-097D06EAA780}"/>
+            </a:ext>
+          </a:extLst>
+        </p:cNvPr>
+        <p:cNvGrpSpPr/>
+        <p:nvPr/>
+      </p:nvGrpSpPr>
+      <p:grpSpPr>
+        <a:xfrm>
+          <a:off x="0" y="0"/>
+          <a:ext cx="0" cy="0"/>
+          <a:chOff x="0" y="0"/>
+          <a:chExt cx="0" cy="0"/>
+        </a:xfrm>
+      </p:grpSpPr>
+      <p:sp>
+        <p:nvSpPr>
+          <p:cNvPr id="8" name="TextBox 7">
+            <a:extLst>
+              <a:ext uri="{FF2B5EF4-FFF2-40B4-BE49-F238E27FC236}">
+                <a16:creationId xmlns:a16="http://schemas.microsoft.com/office/drawing/2014/main" id="{BCBC9F85-F7A3-3F83-1806-6A8A789EB677}"/>
+              </a:ext>
+            </a:extLst>
+          </p:cNvPr>
+          <p:cNvSpPr txBox="1"/>
+          <p:nvPr/>
+        </p:nvSpPr>
+        <p:spPr>
+          <a:xfrm>
+            <a:off x="302451" y="315453"/>
+            <a:ext cx="4944140" cy="369332"/>
+          </a:xfrm>
+          <a:prstGeom prst="rect">
+            <a:avLst/>
+          </a:prstGeom>
+          <a:noFill/>
+        </p:spPr>
+        <p:txBody>
+          <a:bodyPr wrap="square" rtlCol="0">
+            <a:spAutoFit/>
+          </a:bodyPr>
+          <a:lstStyle/>
+          <a:p>
+            <a:r>
+              <a:rPr lang="ko-KR" altLang="en-US" dirty="0">
+                <a:latin typeface="나눔바른고딕" panose="020B0603020101020101" pitchFamily="34" charset="-127"/>
+                <a:ea typeface="나눔바른고딕" panose="020B0603020101020101" pitchFamily="34" charset="-127"/>
+              </a:rPr>
+              <a:t>이번 주 작업 내역</a:t>
+            </a:r>
+            <a:endParaRPr lang="en-US" altLang="ko-KR" dirty="0">
+              <a:latin typeface="나눔바른고딕" panose="020B0603020101020101" pitchFamily="34" charset="-127"/>
+              <a:ea typeface="나눔바른고딕" panose="020B0603020101020101" pitchFamily="34" charset="-127"/>
+            </a:endParaRPr>
+          </a:p>
+        </p:txBody>
+      </p:sp>
+      <p:sp>
+        <p:nvSpPr>
+          <p:cNvPr id="10" name="TextBox 9">
+            <a:extLst>
+              <a:ext uri="{FF2B5EF4-FFF2-40B4-BE49-F238E27FC236}">
+                <a16:creationId xmlns:a16="http://schemas.microsoft.com/office/drawing/2014/main" id="{FD273E2F-7739-7201-81F8-1F5E095D26E7}"/>
+              </a:ext>
+            </a:extLst>
+          </p:cNvPr>
+          <p:cNvSpPr txBox="1"/>
+          <p:nvPr/>
+        </p:nvSpPr>
+        <p:spPr>
+          <a:xfrm>
+            <a:off x="302450" y="1003762"/>
+            <a:ext cx="2694247" cy="338554"/>
+          </a:xfrm>
+          <a:prstGeom prst="rect">
+            <a:avLst/>
+          </a:prstGeom>
+          <a:noFill/>
+        </p:spPr>
+        <p:txBody>
+          <a:bodyPr wrap="square" rtlCol="0">
+            <a:spAutoFit/>
+          </a:bodyPr>
+          <a:lstStyle/>
+          <a:p>
+            <a:r>
+              <a:rPr lang="ko-KR" altLang="en-US" sz="1600" dirty="0">
+                <a:latin typeface="나눔바른고딕" panose="020B0603020101020101" pitchFamily="34" charset="-127"/>
+                <a:ea typeface="나눔바른고딕" panose="020B0603020101020101" pitchFamily="34" charset="-127"/>
+              </a:rPr>
+              <a:t>지형 타입 추가</a:t>
+            </a:r>
+            <a:endParaRPr lang="en-US" altLang="ko-KR" sz="1600" dirty="0">
+              <a:latin typeface="나눔바른고딕" panose="020B0603020101020101" pitchFamily="34" charset="-127"/>
+              <a:ea typeface="나눔바른고딕" panose="020B0603020101020101" pitchFamily="34" charset="-127"/>
+            </a:endParaRPr>
+          </a:p>
+        </p:txBody>
+      </p:sp>
+      <p:cxnSp>
+        <p:nvCxnSpPr>
+          <p:cNvPr id="3" name="직선 연결선 2">
+            <a:extLst>
+              <a:ext uri="{FF2B5EF4-FFF2-40B4-BE49-F238E27FC236}">
+                <a16:creationId xmlns:a16="http://schemas.microsoft.com/office/drawing/2014/main" id="{B40C969E-FCF4-2ECC-59EC-50B8643A5B76}"/>
+              </a:ext>
+            </a:extLst>
+          </p:cNvPr>
+          <p:cNvCxnSpPr>
+            <a:cxnSpLocks/>
+          </p:cNvCxnSpPr>
+          <p:nvPr/>
+        </p:nvCxnSpPr>
+        <p:spPr>
+          <a:xfrm>
+            <a:off x="387511" y="818707"/>
+            <a:ext cx="11308303" cy="0"/>
+          </a:xfrm>
+          <a:prstGeom prst="line">
+            <a:avLst/>
+          </a:prstGeom>
+          <a:ln>
+            <a:solidFill>
+              <a:schemeClr val="tx2"/>
+            </a:solidFill>
+          </a:ln>
+        </p:spPr>
+        <p:style>
+          <a:lnRef idx="2">
+            <a:schemeClr val="accent1"/>
+          </a:lnRef>
+          <a:fillRef idx="0">
+            <a:schemeClr val="accent1"/>
+          </a:fillRef>
+          <a:effectRef idx="1">
+            <a:schemeClr val="accent1"/>
+          </a:effectRef>
+          <a:fontRef idx="minor">
+            <a:schemeClr val="tx1"/>
+          </a:fontRef>
+        </p:style>
+      </p:cxnSp>
+      <p:sp>
+        <p:nvSpPr>
+          <p:cNvPr id="12" name="직사각형 11">
+            <a:extLst>
+              <a:ext uri="{FF2B5EF4-FFF2-40B4-BE49-F238E27FC236}">
+                <a16:creationId xmlns:a16="http://schemas.microsoft.com/office/drawing/2014/main" id="{3A205B8F-1C93-C984-E61E-45A53634FE3C}"/>
+              </a:ext>
+            </a:extLst>
+          </p:cNvPr>
+          <p:cNvSpPr/>
+          <p:nvPr/>
+        </p:nvSpPr>
+        <p:spPr>
+          <a:xfrm>
+            <a:off x="10443172" y="118011"/>
+            <a:ext cx="1596912" cy="246221"/>
+          </a:xfrm>
+          <a:prstGeom prst="rect">
+            <a:avLst/>
+          </a:prstGeom>
+        </p:spPr>
+        <p:txBody>
+          <a:bodyPr wrap="none">
+            <a:spAutoFit/>
+          </a:bodyPr>
+          <a:lstStyle/>
+          <a:p>
+            <a:r>
+              <a:rPr lang="ko-KR" altLang="en-US" sz="1000" dirty="0" err="1">
+                <a:solidFill>
+                  <a:schemeClr val="bg1">
+                    <a:lumMod val="75000"/>
+                  </a:schemeClr>
+                </a:solidFill>
+                <a:latin typeface="나눔바른고딕" panose="020B0603020101020101" pitchFamily="34" charset="-127"/>
+                <a:ea typeface="나눔바른고딕" panose="020B0603020101020101" pitchFamily="34" charset="-127"/>
+              </a:rPr>
+              <a:t>펄어비스</a:t>
+            </a:r>
+            <a:r>
+              <a:rPr lang="ko-KR" altLang="en-US" sz="1000" dirty="0">
+                <a:solidFill>
+                  <a:schemeClr val="bg1">
+                    <a:lumMod val="75000"/>
+                  </a:schemeClr>
+                </a:solidFill>
+                <a:latin typeface="나눔바른고딕" panose="020B0603020101020101" pitchFamily="34" charset="-127"/>
+                <a:ea typeface="나눔바른고딕" panose="020B0603020101020101" pitchFamily="34" charset="-127"/>
+              </a:rPr>
+              <a:t> </a:t>
+            </a:r>
+            <a:r>
+              <a:rPr lang="en-US" altLang="ko-KR" sz="1000" dirty="0">
+                <a:solidFill>
+                  <a:schemeClr val="bg1">
+                    <a:lumMod val="75000"/>
+                  </a:schemeClr>
+                </a:solidFill>
+                <a:latin typeface="나눔바른고딕" panose="020B0603020101020101" pitchFamily="34" charset="-127"/>
+                <a:ea typeface="나눔바른고딕" panose="020B0603020101020101" pitchFamily="34" charset="-127"/>
+              </a:rPr>
+              <a:t>2026 </a:t>
+            </a:r>
+            <a:r>
+              <a:rPr lang="ko-KR" altLang="en-US" sz="1000" dirty="0">
+                <a:solidFill>
+                  <a:schemeClr val="bg1">
+                    <a:lumMod val="75000"/>
+                  </a:schemeClr>
+                </a:solidFill>
+                <a:latin typeface="나눔바른고딕" panose="020B0603020101020101" pitchFamily="34" charset="-127"/>
+                <a:ea typeface="나눔바른고딕" panose="020B0603020101020101" pitchFamily="34" charset="-127"/>
+              </a:rPr>
+              <a:t>여름 </a:t>
+            </a:r>
+            <a:r>
+              <a:rPr lang="ko-KR" altLang="en-US" sz="1000" dirty="0" err="1">
+                <a:solidFill>
+                  <a:schemeClr val="bg1">
+                    <a:lumMod val="75000"/>
+                  </a:schemeClr>
+                </a:solidFill>
+                <a:latin typeface="나눔바른고딕" panose="020B0603020101020101" pitchFamily="34" charset="-127"/>
+                <a:ea typeface="나눔바른고딕" panose="020B0603020101020101" pitchFamily="34" charset="-127"/>
+              </a:rPr>
+              <a:t>인턴십</a:t>
+            </a:r>
+            <a:endParaRPr lang="ko-KR" altLang="en-US" sz="1000" dirty="0">
+              <a:solidFill>
+                <a:schemeClr val="bg1">
+                  <a:lumMod val="75000"/>
+                </a:schemeClr>
+              </a:solidFill>
+              <a:latin typeface="나눔바른고딕" panose="020B0603020101020101" pitchFamily="34" charset="-127"/>
+              <a:ea typeface="나눔바른고딕" panose="020B0603020101020101" pitchFamily="34" charset="-127"/>
+            </a:endParaRPr>
+          </a:p>
+        </p:txBody>
+      </p:sp>
+      <p:sp>
+        <p:nvSpPr>
+          <p:cNvPr id="5" name="TextBox 4">
+            <a:extLst>
+              <a:ext uri="{FF2B5EF4-FFF2-40B4-BE49-F238E27FC236}">
+                <a16:creationId xmlns:a16="http://schemas.microsoft.com/office/drawing/2014/main" id="{22CFA5D7-1740-0566-E198-3D6707C83E07}"/>
+              </a:ext>
+            </a:extLst>
+          </p:cNvPr>
+          <p:cNvSpPr txBox="1"/>
+          <p:nvPr/>
+        </p:nvSpPr>
+        <p:spPr>
+          <a:xfrm>
+            <a:off x="302449" y="1727036"/>
+            <a:ext cx="6520758" cy="1458091"/>
+          </a:xfrm>
+          <a:prstGeom prst="rect">
+            <a:avLst/>
+          </a:prstGeom>
+          <a:noFill/>
+        </p:spPr>
+        <p:txBody>
+          <a:bodyPr wrap="square">
+            <a:spAutoFit/>
+          </a:bodyPr>
+          <a:lstStyle/>
+          <a:p>
+            <a:pPr marL="171450" indent="-171450">
+              <a:lnSpc>
+                <a:spcPct val="150000"/>
+              </a:lnSpc>
+              <a:buFont typeface="Arial" panose="020B0604020202020204" pitchFamily="34" charset="0"/>
+              <a:buChar char="•"/>
+            </a:pPr>
+            <a:r>
+              <a:rPr lang="ko-KR" altLang="en-US" sz="1000" dirty="0">
+                <a:latin typeface="나눔바른고딕" panose="020B0603020101020101" pitchFamily="34" charset="-127"/>
+                <a:ea typeface="나눔바른고딕" panose="020B0603020101020101" pitchFamily="34" charset="-127"/>
+              </a:rPr>
+              <a:t>숲과 같은 자연 상태에서 지형지물을 살피며</a:t>
+            </a:r>
+            <a:r>
+              <a:rPr lang="en-US" altLang="ko-KR" sz="1000" dirty="0">
+                <a:latin typeface="나눔바른고딕" panose="020B0603020101020101" pitchFamily="34" charset="-127"/>
+                <a:ea typeface="나눔바른고딕" panose="020B0603020101020101" pitchFamily="34" charset="-127"/>
+              </a:rPr>
+              <a:t>, </a:t>
+            </a:r>
+            <a:r>
+              <a:rPr lang="ko-KR" altLang="en-US" sz="1000" dirty="0">
+                <a:latin typeface="나눔바른고딕" panose="020B0603020101020101" pitchFamily="34" charset="-127"/>
+                <a:ea typeface="나눔바른고딕" panose="020B0603020101020101" pitchFamily="34" charset="-127"/>
+              </a:rPr>
+              <a:t>새로운 유형을 찾아보려 함</a:t>
+            </a:r>
+            <a:endParaRPr lang="en-US" altLang="ko-KR" sz="1000" dirty="0">
+              <a:latin typeface="나눔바른고딕" panose="020B0603020101020101" pitchFamily="34" charset="-127"/>
+              <a:ea typeface="나눔바른고딕" panose="020B0603020101020101" pitchFamily="34" charset="-127"/>
+            </a:endParaRPr>
+          </a:p>
+          <a:p>
+            <a:pPr marL="628650" lvl="1" indent="-171450">
+              <a:lnSpc>
+                <a:spcPct val="150000"/>
+              </a:lnSpc>
+              <a:buFont typeface="Arial" panose="020B0604020202020204" pitchFamily="34" charset="0"/>
+              <a:buChar char="•"/>
+            </a:pPr>
+            <a:r>
+              <a:rPr lang="ko-KR" altLang="en-US" sz="1000" dirty="0">
+                <a:latin typeface="나눔바른고딕" panose="020B0603020101020101" pitchFamily="34" charset="-127"/>
+                <a:ea typeface="나눔바른고딕" panose="020B0603020101020101" pitchFamily="34" charset="-127"/>
+              </a:rPr>
+              <a:t>현 시점 </a:t>
+            </a:r>
+            <a:r>
+              <a:rPr lang="en-US" altLang="ko-KR" sz="1000" dirty="0">
+                <a:latin typeface="나눔바른고딕" panose="020B0603020101020101" pitchFamily="34" charset="-127"/>
+                <a:ea typeface="나눔바른고딕" panose="020B0603020101020101" pitchFamily="34" charset="-127"/>
+              </a:rPr>
+              <a:t>: </a:t>
+            </a:r>
+            <a:r>
+              <a:rPr lang="ko-KR" altLang="en-US" sz="1000" dirty="0">
+                <a:latin typeface="나눔바른고딕" panose="020B0603020101020101" pitchFamily="34" charset="-127"/>
+                <a:ea typeface="나눔바른고딕" panose="020B0603020101020101" pitchFamily="34" charset="-127"/>
+              </a:rPr>
+              <a:t>큰 덩어리 진 장애물</a:t>
+            </a:r>
+            <a:r>
+              <a:rPr lang="en-US" altLang="ko-KR" sz="1000" dirty="0">
+                <a:latin typeface="나눔바른고딕" panose="020B0603020101020101" pitchFamily="34" charset="-127"/>
+                <a:ea typeface="나눔바른고딕" panose="020B0603020101020101" pitchFamily="34" charset="-127"/>
+              </a:rPr>
+              <a:t>, </a:t>
+            </a:r>
+            <a:r>
+              <a:rPr lang="ko-KR" altLang="en-US" sz="1000" dirty="0">
+                <a:latin typeface="나눔바른고딕" panose="020B0603020101020101" pitchFamily="34" charset="-127"/>
+                <a:ea typeface="나눔바른고딕" panose="020B0603020101020101" pitchFamily="34" charset="-127"/>
+              </a:rPr>
+              <a:t>장애물 상 돌출부</a:t>
+            </a:r>
+            <a:r>
+              <a:rPr lang="en-US" altLang="ko-KR" sz="1000" dirty="0">
+                <a:latin typeface="나눔바른고딕" panose="020B0603020101020101" pitchFamily="34" charset="-127"/>
+                <a:ea typeface="나눔바른고딕" panose="020B0603020101020101" pitchFamily="34" charset="-127"/>
+              </a:rPr>
+              <a:t>, </a:t>
+            </a:r>
+            <a:r>
+              <a:rPr lang="ko-KR" altLang="en-US" sz="1000" dirty="0">
+                <a:latin typeface="나눔바른고딕" panose="020B0603020101020101" pitchFamily="34" charset="-127"/>
+                <a:ea typeface="나눔바른고딕" panose="020B0603020101020101" pitchFamily="34" charset="-127"/>
+              </a:rPr>
+              <a:t>수평 방향의 기다란 지형</a:t>
+            </a:r>
+            <a:r>
+              <a:rPr lang="en-US" altLang="ko-KR" sz="1000" dirty="0">
+                <a:latin typeface="나눔바른고딕" panose="020B0603020101020101" pitchFamily="34" charset="-127"/>
+                <a:ea typeface="나눔바른고딕" panose="020B0603020101020101" pitchFamily="34" charset="-127"/>
+              </a:rPr>
+              <a:t>(Beam)</a:t>
+            </a:r>
+          </a:p>
+          <a:p>
+            <a:pPr marL="171450" indent="-171450">
+              <a:lnSpc>
+                <a:spcPct val="150000"/>
+              </a:lnSpc>
+              <a:buFont typeface="Arial" panose="020B0604020202020204" pitchFamily="34" charset="0"/>
+              <a:buChar char="•"/>
+            </a:pPr>
+            <a:r>
+              <a:rPr lang="ko-KR" altLang="en-US" sz="1000" dirty="0">
+                <a:latin typeface="나눔바른고딕" panose="020B0603020101020101" pitchFamily="34" charset="-127"/>
+                <a:ea typeface="나눔바른고딕" panose="020B0603020101020101" pitchFamily="34" charset="-127"/>
+              </a:rPr>
+              <a:t>숲 지형에 자주 볼 수 있는 요소를 파악</a:t>
+            </a:r>
+            <a:endParaRPr lang="en-US" altLang="ko-KR" sz="1000" dirty="0">
+              <a:latin typeface="나눔바른고딕" panose="020B0603020101020101" pitchFamily="34" charset="-127"/>
+              <a:ea typeface="나눔바른고딕" panose="020B0603020101020101" pitchFamily="34" charset="-127"/>
+            </a:endParaRPr>
+          </a:p>
+          <a:p>
+            <a:pPr marL="628650" lvl="1" indent="-171450">
+              <a:lnSpc>
+                <a:spcPct val="150000"/>
+              </a:lnSpc>
+              <a:buFont typeface="Arial" panose="020B0604020202020204" pitchFamily="34" charset="0"/>
+              <a:buChar char="•"/>
+            </a:pPr>
+            <a:r>
+              <a:rPr lang="ko-KR" altLang="en-US" sz="1000" dirty="0">
+                <a:latin typeface="나눔바른고딕" panose="020B0603020101020101" pitchFamily="34" charset="-127"/>
+                <a:ea typeface="나눔바른고딕" panose="020B0603020101020101" pitchFamily="34" charset="-127"/>
+              </a:rPr>
+              <a:t>나무</a:t>
+            </a:r>
+            <a:r>
+              <a:rPr lang="en-US" altLang="ko-KR" sz="1000" dirty="0">
+                <a:latin typeface="나눔바른고딕" panose="020B0603020101020101" pitchFamily="34" charset="-127"/>
+                <a:ea typeface="나눔바른고딕" panose="020B0603020101020101" pitchFamily="34" charset="-127"/>
+              </a:rPr>
+              <a:t>, </a:t>
+            </a:r>
+            <a:r>
+              <a:rPr lang="ko-KR" altLang="en-US" sz="1000" dirty="0">
+                <a:latin typeface="나눔바른고딕" panose="020B0603020101020101" pitchFamily="34" charset="-127"/>
+                <a:ea typeface="나눔바른고딕" panose="020B0603020101020101" pitchFamily="34" charset="-127"/>
+              </a:rPr>
+              <a:t>줄기</a:t>
+            </a:r>
+            <a:r>
+              <a:rPr lang="en-US" altLang="ko-KR" sz="1000" dirty="0">
+                <a:latin typeface="나눔바른고딕" panose="020B0603020101020101" pitchFamily="34" charset="-127"/>
+                <a:ea typeface="나눔바른고딕" panose="020B0603020101020101" pitchFamily="34" charset="-127"/>
+              </a:rPr>
+              <a:t>, </a:t>
+            </a:r>
+            <a:r>
+              <a:rPr lang="ko-KR" altLang="en-US" sz="1000" dirty="0">
+                <a:latin typeface="나눔바른고딕" panose="020B0603020101020101" pitchFamily="34" charset="-127"/>
+                <a:ea typeface="나눔바른고딕" panose="020B0603020101020101" pitchFamily="34" charset="-127"/>
+              </a:rPr>
+              <a:t>덩굴 등등 </a:t>
+            </a:r>
+            <a:endParaRPr lang="en-US" altLang="ko-KR" sz="1000" dirty="0">
+              <a:latin typeface="나눔바른고딕" panose="020B0603020101020101" pitchFamily="34" charset="-127"/>
+              <a:ea typeface="나눔바른고딕" panose="020B0603020101020101" pitchFamily="34" charset="-127"/>
+            </a:endParaRPr>
+          </a:p>
+          <a:p>
+            <a:pPr marL="1085850" lvl="2" indent="-171450">
+              <a:lnSpc>
+                <a:spcPct val="150000"/>
+              </a:lnSpc>
+              <a:buFont typeface="Arial" panose="020B0604020202020204" pitchFamily="34" charset="0"/>
+              <a:buChar char="•"/>
+            </a:pPr>
+            <a:r>
+              <a:rPr lang="ko-KR" altLang="en-US" sz="1000" dirty="0">
+                <a:latin typeface="나눔바른고딕" panose="020B0603020101020101" pitchFamily="34" charset="-127"/>
+                <a:ea typeface="나눔바른고딕" panose="020B0603020101020101" pitchFamily="34" charset="-127"/>
+              </a:rPr>
+              <a:t>대체로 </a:t>
+            </a:r>
+            <a:r>
+              <a:rPr lang="ko-KR" altLang="en-US" sz="1000" b="1" dirty="0">
+                <a:latin typeface="나눔바른고딕" panose="020B0603020101020101" pitchFamily="34" charset="-127"/>
+                <a:ea typeface="나눔바른고딕" panose="020B0603020101020101" pitchFamily="34" charset="-127"/>
+              </a:rPr>
+              <a:t>수직으로 향하는 요소</a:t>
+            </a:r>
+            <a:endParaRPr lang="en-US" altLang="ko-KR" sz="1000" b="1" dirty="0">
+              <a:latin typeface="나눔바른고딕" panose="020B0603020101020101" pitchFamily="34" charset="-127"/>
+              <a:ea typeface="나눔바른고딕" panose="020B0603020101020101" pitchFamily="34" charset="-127"/>
+            </a:endParaRPr>
+          </a:p>
+          <a:p>
+            <a:pPr marL="628650" lvl="1" indent="-171450">
+              <a:lnSpc>
+                <a:spcPct val="150000"/>
+              </a:lnSpc>
+              <a:buFont typeface="Arial" panose="020B0604020202020204" pitchFamily="34" charset="0"/>
+              <a:buChar char="•"/>
+            </a:pPr>
+            <a:r>
+              <a:rPr lang="ko-KR" altLang="en-US" sz="1000" dirty="0">
+                <a:latin typeface="나눔바른고딕" panose="020B0603020101020101" pitchFamily="34" charset="-127"/>
+                <a:ea typeface="나눔바른고딕" panose="020B0603020101020101" pitchFamily="34" charset="-127"/>
+              </a:rPr>
+              <a:t>기존 절벽</a:t>
+            </a:r>
+            <a:r>
+              <a:rPr lang="en-US" altLang="ko-KR" sz="1000" dirty="0">
+                <a:latin typeface="나눔바른고딕" panose="020B0603020101020101" pitchFamily="34" charset="-127"/>
+                <a:ea typeface="나눔바른고딕" panose="020B0603020101020101" pitchFamily="34" charset="-127"/>
+              </a:rPr>
+              <a:t>, </a:t>
+            </a:r>
+            <a:r>
+              <a:rPr lang="ko-KR" altLang="en-US" sz="1000" dirty="0">
+                <a:latin typeface="나눔바른고딕" panose="020B0603020101020101" pitchFamily="34" charset="-127"/>
+                <a:ea typeface="나눔바른고딕" panose="020B0603020101020101" pitchFamily="34" charset="-127"/>
+              </a:rPr>
+              <a:t>돌출부와 차이점 </a:t>
+            </a:r>
+            <a:r>
+              <a:rPr lang="en-US" altLang="ko-KR" sz="1000" dirty="0">
+                <a:latin typeface="나눔바른고딕" panose="020B0603020101020101" pitchFamily="34" charset="-127"/>
+                <a:ea typeface="나눔바른고딕" panose="020B0603020101020101" pitchFamily="34" charset="-127"/>
+              </a:rPr>
+              <a:t>: </a:t>
+            </a:r>
+            <a:r>
+              <a:rPr lang="ko-KR" altLang="en-US" sz="1000" dirty="0">
+                <a:latin typeface="나눔바른고딕" panose="020B0603020101020101" pitchFamily="34" charset="-127"/>
+                <a:ea typeface="나눔바른고딕" panose="020B0603020101020101" pitchFamily="34" charset="-127"/>
+              </a:rPr>
+              <a:t>좁고</a:t>
+            </a:r>
+            <a:r>
+              <a:rPr lang="en-US" altLang="ko-KR" sz="1000" dirty="0">
+                <a:latin typeface="나눔바른고딕" panose="020B0603020101020101" pitchFamily="34" charset="-127"/>
+                <a:ea typeface="나눔바른고딕" panose="020B0603020101020101" pitchFamily="34" charset="-127"/>
+              </a:rPr>
+              <a:t>, </a:t>
+            </a:r>
+            <a:r>
+              <a:rPr lang="ko-KR" altLang="en-US" sz="1000" dirty="0">
+                <a:latin typeface="나눔바른고딕" panose="020B0603020101020101" pitchFamily="34" charset="-127"/>
+                <a:ea typeface="나눔바른고딕" panose="020B0603020101020101" pitchFamily="34" charset="-127"/>
+              </a:rPr>
+              <a:t>길게 수직 방향으로 이동 가능</a:t>
+            </a:r>
+            <a:endParaRPr lang="en-US" altLang="ko-KR" sz="1000" dirty="0">
+              <a:latin typeface="나눔바른고딕" panose="020B0603020101020101" pitchFamily="34" charset="-127"/>
+              <a:ea typeface="나눔바른고딕" panose="020B0603020101020101" pitchFamily="34" charset="-127"/>
+            </a:endParaRPr>
+          </a:p>
+        </p:txBody>
+      </p:sp>
+      <p:sp>
+        <p:nvSpPr>
+          <p:cNvPr id="11" name="TextBox 10">
+            <a:extLst>
+              <a:ext uri="{FF2B5EF4-FFF2-40B4-BE49-F238E27FC236}">
+                <a16:creationId xmlns:a16="http://schemas.microsoft.com/office/drawing/2014/main" id="{F50CCD4C-6EF5-FEFC-3F13-E33D025FD49B}"/>
+              </a:ext>
+            </a:extLst>
+          </p:cNvPr>
+          <p:cNvSpPr txBox="1"/>
+          <p:nvPr/>
+        </p:nvSpPr>
+        <p:spPr>
+          <a:xfrm>
+            <a:off x="302449" y="1342316"/>
+            <a:ext cx="7464813" cy="346249"/>
+          </a:xfrm>
+          <a:prstGeom prst="rect">
+            <a:avLst/>
+          </a:prstGeom>
+          <a:noFill/>
+        </p:spPr>
+        <p:txBody>
+          <a:bodyPr wrap="square" rtlCol="0">
+            <a:spAutoFit/>
+          </a:bodyPr>
+          <a:lstStyle/>
+          <a:p>
+            <a:pPr>
+              <a:lnSpc>
+                <a:spcPct val="150000"/>
+              </a:lnSpc>
+            </a:pPr>
+            <a:r>
+              <a:rPr lang="en-US" altLang="ko-KR" sz="1200" dirty="0">
+                <a:latin typeface="나눔바른고딕" panose="020B0603020101020101" pitchFamily="34" charset="-127"/>
+                <a:ea typeface="나눔바른고딕" panose="020B0603020101020101" pitchFamily="34" charset="-127"/>
+              </a:rPr>
+              <a:t>Pole</a:t>
+            </a:r>
+            <a:r>
+              <a:rPr lang="ko-KR" altLang="en-US" sz="1200" dirty="0">
+                <a:latin typeface="나눔바른고딕" panose="020B0603020101020101" pitchFamily="34" charset="-127"/>
+                <a:ea typeface="나눔바른고딕" panose="020B0603020101020101" pitchFamily="34" charset="-127"/>
+              </a:rPr>
+              <a:t> 유형 추가</a:t>
+            </a:r>
+            <a:endParaRPr lang="en-US" altLang="ko-KR" sz="1200" dirty="0">
+              <a:latin typeface="나눔바른고딕" panose="020B0603020101020101" pitchFamily="34" charset="-127"/>
+              <a:ea typeface="나눔바른고딕" panose="020B0603020101020101" pitchFamily="34" charset="-127"/>
+            </a:endParaRPr>
+          </a:p>
+        </p:txBody>
+      </p:sp>
+      <p:sp>
+        <p:nvSpPr>
+          <p:cNvPr id="2" name="직사각형 1">
+            <a:extLst>
+              <a:ext uri="{FF2B5EF4-FFF2-40B4-BE49-F238E27FC236}">
+                <a16:creationId xmlns:a16="http://schemas.microsoft.com/office/drawing/2014/main" id="{39F25EA4-1E4F-CCE0-D4B6-75506FEA1D05}"/>
+              </a:ext>
+            </a:extLst>
+          </p:cNvPr>
+          <p:cNvSpPr/>
+          <p:nvPr/>
+        </p:nvSpPr>
+        <p:spPr>
+          <a:xfrm>
+            <a:off x="7017940" y="3429000"/>
+            <a:ext cx="3920066" cy="3037331"/>
+          </a:xfrm>
+          <a:prstGeom prst="rect">
+            <a:avLst/>
+          </a:prstGeom>
+        </p:spPr>
+        <p:style>
+          <a:lnRef idx="2">
+            <a:schemeClr val="accent1">
+              <a:shade val="15000"/>
+            </a:schemeClr>
+          </a:lnRef>
+          <a:fillRef idx="1">
+            <a:schemeClr val="accent1"/>
+          </a:fillRef>
+          <a:effectRef idx="0">
+            <a:schemeClr val="accent1"/>
+          </a:effectRef>
+          <a:fontRef idx="minor">
+            <a:schemeClr val="lt1"/>
+          </a:fontRef>
+        </p:style>
+        <p:txBody>
+          <a:bodyPr rtlCol="0" anchor="ctr"/>
+          <a:lstStyle/>
+          <a:p>
+            <a:pPr algn="ctr"/>
+            <a:r>
+              <a:rPr lang="ko-KR" altLang="en-US" dirty="0"/>
+              <a:t>숲 이미지</a:t>
+            </a:r>
+            <a:endParaRPr lang="en-US" altLang="ko-KR" dirty="0"/>
+          </a:p>
+          <a:p>
+            <a:pPr algn="ctr"/>
+            <a:r>
+              <a:rPr lang="ko-KR" altLang="en-US" dirty="0"/>
+              <a:t>숲 </a:t>
+            </a:r>
+            <a:r>
+              <a:rPr lang="ko-KR" altLang="en-US" dirty="0" err="1"/>
+              <a:t>파쿠르</a:t>
+            </a:r>
+            <a:r>
+              <a:rPr lang="ko-KR" altLang="en-US" dirty="0"/>
+              <a:t> 이미지</a:t>
+            </a:r>
+          </a:p>
+        </p:txBody>
+      </p:sp>
+      <p:sp>
+        <p:nvSpPr>
+          <p:cNvPr id="6" name="직사각형 5">
+            <a:extLst>
+              <a:ext uri="{FF2B5EF4-FFF2-40B4-BE49-F238E27FC236}">
+                <a16:creationId xmlns:a16="http://schemas.microsoft.com/office/drawing/2014/main" id="{C1F065AF-E8C9-24AF-D181-09F26DD6586D}"/>
+              </a:ext>
+            </a:extLst>
+          </p:cNvPr>
+          <p:cNvSpPr/>
+          <p:nvPr/>
+        </p:nvSpPr>
+        <p:spPr>
+          <a:xfrm>
+            <a:off x="2074822" y="3429000"/>
+            <a:ext cx="3920066" cy="3037331"/>
+          </a:xfrm>
+          <a:prstGeom prst="rect">
+            <a:avLst/>
+          </a:prstGeom>
+        </p:spPr>
+        <p:style>
+          <a:lnRef idx="2">
+            <a:schemeClr val="accent1">
+              <a:shade val="15000"/>
+            </a:schemeClr>
+          </a:lnRef>
+          <a:fillRef idx="1">
+            <a:schemeClr val="accent1"/>
+          </a:fillRef>
+          <a:effectRef idx="0">
+            <a:schemeClr val="accent1"/>
+          </a:effectRef>
+          <a:fontRef idx="minor">
+            <a:schemeClr val="lt1"/>
+          </a:fontRef>
+        </p:style>
+        <p:txBody>
+          <a:bodyPr rtlCol="0" anchor="ctr"/>
+          <a:lstStyle/>
+          <a:p>
+            <a:pPr algn="ctr"/>
+            <a:r>
+              <a:rPr lang="ko-KR" altLang="en-US" dirty="0"/>
+              <a:t>도시</a:t>
+            </a:r>
+            <a:r>
+              <a:rPr lang="en-US" altLang="ko-KR" dirty="0"/>
+              <a:t>, </a:t>
+            </a:r>
+            <a:r>
+              <a:rPr lang="ko-KR" altLang="en-US" dirty="0"/>
+              <a:t>도심 형태</a:t>
+            </a:r>
+          </a:p>
+        </p:txBody>
+      </p:sp>
+    </p:spTree>
+    <p:extLst>
+      <p:ext uri="{BB962C8B-B14F-4D97-AF65-F5344CB8AC3E}">
+        <p14:creationId xmlns:p14="http://schemas.microsoft.com/office/powerpoint/2010/main" val="1939725433"/>
+      </p:ext>
+    </p:extLst>
+  </p:cSld>
+  <p:clrMapOvr>
+    <a:masterClrMapping/>
+  </p:clrMapOvr>
+</p:sld>
+</file>
+
+<file path=ppt/slides/slide8.xml><?xml version="1.0" encoding="utf-8"?>
+<p:sld xmlns:a="http://schemas.openxmlformats.org/drawingml/2006/main" xmlns:r="http://schemas.openxmlformats.org/officeDocument/2006/relationships" xmlns:p="http://schemas.openxmlformats.org/presentationml/2006/main">
+  <p:cSld>
+    <p:spTree>
+      <p:nvGrpSpPr>
+        <p:cNvPr id="1" name="">
+          <a:extLst>
+            <a:ext uri="{FF2B5EF4-FFF2-40B4-BE49-F238E27FC236}">
+              <a16:creationId xmlns:a16="http://schemas.microsoft.com/office/drawing/2014/main" id="{E0E0E4D2-0D9D-1530-C6E7-109A6318A143}"/>
+            </a:ext>
+          </a:extLst>
+        </p:cNvPr>
+        <p:cNvGrpSpPr/>
+        <p:nvPr/>
+      </p:nvGrpSpPr>
+      <p:grpSpPr>
+        <a:xfrm>
+          <a:off x="0" y="0"/>
+          <a:ext cx="0" cy="0"/>
+          <a:chOff x="0" y="0"/>
+          <a:chExt cx="0" cy="0"/>
+        </a:xfrm>
+      </p:grpSpPr>
+      <p:sp>
+        <p:nvSpPr>
+          <p:cNvPr id="8" name="TextBox 7">
+            <a:extLst>
+              <a:ext uri="{FF2B5EF4-FFF2-40B4-BE49-F238E27FC236}">
+                <a16:creationId xmlns:a16="http://schemas.microsoft.com/office/drawing/2014/main" id="{BA27C4FC-E985-014A-7851-B27ED972F5A2}"/>
+              </a:ext>
+            </a:extLst>
+          </p:cNvPr>
+          <p:cNvSpPr txBox="1"/>
+          <p:nvPr/>
+        </p:nvSpPr>
+        <p:spPr>
+          <a:xfrm>
+            <a:off x="302451" y="315453"/>
+            <a:ext cx="4944140" cy="369332"/>
+          </a:xfrm>
+          <a:prstGeom prst="rect">
+            <a:avLst/>
+          </a:prstGeom>
+          <a:noFill/>
+        </p:spPr>
+        <p:txBody>
+          <a:bodyPr wrap="square" rtlCol="0">
+            <a:spAutoFit/>
+          </a:bodyPr>
+          <a:lstStyle/>
+          <a:p>
+            <a:r>
+              <a:rPr lang="ko-KR" altLang="en-US" dirty="0">
+                <a:latin typeface="나눔바른고딕" panose="020B0603020101020101" pitchFamily="34" charset="-127"/>
+                <a:ea typeface="나눔바른고딕" panose="020B0603020101020101" pitchFamily="34" charset="-127"/>
+              </a:rPr>
+              <a:t>이번 주 작업 내역</a:t>
+            </a:r>
+            <a:endParaRPr lang="en-US" altLang="ko-KR" dirty="0">
+              <a:latin typeface="나눔바른고딕" panose="020B0603020101020101" pitchFamily="34" charset="-127"/>
+              <a:ea typeface="나눔바른고딕" panose="020B0603020101020101" pitchFamily="34" charset="-127"/>
+            </a:endParaRPr>
+          </a:p>
+        </p:txBody>
+      </p:sp>
+      <p:sp>
+        <p:nvSpPr>
+          <p:cNvPr id="10" name="TextBox 9">
+            <a:extLst>
+              <a:ext uri="{FF2B5EF4-FFF2-40B4-BE49-F238E27FC236}">
+                <a16:creationId xmlns:a16="http://schemas.microsoft.com/office/drawing/2014/main" id="{57E65441-F46E-173E-BDE8-2F1CC95C2DF2}"/>
+              </a:ext>
+            </a:extLst>
+          </p:cNvPr>
+          <p:cNvSpPr txBox="1"/>
+          <p:nvPr/>
+        </p:nvSpPr>
+        <p:spPr>
+          <a:xfrm>
+            <a:off x="302450" y="1003762"/>
+            <a:ext cx="2694247" cy="338554"/>
+          </a:xfrm>
+          <a:prstGeom prst="rect">
+            <a:avLst/>
+          </a:prstGeom>
+          <a:noFill/>
+        </p:spPr>
+        <p:txBody>
+          <a:bodyPr wrap="square" rtlCol="0">
+            <a:spAutoFit/>
+          </a:bodyPr>
+          <a:lstStyle/>
+          <a:p>
+            <a:r>
+              <a:rPr lang="ko-KR" altLang="en-US" sz="1600" dirty="0">
+                <a:latin typeface="나눔바른고딕" panose="020B0603020101020101" pitchFamily="34" charset="-127"/>
+                <a:ea typeface="나눔바른고딕" panose="020B0603020101020101" pitchFamily="34" charset="-127"/>
+              </a:rPr>
+              <a:t>지형 타입 추가</a:t>
+            </a:r>
+            <a:endParaRPr lang="en-US" altLang="ko-KR" sz="1600" dirty="0">
+              <a:latin typeface="나눔바른고딕" panose="020B0603020101020101" pitchFamily="34" charset="-127"/>
+              <a:ea typeface="나눔바른고딕" panose="020B0603020101020101" pitchFamily="34" charset="-127"/>
+            </a:endParaRPr>
+          </a:p>
+        </p:txBody>
+      </p:sp>
+      <p:cxnSp>
+        <p:nvCxnSpPr>
+          <p:cNvPr id="3" name="직선 연결선 2">
+            <a:extLst>
+              <a:ext uri="{FF2B5EF4-FFF2-40B4-BE49-F238E27FC236}">
+                <a16:creationId xmlns:a16="http://schemas.microsoft.com/office/drawing/2014/main" id="{2C6052E7-E3BB-3579-830F-3D1DD213263D}"/>
+              </a:ext>
+            </a:extLst>
+          </p:cNvPr>
+          <p:cNvCxnSpPr>
+            <a:cxnSpLocks/>
+          </p:cNvCxnSpPr>
+          <p:nvPr/>
+        </p:nvCxnSpPr>
+        <p:spPr>
+          <a:xfrm>
+            <a:off x="387511" y="818707"/>
+            <a:ext cx="11308303" cy="0"/>
+          </a:xfrm>
+          <a:prstGeom prst="line">
+            <a:avLst/>
+          </a:prstGeom>
+          <a:ln>
+            <a:solidFill>
+              <a:schemeClr val="tx2"/>
+            </a:solidFill>
+          </a:ln>
+        </p:spPr>
+        <p:style>
+          <a:lnRef idx="2">
+            <a:schemeClr val="accent1"/>
+          </a:lnRef>
+          <a:fillRef idx="0">
+            <a:schemeClr val="accent1"/>
+          </a:fillRef>
+          <a:effectRef idx="1">
+            <a:schemeClr val="accent1"/>
+          </a:effectRef>
+          <a:fontRef idx="minor">
+            <a:schemeClr val="tx1"/>
+          </a:fontRef>
+        </p:style>
+      </p:cxnSp>
+      <p:sp>
+        <p:nvSpPr>
+          <p:cNvPr id="12" name="직사각형 11">
+            <a:extLst>
+              <a:ext uri="{FF2B5EF4-FFF2-40B4-BE49-F238E27FC236}">
+                <a16:creationId xmlns:a16="http://schemas.microsoft.com/office/drawing/2014/main" id="{938B7027-4AED-BE7B-D0CB-7EE707859243}"/>
+              </a:ext>
+            </a:extLst>
+          </p:cNvPr>
+          <p:cNvSpPr/>
+          <p:nvPr/>
+        </p:nvSpPr>
+        <p:spPr>
+          <a:xfrm>
+            <a:off x="10443172" y="118011"/>
+            <a:ext cx="1596912" cy="246221"/>
+          </a:xfrm>
+          <a:prstGeom prst="rect">
+            <a:avLst/>
+          </a:prstGeom>
+        </p:spPr>
+        <p:txBody>
+          <a:bodyPr wrap="none">
+            <a:spAutoFit/>
+          </a:bodyPr>
+          <a:lstStyle/>
+          <a:p>
+            <a:r>
+              <a:rPr lang="ko-KR" altLang="en-US" sz="1000" dirty="0" err="1">
+                <a:solidFill>
+                  <a:schemeClr val="bg1">
+                    <a:lumMod val="75000"/>
+                  </a:schemeClr>
+                </a:solidFill>
+                <a:latin typeface="나눔바른고딕" panose="020B0603020101020101" pitchFamily="34" charset="-127"/>
+                <a:ea typeface="나눔바른고딕" panose="020B0603020101020101" pitchFamily="34" charset="-127"/>
+              </a:rPr>
+              <a:t>펄어비스</a:t>
+            </a:r>
+            <a:r>
+              <a:rPr lang="ko-KR" altLang="en-US" sz="1000" dirty="0">
+                <a:solidFill>
+                  <a:schemeClr val="bg1">
+                    <a:lumMod val="75000"/>
+                  </a:schemeClr>
+                </a:solidFill>
+                <a:latin typeface="나눔바른고딕" panose="020B0603020101020101" pitchFamily="34" charset="-127"/>
+                <a:ea typeface="나눔바른고딕" panose="020B0603020101020101" pitchFamily="34" charset="-127"/>
+              </a:rPr>
+              <a:t> </a:t>
+            </a:r>
+            <a:r>
+              <a:rPr lang="en-US" altLang="ko-KR" sz="1000" dirty="0">
+                <a:solidFill>
+                  <a:schemeClr val="bg1">
+                    <a:lumMod val="75000"/>
+                  </a:schemeClr>
+                </a:solidFill>
+                <a:latin typeface="나눔바른고딕" panose="020B0603020101020101" pitchFamily="34" charset="-127"/>
+                <a:ea typeface="나눔바른고딕" panose="020B0603020101020101" pitchFamily="34" charset="-127"/>
+              </a:rPr>
+              <a:t>2026 </a:t>
+            </a:r>
+            <a:r>
+              <a:rPr lang="ko-KR" altLang="en-US" sz="1000" dirty="0">
+                <a:solidFill>
+                  <a:schemeClr val="bg1">
+                    <a:lumMod val="75000"/>
+                  </a:schemeClr>
+                </a:solidFill>
+                <a:latin typeface="나눔바른고딕" panose="020B0603020101020101" pitchFamily="34" charset="-127"/>
+                <a:ea typeface="나눔바른고딕" panose="020B0603020101020101" pitchFamily="34" charset="-127"/>
+              </a:rPr>
+              <a:t>여름 </a:t>
+            </a:r>
+            <a:r>
+              <a:rPr lang="ko-KR" altLang="en-US" sz="1000" dirty="0" err="1">
+                <a:solidFill>
+                  <a:schemeClr val="bg1">
+                    <a:lumMod val="75000"/>
+                  </a:schemeClr>
+                </a:solidFill>
+                <a:latin typeface="나눔바른고딕" panose="020B0603020101020101" pitchFamily="34" charset="-127"/>
+                <a:ea typeface="나눔바른고딕" panose="020B0603020101020101" pitchFamily="34" charset="-127"/>
+              </a:rPr>
+              <a:t>인턴십</a:t>
+            </a:r>
+            <a:endParaRPr lang="ko-KR" altLang="en-US" sz="1000" dirty="0">
+              <a:solidFill>
+                <a:schemeClr val="bg1">
+                  <a:lumMod val="75000"/>
+                </a:schemeClr>
+              </a:solidFill>
+              <a:latin typeface="나눔바른고딕" panose="020B0603020101020101" pitchFamily="34" charset="-127"/>
+              <a:ea typeface="나눔바른고딕" panose="020B0603020101020101" pitchFamily="34" charset="-127"/>
+            </a:endParaRPr>
+          </a:p>
+        </p:txBody>
+      </p:sp>
+      <p:sp>
+        <p:nvSpPr>
+          <p:cNvPr id="5" name="TextBox 4">
+            <a:extLst>
+              <a:ext uri="{FF2B5EF4-FFF2-40B4-BE49-F238E27FC236}">
+                <a16:creationId xmlns:a16="http://schemas.microsoft.com/office/drawing/2014/main" id="{8BCF9F1A-E306-DB23-C693-A58616EDAC53}"/>
+              </a:ext>
+            </a:extLst>
+          </p:cNvPr>
+          <p:cNvSpPr txBox="1"/>
+          <p:nvPr/>
+        </p:nvSpPr>
+        <p:spPr>
+          <a:xfrm>
+            <a:off x="302449" y="1727036"/>
+            <a:ext cx="6520758" cy="303929"/>
+          </a:xfrm>
+          <a:prstGeom prst="rect">
+            <a:avLst/>
+          </a:prstGeom>
+          <a:noFill/>
+        </p:spPr>
+        <p:txBody>
+          <a:bodyPr wrap="square">
+            <a:spAutoFit/>
+          </a:bodyPr>
+          <a:lstStyle/>
+          <a:p>
+            <a:pPr marL="171450" indent="-171450">
+              <a:lnSpc>
+                <a:spcPct val="150000"/>
+              </a:lnSpc>
+              <a:buFont typeface="Arial" panose="020B0604020202020204" pitchFamily="34" charset="0"/>
+              <a:buChar char="•"/>
+            </a:pPr>
+            <a:r>
+              <a:rPr lang="en-US" altLang="ko-KR" sz="1000" dirty="0">
+                <a:latin typeface="나눔바른고딕" panose="020B0603020101020101" pitchFamily="34" charset="-127"/>
+                <a:ea typeface="나눔바른고딕" panose="020B0603020101020101" pitchFamily="34" charset="-127"/>
+              </a:rPr>
+              <a:t>Pole </a:t>
+            </a:r>
+            <a:r>
+              <a:rPr lang="ko-KR" altLang="en-US" sz="1000" dirty="0">
+                <a:latin typeface="나눔바른고딕" panose="020B0603020101020101" pitchFamily="34" charset="-127"/>
+                <a:ea typeface="나눔바른고딕" panose="020B0603020101020101" pitchFamily="34" charset="-127"/>
+              </a:rPr>
+              <a:t>유형 장애물 극복 예시</a:t>
+            </a:r>
+            <a:endParaRPr lang="en-US" altLang="ko-KR" sz="1000" dirty="0">
+              <a:latin typeface="나눔바른고딕" panose="020B0603020101020101" pitchFamily="34" charset="-127"/>
+              <a:ea typeface="나눔바른고딕" panose="020B0603020101020101" pitchFamily="34" charset="-127"/>
+            </a:endParaRPr>
+          </a:p>
+        </p:txBody>
+      </p:sp>
+      <p:sp>
+        <p:nvSpPr>
+          <p:cNvPr id="11" name="TextBox 10">
+            <a:extLst>
+              <a:ext uri="{FF2B5EF4-FFF2-40B4-BE49-F238E27FC236}">
+                <a16:creationId xmlns:a16="http://schemas.microsoft.com/office/drawing/2014/main" id="{B1133668-B92D-723D-46BB-FC24D8605318}"/>
+              </a:ext>
+            </a:extLst>
+          </p:cNvPr>
+          <p:cNvSpPr txBox="1"/>
+          <p:nvPr/>
+        </p:nvSpPr>
+        <p:spPr>
+          <a:xfrm>
+            <a:off x="302449" y="1342316"/>
+            <a:ext cx="7464813" cy="346249"/>
+          </a:xfrm>
+          <a:prstGeom prst="rect">
+            <a:avLst/>
+          </a:prstGeom>
+          <a:noFill/>
+        </p:spPr>
+        <p:txBody>
+          <a:bodyPr wrap="square" rtlCol="0">
+            <a:spAutoFit/>
+          </a:bodyPr>
+          <a:lstStyle/>
+          <a:p>
+            <a:pPr>
+              <a:lnSpc>
+                <a:spcPct val="150000"/>
+              </a:lnSpc>
+            </a:pPr>
+            <a:r>
+              <a:rPr lang="en-US" altLang="ko-KR" sz="1200" dirty="0">
+                <a:latin typeface="나눔바른고딕" panose="020B0603020101020101" pitchFamily="34" charset="-127"/>
+                <a:ea typeface="나눔바른고딕" panose="020B0603020101020101" pitchFamily="34" charset="-127"/>
+              </a:rPr>
+              <a:t>Pole</a:t>
+            </a:r>
+            <a:r>
+              <a:rPr lang="ko-KR" altLang="en-US" sz="1200" dirty="0">
+                <a:latin typeface="나눔바른고딕" panose="020B0603020101020101" pitchFamily="34" charset="-127"/>
+                <a:ea typeface="나눔바른고딕" panose="020B0603020101020101" pitchFamily="34" charset="-127"/>
+              </a:rPr>
+              <a:t> 유형 추가</a:t>
+            </a:r>
+            <a:endParaRPr lang="en-US" altLang="ko-KR" sz="1200" dirty="0">
+              <a:latin typeface="나눔바른고딕" panose="020B0603020101020101" pitchFamily="34" charset="-127"/>
+              <a:ea typeface="나눔바른고딕" panose="020B0603020101020101" pitchFamily="34" charset="-127"/>
+            </a:endParaRPr>
+          </a:p>
+        </p:txBody>
+      </p:sp>
+      <p:sp>
+        <p:nvSpPr>
+          <p:cNvPr id="7" name="직사각형 6">
+            <a:extLst>
+              <a:ext uri="{FF2B5EF4-FFF2-40B4-BE49-F238E27FC236}">
+                <a16:creationId xmlns:a16="http://schemas.microsoft.com/office/drawing/2014/main" id="{9332B517-EFE1-8A2A-DF20-D03555AA6D0D}"/>
+              </a:ext>
+            </a:extLst>
+          </p:cNvPr>
+          <p:cNvSpPr/>
+          <p:nvPr/>
+        </p:nvSpPr>
+        <p:spPr>
+          <a:xfrm>
+            <a:off x="387511" y="2362200"/>
+            <a:ext cx="3575373" cy="4140200"/>
+          </a:xfrm>
+          <a:prstGeom prst="rect">
+            <a:avLst/>
+          </a:prstGeom>
+        </p:spPr>
+        <p:style>
+          <a:lnRef idx="2">
+            <a:schemeClr val="accent1">
+              <a:shade val="15000"/>
+            </a:schemeClr>
+          </a:lnRef>
+          <a:fillRef idx="1">
+            <a:schemeClr val="accent1"/>
+          </a:fillRef>
+          <a:effectRef idx="0">
+            <a:schemeClr val="accent1"/>
+          </a:effectRef>
+          <a:fontRef idx="minor">
+            <a:schemeClr val="lt1"/>
+          </a:fontRef>
+        </p:style>
+        <p:txBody>
+          <a:bodyPr rtlCol="0" anchor="ctr"/>
+          <a:lstStyle/>
+          <a:p>
+            <a:pPr algn="ctr"/>
+            <a:r>
+              <a:rPr lang="ko-KR" altLang="en-US" dirty="0"/>
+              <a:t>기본 오르기</a:t>
+            </a:r>
+            <a:endParaRPr lang="en-US" altLang="ko-KR" dirty="0"/>
+          </a:p>
+          <a:p>
+            <a:pPr algn="ctr"/>
+            <a:r>
+              <a:rPr lang="en-US" altLang="ko-KR" dirty="0"/>
+              <a:t>Pole To Pole</a:t>
+            </a:r>
+            <a:endParaRPr lang="ko-KR" altLang="en-US" dirty="0"/>
+          </a:p>
+        </p:txBody>
+      </p:sp>
+      <p:sp>
+        <p:nvSpPr>
+          <p:cNvPr id="13" name="직사각형 12">
+            <a:extLst>
+              <a:ext uri="{FF2B5EF4-FFF2-40B4-BE49-F238E27FC236}">
+                <a16:creationId xmlns:a16="http://schemas.microsoft.com/office/drawing/2014/main" id="{A8507DAD-BD45-83A6-BAA1-9763F95D44BE}"/>
+              </a:ext>
+            </a:extLst>
+          </p:cNvPr>
+          <p:cNvSpPr/>
+          <p:nvPr/>
+        </p:nvSpPr>
+        <p:spPr>
+          <a:xfrm>
+            <a:off x="4191889" y="2362200"/>
+            <a:ext cx="3575373" cy="4140200"/>
+          </a:xfrm>
+          <a:prstGeom prst="rect">
+            <a:avLst/>
+          </a:prstGeom>
+        </p:spPr>
+        <p:style>
+          <a:lnRef idx="2">
+            <a:schemeClr val="accent1">
+              <a:shade val="15000"/>
+            </a:schemeClr>
+          </a:lnRef>
+          <a:fillRef idx="1">
+            <a:schemeClr val="accent1"/>
+          </a:fillRef>
+          <a:effectRef idx="0">
+            <a:schemeClr val="accent1"/>
+          </a:effectRef>
+          <a:fontRef idx="minor">
+            <a:schemeClr val="lt1"/>
+          </a:fontRef>
+        </p:style>
+        <p:txBody>
+          <a:bodyPr rtlCol="0" anchor="ctr"/>
+          <a:lstStyle/>
+          <a:p>
+            <a:pPr algn="ctr"/>
+            <a:r>
+              <a:rPr lang="en-US" altLang="ko-KR" dirty="0"/>
+              <a:t>Pole To Mantle </a:t>
+            </a:r>
+            <a:r>
+              <a:rPr lang="ko-KR" altLang="en-US" dirty="0"/>
+              <a:t>등등</a:t>
+            </a:r>
+          </a:p>
+        </p:txBody>
+      </p:sp>
+      <p:sp>
+        <p:nvSpPr>
+          <p:cNvPr id="15" name="직사각형 14">
+            <a:extLst>
+              <a:ext uri="{FF2B5EF4-FFF2-40B4-BE49-F238E27FC236}">
+                <a16:creationId xmlns:a16="http://schemas.microsoft.com/office/drawing/2014/main" id="{41A46C89-4205-C315-B84D-4C2606F679C2}"/>
+              </a:ext>
+            </a:extLst>
+          </p:cNvPr>
+          <p:cNvSpPr/>
+          <p:nvPr/>
+        </p:nvSpPr>
+        <p:spPr>
+          <a:xfrm>
+            <a:off x="7996267" y="2362200"/>
+            <a:ext cx="3575373" cy="4140200"/>
+          </a:xfrm>
+          <a:prstGeom prst="rect">
+            <a:avLst/>
+          </a:prstGeom>
+        </p:spPr>
+        <p:style>
+          <a:lnRef idx="2">
+            <a:schemeClr val="accent1">
+              <a:shade val="15000"/>
+            </a:schemeClr>
+          </a:lnRef>
+          <a:fillRef idx="1">
+            <a:schemeClr val="accent1"/>
+          </a:fillRef>
+          <a:effectRef idx="0">
+            <a:schemeClr val="accent1"/>
+          </a:effectRef>
+          <a:fontRef idx="minor">
+            <a:schemeClr val="lt1"/>
+          </a:fontRef>
+        </p:style>
+        <p:txBody>
+          <a:bodyPr rtlCol="0" anchor="ctr"/>
+          <a:lstStyle/>
+          <a:p>
+            <a:pPr algn="ctr"/>
+            <a:r>
+              <a:rPr lang="en-US" altLang="ko-KR" dirty="0"/>
+              <a:t>Pole To Side Hang</a:t>
+            </a:r>
+            <a:endParaRPr lang="ko-KR" altLang="en-US" dirty="0"/>
+          </a:p>
+        </p:txBody>
+      </p:sp>
+    </p:spTree>
+    <p:extLst>
+      <p:ext uri="{BB962C8B-B14F-4D97-AF65-F5344CB8AC3E}">
+        <p14:creationId xmlns:p14="http://schemas.microsoft.com/office/powerpoint/2010/main" val="3370401814"/>
+      </p:ext>
+    </p:extLst>
+  </p:cSld>
+  <p:clrMapOvr>
+    <a:masterClrMapping/>
+  </p:clrMapOvr>
+</p:sld>
+</file>
+
+<file path=ppt/slides/slide9.xml><?xml version="1.0" encoding="utf-8"?>
+<p:sld xmlns:a="http://schemas.openxmlformats.org/drawingml/2006/main" xmlns:r="http://schemas.openxmlformats.org/officeDocument/2006/relationships" xmlns:p="http://schemas.openxmlformats.org/presentationml/2006/main">
+  <p:cSld>
+    <p:spTree>
+      <p:nvGrpSpPr>
+        <p:cNvPr id="1" name="">
+          <a:extLst>
+            <a:ext uri="{FF2B5EF4-FFF2-40B4-BE49-F238E27FC236}">
+              <a16:creationId xmlns:a16="http://schemas.microsoft.com/office/drawing/2014/main" id="{DB079F37-FB5D-DF82-F33A-226730A42B74}"/>
+            </a:ext>
+          </a:extLst>
+        </p:cNvPr>
+        <p:cNvGrpSpPr/>
+        <p:nvPr/>
+      </p:nvGrpSpPr>
+      <p:grpSpPr>
+        <a:xfrm>
+          <a:off x="0" y="0"/>
+          <a:ext cx="0" cy="0"/>
+          <a:chOff x="0" y="0"/>
+          <a:chExt cx="0" cy="0"/>
+        </a:xfrm>
+      </p:grpSpPr>
+      <p:sp>
+        <p:nvSpPr>
+          <p:cNvPr id="8" name="TextBox 7">
+            <a:extLst>
+              <a:ext uri="{FF2B5EF4-FFF2-40B4-BE49-F238E27FC236}">
+                <a16:creationId xmlns:a16="http://schemas.microsoft.com/office/drawing/2014/main" id="{3D2DB2B5-2DA4-8BF5-1583-88CF4FE2EBBC}"/>
+              </a:ext>
+            </a:extLst>
+          </p:cNvPr>
+          <p:cNvSpPr txBox="1"/>
+          <p:nvPr/>
+        </p:nvSpPr>
+        <p:spPr>
+          <a:xfrm>
+            <a:off x="302451" y="315453"/>
+            <a:ext cx="4944140" cy="369332"/>
+          </a:xfrm>
+          <a:prstGeom prst="rect">
+            <a:avLst/>
+          </a:prstGeom>
+          <a:noFill/>
+        </p:spPr>
+        <p:txBody>
+          <a:bodyPr wrap="square" rtlCol="0">
+            <a:spAutoFit/>
+          </a:bodyPr>
+          <a:lstStyle/>
+          <a:p>
+            <a:r>
+              <a:rPr lang="ko-KR" altLang="en-US" dirty="0">
+                <a:latin typeface="나눔바른고딕" panose="020B0603020101020101" pitchFamily="34" charset="-127"/>
+                <a:ea typeface="나눔바른고딕" panose="020B0603020101020101" pitchFamily="34" charset="-127"/>
+              </a:rPr>
+              <a:t>이번 주 작업 내역</a:t>
+            </a:r>
+            <a:endParaRPr lang="en-US" altLang="ko-KR" dirty="0">
+              <a:latin typeface="나눔바른고딕" panose="020B0603020101020101" pitchFamily="34" charset="-127"/>
+              <a:ea typeface="나눔바른고딕" panose="020B0603020101020101" pitchFamily="34" charset="-127"/>
+            </a:endParaRPr>
+          </a:p>
+        </p:txBody>
+      </p:sp>
+      <p:sp>
+        <p:nvSpPr>
+          <p:cNvPr id="10" name="TextBox 9">
+            <a:extLst>
+              <a:ext uri="{FF2B5EF4-FFF2-40B4-BE49-F238E27FC236}">
+                <a16:creationId xmlns:a16="http://schemas.microsoft.com/office/drawing/2014/main" id="{22CE349F-8415-B927-40A1-901B20F488C1}"/>
+              </a:ext>
+            </a:extLst>
+          </p:cNvPr>
+          <p:cNvSpPr txBox="1"/>
+          <p:nvPr/>
+        </p:nvSpPr>
+        <p:spPr>
+          <a:xfrm>
+            <a:off x="302450" y="1003762"/>
+            <a:ext cx="2694247" cy="338554"/>
+          </a:xfrm>
+          <a:prstGeom prst="rect">
+            <a:avLst/>
+          </a:prstGeom>
+          <a:noFill/>
+        </p:spPr>
+        <p:txBody>
+          <a:bodyPr wrap="square" rtlCol="0">
+            <a:spAutoFit/>
+          </a:bodyPr>
+          <a:lstStyle/>
+          <a:p>
+            <a:r>
+              <a:rPr lang="ko-KR" altLang="en-US" sz="1600" dirty="0">
+                <a:latin typeface="나눔바른고딕" panose="020B0603020101020101" pitchFamily="34" charset="-127"/>
+                <a:ea typeface="나눔바른고딕" panose="020B0603020101020101" pitchFamily="34" charset="-127"/>
+              </a:rPr>
+              <a:t>액션 추가</a:t>
+            </a:r>
+            <a:endParaRPr lang="en-US" altLang="ko-KR" sz="1600" dirty="0">
+              <a:latin typeface="나눔바른고딕" panose="020B0603020101020101" pitchFamily="34" charset="-127"/>
+              <a:ea typeface="나눔바른고딕" panose="020B0603020101020101" pitchFamily="34" charset="-127"/>
+            </a:endParaRPr>
+          </a:p>
+        </p:txBody>
+      </p:sp>
+      <p:cxnSp>
+        <p:nvCxnSpPr>
+          <p:cNvPr id="3" name="직선 연결선 2">
+            <a:extLst>
+              <a:ext uri="{FF2B5EF4-FFF2-40B4-BE49-F238E27FC236}">
+                <a16:creationId xmlns:a16="http://schemas.microsoft.com/office/drawing/2014/main" id="{F90FA9F0-DF07-F50F-F151-D56869541E7A}"/>
+              </a:ext>
+            </a:extLst>
+          </p:cNvPr>
+          <p:cNvCxnSpPr>
+            <a:cxnSpLocks/>
+          </p:cNvCxnSpPr>
+          <p:nvPr/>
+        </p:nvCxnSpPr>
+        <p:spPr>
+          <a:xfrm>
+            <a:off x="387511" y="818707"/>
+            <a:ext cx="11308303" cy="0"/>
+          </a:xfrm>
+          <a:prstGeom prst="line">
+            <a:avLst/>
+          </a:prstGeom>
+          <a:ln>
+            <a:solidFill>
+              <a:schemeClr val="tx2"/>
+            </a:solidFill>
+          </a:ln>
+        </p:spPr>
+        <p:style>
+          <a:lnRef idx="2">
+            <a:schemeClr val="accent1"/>
+          </a:lnRef>
+          <a:fillRef idx="0">
+            <a:schemeClr val="accent1"/>
+          </a:fillRef>
+          <a:effectRef idx="1">
+            <a:schemeClr val="accent1"/>
+          </a:effectRef>
+          <a:fontRef idx="minor">
+            <a:schemeClr val="tx1"/>
+          </a:fontRef>
+        </p:style>
+      </p:cxnSp>
+      <p:sp>
+        <p:nvSpPr>
+          <p:cNvPr id="12" name="직사각형 11">
+            <a:extLst>
+              <a:ext uri="{FF2B5EF4-FFF2-40B4-BE49-F238E27FC236}">
+                <a16:creationId xmlns:a16="http://schemas.microsoft.com/office/drawing/2014/main" id="{38643B37-E2CF-8479-AC63-E0B22268153D}"/>
+              </a:ext>
+            </a:extLst>
+          </p:cNvPr>
+          <p:cNvSpPr/>
+          <p:nvPr/>
+        </p:nvSpPr>
+        <p:spPr>
+          <a:xfrm>
+            <a:off x="10443172" y="118011"/>
+            <a:ext cx="1596912" cy="246221"/>
+          </a:xfrm>
+          <a:prstGeom prst="rect">
+            <a:avLst/>
+          </a:prstGeom>
+        </p:spPr>
+        <p:txBody>
+          <a:bodyPr wrap="none">
+            <a:spAutoFit/>
+          </a:bodyPr>
+          <a:lstStyle/>
+          <a:p>
+            <a:r>
+              <a:rPr lang="ko-KR" altLang="en-US" sz="1000" dirty="0" err="1">
+                <a:solidFill>
+                  <a:schemeClr val="bg1">
+                    <a:lumMod val="75000"/>
+                  </a:schemeClr>
+                </a:solidFill>
+                <a:latin typeface="나눔바른고딕" panose="020B0603020101020101" pitchFamily="34" charset="-127"/>
+                <a:ea typeface="나눔바른고딕" panose="020B0603020101020101" pitchFamily="34" charset="-127"/>
+              </a:rPr>
+              <a:t>펄어비스</a:t>
+            </a:r>
+            <a:r>
+              <a:rPr lang="ko-KR" altLang="en-US" sz="1000" dirty="0">
+                <a:solidFill>
+                  <a:schemeClr val="bg1">
+                    <a:lumMod val="75000"/>
+                  </a:schemeClr>
+                </a:solidFill>
+                <a:latin typeface="나눔바른고딕" panose="020B0603020101020101" pitchFamily="34" charset="-127"/>
+                <a:ea typeface="나눔바른고딕" panose="020B0603020101020101" pitchFamily="34" charset="-127"/>
+              </a:rPr>
+              <a:t> </a:t>
+            </a:r>
+            <a:r>
+              <a:rPr lang="en-US" altLang="ko-KR" sz="1000" dirty="0">
+                <a:solidFill>
+                  <a:schemeClr val="bg1">
+                    <a:lumMod val="75000"/>
+                  </a:schemeClr>
+                </a:solidFill>
+                <a:latin typeface="나눔바른고딕" panose="020B0603020101020101" pitchFamily="34" charset="-127"/>
+                <a:ea typeface="나눔바른고딕" panose="020B0603020101020101" pitchFamily="34" charset="-127"/>
+              </a:rPr>
+              <a:t>2026 </a:t>
+            </a:r>
+            <a:r>
+              <a:rPr lang="ko-KR" altLang="en-US" sz="1000" dirty="0">
+                <a:solidFill>
+                  <a:schemeClr val="bg1">
+                    <a:lumMod val="75000"/>
+                  </a:schemeClr>
+                </a:solidFill>
+                <a:latin typeface="나눔바른고딕" panose="020B0603020101020101" pitchFamily="34" charset="-127"/>
+                <a:ea typeface="나눔바른고딕" panose="020B0603020101020101" pitchFamily="34" charset="-127"/>
+              </a:rPr>
+              <a:t>여름 </a:t>
+            </a:r>
+            <a:r>
+              <a:rPr lang="ko-KR" altLang="en-US" sz="1000" dirty="0" err="1">
+                <a:solidFill>
+                  <a:schemeClr val="bg1">
+                    <a:lumMod val="75000"/>
+                  </a:schemeClr>
+                </a:solidFill>
+                <a:latin typeface="나눔바른고딕" panose="020B0603020101020101" pitchFamily="34" charset="-127"/>
+                <a:ea typeface="나눔바른고딕" panose="020B0603020101020101" pitchFamily="34" charset="-127"/>
+              </a:rPr>
+              <a:t>인턴십</a:t>
+            </a:r>
+            <a:endParaRPr lang="ko-KR" altLang="en-US" sz="1000" dirty="0">
+              <a:solidFill>
+                <a:schemeClr val="bg1">
+                  <a:lumMod val="75000"/>
+                </a:schemeClr>
+              </a:solidFill>
+              <a:latin typeface="나눔바른고딕" panose="020B0603020101020101" pitchFamily="34" charset="-127"/>
+              <a:ea typeface="나눔바른고딕" panose="020B0603020101020101" pitchFamily="34" charset="-127"/>
+            </a:endParaRPr>
+          </a:p>
+        </p:txBody>
+      </p:sp>
+      <p:sp>
+        <p:nvSpPr>
+          <p:cNvPr id="5" name="TextBox 4">
+            <a:extLst>
+              <a:ext uri="{FF2B5EF4-FFF2-40B4-BE49-F238E27FC236}">
+                <a16:creationId xmlns:a16="http://schemas.microsoft.com/office/drawing/2014/main" id="{BA0DFCF6-42F3-B529-987B-1A766B47C813}"/>
+              </a:ext>
+            </a:extLst>
+          </p:cNvPr>
+          <p:cNvSpPr txBox="1"/>
+          <p:nvPr/>
+        </p:nvSpPr>
+        <p:spPr>
+          <a:xfrm>
+            <a:off x="302449" y="1342316"/>
+            <a:ext cx="7464813" cy="346249"/>
+          </a:xfrm>
+          <a:prstGeom prst="rect">
+            <a:avLst/>
+          </a:prstGeom>
+          <a:noFill/>
+        </p:spPr>
+        <p:txBody>
+          <a:bodyPr wrap="square" rtlCol="0">
+            <a:spAutoFit/>
+          </a:bodyPr>
+          <a:lstStyle/>
+          <a:p>
+            <a:pPr>
+              <a:lnSpc>
+                <a:spcPct val="150000"/>
+              </a:lnSpc>
+            </a:pPr>
+            <a:r>
+              <a:rPr lang="ko-KR" altLang="en-US" sz="1200" dirty="0">
+                <a:latin typeface="나눔바른고딕" panose="020B0603020101020101" pitchFamily="34" charset="-127"/>
+                <a:ea typeface="나눔바른고딕" panose="020B0603020101020101" pitchFamily="34" charset="-127"/>
+              </a:rPr>
+              <a:t>절벽 인식</a:t>
+            </a:r>
+            <a:endParaRPr lang="en-US" altLang="ko-KR" sz="1200" dirty="0">
+              <a:latin typeface="나눔바른고딕" panose="020B0603020101020101" pitchFamily="34" charset="-127"/>
+              <a:ea typeface="나눔바른고딕" panose="020B0603020101020101" pitchFamily="34" charset="-127"/>
+            </a:endParaRPr>
+          </a:p>
+        </p:txBody>
+      </p:sp>
+      <p:sp>
+        <p:nvSpPr>
+          <p:cNvPr id="7" name="TextBox 6">
+            <a:extLst>
+              <a:ext uri="{FF2B5EF4-FFF2-40B4-BE49-F238E27FC236}">
+                <a16:creationId xmlns:a16="http://schemas.microsoft.com/office/drawing/2014/main" id="{EFD8541B-F2D5-87DA-95C8-4DE0594F70D9}"/>
+              </a:ext>
+            </a:extLst>
+          </p:cNvPr>
+          <p:cNvSpPr txBox="1"/>
+          <p:nvPr/>
+        </p:nvSpPr>
+        <p:spPr>
+          <a:xfrm>
+            <a:off x="302449" y="1727036"/>
+            <a:ext cx="6520758" cy="765594"/>
+          </a:xfrm>
+          <a:prstGeom prst="rect">
+            <a:avLst/>
+          </a:prstGeom>
+          <a:noFill/>
+        </p:spPr>
+        <p:txBody>
+          <a:bodyPr wrap="square">
+            <a:spAutoFit/>
+          </a:bodyPr>
+          <a:lstStyle/>
+          <a:p>
+            <a:pPr marL="171450" indent="-171450">
+              <a:lnSpc>
+                <a:spcPct val="150000"/>
+              </a:lnSpc>
+              <a:buFont typeface="Arial" panose="020B0604020202020204" pitchFamily="34" charset="0"/>
+              <a:buChar char="•"/>
+            </a:pPr>
+            <a:r>
+              <a:rPr lang="ko-KR" altLang="en-US" sz="1000" dirty="0">
+                <a:latin typeface="나눔바른고딕" panose="020B0603020101020101" pitchFamily="34" charset="-127"/>
+                <a:ea typeface="나눔바른고딕" panose="020B0603020101020101" pitchFamily="34" charset="-127"/>
+              </a:rPr>
+              <a:t>평지 상태에서 계속 위쪽만 </a:t>
+            </a:r>
+            <a:r>
+              <a:rPr lang="ko-KR" altLang="en-US" sz="1000" dirty="0" err="1">
+                <a:latin typeface="나눔바른고딕" panose="020B0603020101020101" pitchFamily="34" charset="-127"/>
+                <a:ea typeface="나눔바른고딕" panose="020B0603020101020101" pitchFamily="34" charset="-127"/>
+              </a:rPr>
+              <a:t>신경쓰고</a:t>
+            </a:r>
+            <a:r>
+              <a:rPr lang="ko-KR" altLang="en-US" sz="1000" dirty="0">
+                <a:latin typeface="나눔바른고딕" panose="020B0603020101020101" pitchFamily="34" charset="-127"/>
+                <a:ea typeface="나눔바른고딕" panose="020B0603020101020101" pitchFamily="34" charset="-127"/>
+              </a:rPr>
+              <a:t> 아래가 </a:t>
+            </a:r>
+            <a:r>
+              <a:rPr lang="ko-KR" altLang="en-US" sz="1000" dirty="0" err="1">
+                <a:latin typeface="나눔바른고딕" panose="020B0603020101020101" pitchFamily="34" charset="-127"/>
+                <a:ea typeface="나눔바른고딕" panose="020B0603020101020101" pitchFamily="34" charset="-127"/>
+              </a:rPr>
+              <a:t>비어있을</a:t>
+            </a:r>
+            <a:r>
+              <a:rPr lang="ko-KR" altLang="en-US" sz="1000" dirty="0">
+                <a:latin typeface="나눔바른고딕" panose="020B0603020101020101" pitchFamily="34" charset="-127"/>
+                <a:ea typeface="나눔바른고딕" panose="020B0603020101020101" pitchFamily="34" charset="-127"/>
+              </a:rPr>
+              <a:t> 때를 상정하지 않음</a:t>
+            </a:r>
+            <a:endParaRPr lang="en-US" altLang="ko-KR" sz="1000" dirty="0">
+              <a:latin typeface="나눔바른고딕" panose="020B0603020101020101" pitchFamily="34" charset="-127"/>
+              <a:ea typeface="나눔바른고딕" panose="020B0603020101020101" pitchFamily="34" charset="-127"/>
+            </a:endParaRPr>
+          </a:p>
+          <a:p>
+            <a:pPr marL="628650" lvl="1" indent="-171450">
+              <a:lnSpc>
+                <a:spcPct val="150000"/>
+              </a:lnSpc>
+              <a:buFont typeface="Arial" panose="020B0604020202020204" pitchFamily="34" charset="0"/>
+              <a:buChar char="•"/>
+            </a:pPr>
+            <a:r>
+              <a:rPr lang="ko-KR" altLang="en-US" sz="1000" dirty="0">
+                <a:latin typeface="나눔바른고딕" panose="020B0603020101020101" pitchFamily="34" charset="-127"/>
+                <a:ea typeface="나눔바른고딕" panose="020B0603020101020101" pitchFamily="34" charset="-127"/>
+              </a:rPr>
+              <a:t>아래가 </a:t>
+            </a:r>
+            <a:r>
+              <a:rPr lang="ko-KR" altLang="en-US" sz="1000" dirty="0" err="1">
+                <a:latin typeface="나눔바른고딕" panose="020B0603020101020101" pitchFamily="34" charset="-127"/>
+                <a:ea typeface="나눔바른고딕" panose="020B0603020101020101" pitchFamily="34" charset="-127"/>
+              </a:rPr>
+              <a:t>비어있으면</a:t>
+            </a:r>
+            <a:r>
+              <a:rPr lang="ko-KR" altLang="en-US" sz="1000" dirty="0">
+                <a:latin typeface="나눔바른고딕" panose="020B0603020101020101" pitchFamily="34" charset="-127"/>
+                <a:ea typeface="나눔바른고딕" panose="020B0603020101020101" pitchFamily="34" charset="-127"/>
+              </a:rPr>
+              <a:t> 자연히 떨어지면 </a:t>
+            </a:r>
+            <a:r>
+              <a:rPr lang="ko-KR" altLang="en-US" sz="1000" dirty="0" err="1">
+                <a:latin typeface="나눔바른고딕" panose="020B0603020101020101" pitchFamily="34" charset="-127"/>
+                <a:ea typeface="나눔바른고딕" panose="020B0603020101020101" pitchFamily="34" charset="-127"/>
+              </a:rPr>
+              <a:t>되겠지라고</a:t>
+            </a:r>
+            <a:r>
+              <a:rPr lang="ko-KR" altLang="en-US" sz="1000" dirty="0">
+                <a:latin typeface="나눔바른고딕" panose="020B0603020101020101" pitchFamily="34" charset="-127"/>
+                <a:ea typeface="나눔바른고딕" panose="020B0603020101020101" pitchFamily="34" charset="-127"/>
+              </a:rPr>
+              <a:t> 생각</a:t>
+            </a:r>
+            <a:endParaRPr lang="en-US" altLang="ko-KR" sz="1000" dirty="0">
+              <a:latin typeface="나눔바른고딕" panose="020B0603020101020101" pitchFamily="34" charset="-127"/>
+              <a:ea typeface="나눔바른고딕" panose="020B0603020101020101" pitchFamily="34" charset="-127"/>
+            </a:endParaRPr>
+          </a:p>
+          <a:p>
+            <a:pPr marL="628650" lvl="1" indent="-171450">
+              <a:lnSpc>
+                <a:spcPct val="150000"/>
+              </a:lnSpc>
+              <a:buFont typeface="Arial" panose="020B0604020202020204" pitchFamily="34" charset="0"/>
+              <a:buChar char="•"/>
+            </a:pPr>
+            <a:r>
+              <a:rPr lang="ko-KR" altLang="en-US" sz="1000" dirty="0">
+                <a:latin typeface="나눔바른고딕" panose="020B0603020101020101" pitchFamily="34" charset="-127"/>
+                <a:ea typeface="나눔바른고딕" panose="020B0603020101020101" pitchFamily="34" charset="-127"/>
+              </a:rPr>
+              <a:t>아래로 매달리고 싶을 수도 있겠다는 것을 지난 주 질의 과정에서 인식하고 반영</a:t>
+            </a:r>
+            <a:endParaRPr lang="en-US" altLang="ko-KR" sz="1000" dirty="0">
+              <a:latin typeface="나눔바른고딕" panose="020B0603020101020101" pitchFamily="34" charset="-127"/>
+              <a:ea typeface="나눔바른고딕" panose="020B0603020101020101" pitchFamily="34" charset="-127"/>
+            </a:endParaRPr>
+          </a:p>
+        </p:txBody>
+      </p:sp>
+      <p:sp>
+        <p:nvSpPr>
+          <p:cNvPr id="11" name="직사각형 10">
+            <a:extLst>
+              <a:ext uri="{FF2B5EF4-FFF2-40B4-BE49-F238E27FC236}">
+                <a16:creationId xmlns:a16="http://schemas.microsoft.com/office/drawing/2014/main" id="{976FF7E3-B511-0618-BD1F-E2E735456EB7}"/>
+              </a:ext>
+            </a:extLst>
+          </p:cNvPr>
+          <p:cNvSpPr/>
+          <p:nvPr/>
+        </p:nvSpPr>
+        <p:spPr>
+          <a:xfrm>
+            <a:off x="4231001" y="3036862"/>
+            <a:ext cx="3575373" cy="3197361"/>
+          </a:xfrm>
+          <a:prstGeom prst="rect">
+            <a:avLst/>
+          </a:prstGeom>
+        </p:spPr>
+        <p:style>
+          <a:lnRef idx="2">
+            <a:schemeClr val="accent1">
+              <a:shade val="15000"/>
+            </a:schemeClr>
+          </a:lnRef>
+          <a:fillRef idx="1">
+            <a:schemeClr val="accent1"/>
+          </a:fillRef>
+          <a:effectRef idx="0">
+            <a:schemeClr val="accent1"/>
+          </a:effectRef>
+          <a:fontRef idx="minor">
+            <a:schemeClr val="lt1"/>
+          </a:fontRef>
+        </p:style>
+        <p:txBody>
+          <a:bodyPr rtlCol="0" anchor="ctr"/>
+          <a:lstStyle/>
+          <a:p>
+            <a:pPr algn="ctr"/>
+            <a:r>
+              <a:rPr lang="ko-KR" altLang="en-US" dirty="0"/>
+              <a:t>기존 </a:t>
+            </a:r>
+            <a:r>
+              <a:rPr lang="ko-KR" altLang="en-US" dirty="0" err="1"/>
+              <a:t>낭떨어지</a:t>
+            </a:r>
+            <a:r>
+              <a:rPr lang="ko-KR" altLang="en-US" dirty="0"/>
+              <a:t> 대체</a:t>
+            </a:r>
+            <a:endParaRPr lang="en-US" altLang="ko-KR" dirty="0"/>
+          </a:p>
+          <a:p>
+            <a:pPr algn="ctr"/>
+            <a:r>
+              <a:rPr lang="ko-KR" altLang="en-US" dirty="0"/>
+              <a:t>그냥 떨어지기</a:t>
+            </a:r>
+          </a:p>
+        </p:txBody>
+      </p:sp>
+      <p:sp>
+        <p:nvSpPr>
+          <p:cNvPr id="16" name="직사각형 15">
+            <a:extLst>
+              <a:ext uri="{FF2B5EF4-FFF2-40B4-BE49-F238E27FC236}">
+                <a16:creationId xmlns:a16="http://schemas.microsoft.com/office/drawing/2014/main" id="{11276EC2-62DB-1F20-0D42-E09ADF32ED93}"/>
+              </a:ext>
+            </a:extLst>
+          </p:cNvPr>
+          <p:cNvSpPr/>
+          <p:nvPr/>
+        </p:nvSpPr>
+        <p:spPr>
+          <a:xfrm>
+            <a:off x="8120441" y="3036862"/>
+            <a:ext cx="3575373" cy="3197361"/>
+          </a:xfrm>
+          <a:prstGeom prst="rect">
+            <a:avLst/>
+          </a:prstGeom>
+        </p:spPr>
+        <p:style>
+          <a:lnRef idx="2">
+            <a:schemeClr val="accent1">
+              <a:shade val="15000"/>
+            </a:schemeClr>
+          </a:lnRef>
+          <a:fillRef idx="1">
+            <a:schemeClr val="accent1"/>
+          </a:fillRef>
+          <a:effectRef idx="0">
+            <a:schemeClr val="accent1"/>
+          </a:effectRef>
+          <a:fontRef idx="minor">
+            <a:schemeClr val="lt1"/>
+          </a:fontRef>
+        </p:style>
+        <p:txBody>
+          <a:bodyPr rtlCol="0" anchor="ctr"/>
+          <a:lstStyle/>
+          <a:p>
+            <a:pPr algn="ctr"/>
+            <a:r>
+              <a:rPr lang="ko-KR" altLang="en-US" dirty="0"/>
+              <a:t>달려 나가기 등등</a:t>
+            </a:r>
+          </a:p>
+        </p:txBody>
+      </p:sp>
+      <p:sp>
+        <p:nvSpPr>
+          <p:cNvPr id="18" name="직사각형 17">
+            <a:extLst>
+              <a:ext uri="{FF2B5EF4-FFF2-40B4-BE49-F238E27FC236}">
+                <a16:creationId xmlns:a16="http://schemas.microsoft.com/office/drawing/2014/main" id="{1FDD87B3-4B30-311F-BB27-32FA109909DE}"/>
+              </a:ext>
+            </a:extLst>
+          </p:cNvPr>
+          <p:cNvSpPr/>
+          <p:nvPr/>
+        </p:nvSpPr>
+        <p:spPr>
+          <a:xfrm>
+            <a:off x="387511" y="3036862"/>
+            <a:ext cx="3575373" cy="3197361"/>
+          </a:xfrm>
+          <a:prstGeom prst="rect">
+            <a:avLst/>
+          </a:prstGeom>
+        </p:spPr>
+        <p:style>
+          <a:lnRef idx="2">
+            <a:schemeClr val="accent1">
+              <a:shade val="15000"/>
+            </a:schemeClr>
+          </a:lnRef>
+          <a:fillRef idx="1">
+            <a:schemeClr val="accent1"/>
+          </a:fillRef>
+          <a:effectRef idx="0">
+            <a:schemeClr val="accent1"/>
+          </a:effectRef>
+          <a:fontRef idx="minor">
+            <a:schemeClr val="lt1"/>
+          </a:fontRef>
+        </p:style>
+        <p:txBody>
+          <a:bodyPr rtlCol="0" anchor="ctr"/>
+          <a:lstStyle/>
+          <a:p>
+            <a:pPr algn="ctr"/>
+            <a:r>
+              <a:rPr lang="ko-KR" altLang="en-US" dirty="0"/>
+              <a:t>기존 인식 도식</a:t>
+            </a:r>
+            <a:endParaRPr lang="en-US" altLang="ko-KR" dirty="0"/>
+          </a:p>
+        </p:txBody>
+      </p:sp>
+    </p:spTree>
+    <p:extLst>
+      <p:ext uri="{BB962C8B-B14F-4D97-AF65-F5344CB8AC3E}">
+        <p14:creationId xmlns:p14="http://schemas.microsoft.com/office/powerpoint/2010/main" val="1348324242"/>
       </p:ext>
     </p:extLst>
   </p:cSld>
